--- a/docs/SystemEarth Business Case Slides.pptx
+++ b/docs/SystemEarth Business Case Slides.pptx
@@ -26,9 +26,11 @@
     <p:sldId id="274" r:id="rId20"/>
     <p:sldId id="275" r:id="rId21"/>
     <p:sldId id="276" r:id="rId22"/>
+    <p:sldId id="277" r:id="rId23"/>
+    <p:sldId id="278" r:id="rId24"/>
   </p:sldIdLst>
   <p:notesMasterIdLst>
-    <p:notesMasterId r:id="rId23"/>
+    <p:notesMasterId r:id="rId25"/>
   </p:notesMasterIdLst>
   <p:sldSz cx="12192000" cy="6858000"/>
   <p:notesSz cx="6858000" cy="12192000"/>
@@ -1708,6 +1710,182 @@
 </p:notes>
 </file>
 
+<file path=ppt/notesSlides/notesSlide22.xml><?xml version="1.0" encoding="utf-8"?>
+<p:notes xmlns:a="http://schemas.openxmlformats.org/drawingml/2006/main" xmlns:r="http://schemas.openxmlformats.org/officeDocument/2006/relationships" xmlns:p="http://schemas.openxmlformats.org/presentationml/2006/main">
+  <p:cSld>
+    <p:spTree>
+      <p:nvGrpSpPr>
+        <p:cNvPr id="1" name=""/>
+        <p:cNvGrpSpPr/>
+        <p:nvPr/>
+      </p:nvGrpSpPr>
+      <p:grpSpPr>
+        <a:xfrm>
+          <a:off x="0" y="0"/>
+          <a:ext cx="0" cy="0"/>
+          <a:chOff x="0" y="0"/>
+          <a:chExt cx="0" cy="0"/>
+        </a:xfrm>
+      </p:grpSpPr>
+      <p:sp>
+        <p:nvSpPr>
+          <p:cNvPr id="2" name="Slide Image Placeholder 1"/>
+          <p:cNvSpPr>
+            <a:spLocks noGrp="1" noRot="1" noChangeAspect="1"/>
+          </p:cNvSpPr>
+          <p:nvPr>
+            <p:ph type="sldImg"/>
+          </p:nvPr>
+        </p:nvSpPr>
+        <p:spPr/>
+      </p:sp>
+      <p:sp>
+        <p:nvSpPr>
+          <p:cNvPr id="3" name="Notes Placeholder 2"/>
+          <p:cNvSpPr>
+            <a:spLocks noGrp="1"/>
+          </p:cNvSpPr>
+          <p:nvPr>
+            <p:ph type="body" idx="1"/>
+          </p:nvPr>
+        </p:nvSpPr>
+        <p:spPr/>
+        <p:txBody>
+          <a:bodyPr/>
+          <a:lstStyle/>
+          <a:p>
+            <a:r>
+              <a:rPr lang="en-US" dirty="0"/>
+              <a:t>Backup slide, show only if asked: “Why DuckDB?” How to say it: “The store is a few small files that only change once per release, so we didn’t want a server. PostGIS would work, but it’s a database that has to run all the time for what are really lookups. Earth Engine is what we’re replacing on the check path: remote, half a second a request, 20 at a time. And plain Python would work too; it’s how our raw-layer pipeline does it. Writing the rules again in SQL gives us a second, independent implementation, and that is what makes the 100% fidelity result mean something.” If pushed on scale: DuckDB runs in-process on one machine. A full national re-check is about 11 CPU-minutes, so one machine is enough; most of the 32 ms is start-up that a long-running service would remove. PostGIS still stays in their stack as the home of plots and lots; we only take the per-check lookups off it.</a:t>
+            </a:r>
+            <a:endParaRPr lang="en-US" dirty="0"/>
+          </a:p>
+        </p:txBody>
+      </p:sp>
+      <p:sp>
+        <p:nvSpPr>
+          <p:cNvPr id="4" name="Slide Number Placeholder 3"/>
+          <p:cNvSpPr>
+            <a:spLocks noGrp="1"/>
+          </p:cNvSpPr>
+          <p:nvPr>
+            <p:ph type="sldNum" sz="quarter" idx="10"/>
+          </p:nvPr>
+        </p:nvSpPr>
+        <p:spPr/>
+        <p:txBody>
+          <a:bodyPr/>
+          <a:lstStyle/>
+          <a:p>
+            <a:fld id="{F7021451-1387-4CA6-816F-3879F97B5CBC}" type="slidenum">
+              <a:rPr lang="en-US"/>
+              <a:t>22</a:t>
+            </a:fld>
+            <a:endParaRPr lang="en-US"/>
+          </a:p>
+        </p:txBody>
+      </p:sp>
+    </p:spTree>
+    <p:extLst>
+      <p:ext uri="{BB962C8B-B14F-4D97-AF65-F5344CB8AC3E}">
+        <p14:creationId xmlns:p14="http://schemas.microsoft.com/office/powerpoint/2010/main" val="1024086991"/>
+      </p:ext>
+    </p:extLst>
+  </p:cSld>
+  <p:clrMapOvr>
+    <a:masterClrMapping/>
+  </p:clrMapOvr>
+</p:notes>
+</file>
+
+<file path=ppt/notesSlides/notesSlide23.xml><?xml version="1.0" encoding="utf-8"?>
+<p:notes xmlns:a="http://schemas.openxmlformats.org/drawingml/2006/main" xmlns:r="http://schemas.openxmlformats.org/officeDocument/2006/relationships" xmlns:p="http://schemas.openxmlformats.org/presentationml/2006/main">
+  <p:cSld>
+    <p:spTree>
+      <p:nvGrpSpPr>
+        <p:cNvPr id="1" name=""/>
+        <p:cNvGrpSpPr/>
+        <p:nvPr/>
+      </p:nvGrpSpPr>
+      <p:grpSpPr>
+        <a:xfrm>
+          <a:off x="0" y="0"/>
+          <a:ext cx="0" cy="0"/>
+          <a:chOff x="0" y="0"/>
+          <a:chExt cx="0" cy="0"/>
+        </a:xfrm>
+      </p:grpSpPr>
+      <p:sp>
+        <p:nvSpPr>
+          <p:cNvPr id="2" name="Slide Image Placeholder 1"/>
+          <p:cNvSpPr>
+            <a:spLocks noGrp="1" noRot="1" noChangeAspect="1"/>
+          </p:cNvSpPr>
+          <p:nvPr>
+            <p:ph type="sldImg"/>
+          </p:nvPr>
+        </p:nvSpPr>
+        <p:spPr/>
+      </p:sp>
+      <p:sp>
+        <p:nvSpPr>
+          <p:cNvPr id="3" name="Notes Placeholder 2"/>
+          <p:cNvSpPr>
+            <a:spLocks noGrp="1"/>
+          </p:cNvSpPr>
+          <p:nvPr>
+            <p:ph type="body" idx="1"/>
+          </p:nvPr>
+        </p:nvSpPr>
+        <p:spPr/>
+        <p:txBody>
+          <a:bodyPr/>
+          <a:lstStyle/>
+          <a:p>
+            <a:r>
+              <a:rPr lang="en-US" dirty="0"/>
+              <a:t>Backup slide, show only if asked: “Why is it so much faster?” Short answer: because the hard work is done before anyone asks, and checks run locally, in bulk. Earth Engine redoes the work on Google’s servers for every request, one request at a time, with at most 20 running at once. One line for the pitch: “Earth Engine redoes the work remotely for every request, 20 at a time. We do it once in advance, keep only what the rule needs, and check every farm locally in one pass, and after an update we only re-check the farms that could have changed.” An everyday comparison, if it helps: Earth Engine is like ordering each dish from a restaurant across town: every order is cooked from scratch, you wait for delivery, and they take only 20 orders at a time. Ours is meal prep at home: ingredients chopped in advance (farm cells at upload), kept in your own fridge (local files), and every dish cooked in one go (one query). After a delivery of new groceries you only remake the dishes that used them (39 of 500). Keep it honest: Earth Engine’s computing per check is small, 0.17 EECU-seconds, about 19 dollars per million checks. Most of its slowness is the round trip, the per-request setup and the 20-request cap, not heavy maths. Batched, Earth Engine is faster, about 16 ms per farm, so about 4.4 hours per million instead of 7; we’re still about 24 times faster. The 11 minutes is extrapolated from 500 farms at 0.67 ms each on one core; it scales linearly and can be split across machines.</a:t>
+            </a:r>
+            <a:endParaRPr lang="en-US" dirty="0"/>
+          </a:p>
+        </p:txBody>
+      </p:sp>
+      <p:sp>
+        <p:nvSpPr>
+          <p:cNvPr id="4" name="Slide Number Placeholder 3"/>
+          <p:cNvSpPr>
+            <a:spLocks noGrp="1"/>
+          </p:cNvSpPr>
+          <p:nvPr>
+            <p:ph type="sldNum" sz="quarter" idx="10"/>
+          </p:nvPr>
+        </p:nvSpPr>
+        <p:spPr/>
+        <p:txBody>
+          <a:bodyPr/>
+          <a:lstStyle/>
+          <a:p>
+            <a:fld id="{F7021451-1387-4CA6-816F-3879F97B5CBC}" type="slidenum">
+              <a:rPr lang="en-US"/>
+              <a:t>23</a:t>
+            </a:fld>
+            <a:endParaRPr lang="en-US"/>
+          </a:p>
+        </p:txBody>
+      </p:sp>
+    </p:spTree>
+    <p:extLst>
+      <p:ext uri="{BB962C8B-B14F-4D97-AF65-F5344CB8AC3E}">
+        <p14:creationId xmlns:p14="http://schemas.microsoft.com/office/powerpoint/2010/main" val="1024086991"/>
+      </p:ext>
+    </p:extLst>
+  </p:cSld>
+  <p:clrMapOvr>
+    <a:masterClrMapping/>
+  </p:clrMapOvr>
+</p:notes>
+</file>
+
 <file path=ppt/notesSlides/notesSlide3.xml><?xml version="1.0" encoding="utf-8"?>
 <p:notes xmlns:a="http://schemas.openxmlformats.org/drawingml/2006/main" xmlns:r="http://schemas.openxmlformats.org/officeDocument/2006/relationships" xmlns:p="http://schemas.openxmlformats.org/presentationml/2006/main">
   <p:cSld>
@@ -2360,7 +2538,7 @@
     <p:bg>
       <p:bgPr>
         <a:solidFill>
-          <a:srgbClr val="F7F5EF"/>
+          <a:srgbClr val="EFEBE0"/>
         </a:solidFill>
       </p:bgPr>
     </p:bg>
@@ -2388,7 +2566,7 @@
         </p:nvSpPr>
         <p:spPr>
           <a:xfrm>
-            <a:off x="812767" y="1102237"/>
+            <a:off x="812767" y="1102233"/>
             <a:ext cx="10566466" cy="446980"/>
           </a:xfrm>
           <a:prstGeom prst="rect">
@@ -2436,8 +2614,8 @@
         </p:nvSpPr>
         <p:spPr>
           <a:xfrm>
-            <a:off x="812767" y="1854017"/>
-            <a:ext cx="10566433" cy="4191183"/>
+            <a:off x="812767" y="1854014"/>
+            <a:ext cx="10566433" cy="4191186"/>
           </a:xfrm>
           <a:prstGeom prst="rect">
             <a:avLst/>
@@ -2488,7 +2666,7 @@
     <p:bg>
       <p:bgPr>
         <a:solidFill>
-          <a:srgbClr val="F7F5EF"/>
+          <a:srgbClr val="EFEBE0"/>
         </a:solidFill>
       </p:bgPr>
     </p:bg>
@@ -2516,7 +2694,7 @@
         </p:nvSpPr>
         <p:spPr>
           <a:xfrm>
-            <a:off x="812767" y="1102237"/>
+            <a:off x="812767" y="1102233"/>
             <a:ext cx="10566466" cy="446980"/>
           </a:xfrm>
           <a:prstGeom prst="rect">
@@ -2564,8 +2742,8 @@
         </p:nvSpPr>
         <p:spPr>
           <a:xfrm>
-            <a:off x="812767" y="1854017"/>
-            <a:ext cx="10566433" cy="4191183"/>
+            <a:off x="812767" y="1854014"/>
+            <a:ext cx="10566433" cy="4191186"/>
           </a:xfrm>
           <a:prstGeom prst="rect">
             <a:avLst/>
@@ -10611,20 +10789,16 @@
         </p:nvSpPr>
         <p:spPr>
           <a:xfrm>
-            <a:off x="815942" y="1806389"/>
-            <a:ext cx="3380317" cy="2127101"/>
-          </a:xfrm>
-          <a:prstGeom prst="roundRect">
-            <a:avLst>
-              <a:gd name="adj" fmla="val 3433"/>
-            </a:avLst>
-          </a:prstGeom>
-          <a:solidFill>
-            <a:srgbClr val="FCFBF7"/>
-          </a:solidFill>
-          <a:ln w="6350">
+            <a:off x="812767" y="1822264"/>
+            <a:ext cx="3285133" cy="0"/>
+          </a:xfrm>
+          <a:prstGeom prst="line">
+            <a:avLst/>
+          </a:prstGeom>
+          <a:noFill/>
+          <a:ln w="38100">
             <a:solidFill>
-              <a:srgbClr val="DDD8CA"/>
+              <a:srgbClr val="17332B"/>
             </a:solidFill>
             <a:prstDash val="solid"/>
           </a:ln>
@@ -10638,8 +10812,8 @@
         </p:nvSpPr>
         <p:spPr>
           <a:xfrm>
-            <a:off x="1021209" y="2011660"/>
-            <a:ext cx="3058876" cy="269230"/>
+            <a:off x="812767" y="1979910"/>
+            <a:ext cx="3383687" cy="284444"/>
           </a:xfrm>
           <a:prstGeom prst="rect">
             <a:avLst/>
@@ -10655,12 +10829,12 @@
           <a:p>
             <a:pPr algn="l" indent="0" marL="0">
               <a:lnSpc>
-                <a:spcPts val="1920"/>
+                <a:spcPts val="2040"/>
               </a:lnSpc>
               <a:buNone/>
             </a:pPr>
             <a:r>
-              <a:rPr lang="en-US" sz="1600" b="1" dirty="0">
+              <a:rPr lang="en-US" sz="1700" b="1" dirty="0">
                 <a:solidFill>
                   <a:srgbClr val="17332B"/>
                 </a:solidFill>
@@ -10670,7 +10844,7 @@
               </a:rPr>
               <a:t>What we chose</a:t>
             </a:r>
-            <a:endParaRPr lang="en-US" sz="1600" dirty="0"/>
+            <a:endParaRPr lang="en-US" sz="1700" dirty="0"/>
           </a:p>
         </p:txBody>
       </p:sp>
@@ -10682,8 +10856,8 @@
         </p:nvSpPr>
         <p:spPr>
           <a:xfrm>
-            <a:off x="1120015" y="2357016"/>
-            <a:ext cx="2952450" cy="1396603"/>
+            <a:off x="812767" y="2353221"/>
+            <a:ext cx="3383687" cy="240043"/>
           </a:xfrm>
           <a:prstGeom prst="rect">
             <a:avLst/>
@@ -10697,122 +10871,456 @@
           </a:bodyPr>
           <a:lstStyle/>
           <a:p>
-            <a:pPr algn="l" marL="155194" indent="-155194">
+            <a:pPr algn="l" indent="0" marL="0">
               <a:lnSpc>
-                <a:spcPts val="1800"/>
+                <a:spcPts val="1690"/>
               </a:lnSpc>
-              <a:buSzPct val="100000"/>
-              <a:buChar char="•"/>
+              <a:buNone/>
             </a:pPr>
             <a:r>
-              <a:rPr lang="en-US" sz="1200" dirty="0">
+              <a:rPr lang="en-US" sz="1300" b="1" dirty="0">
                 <a:solidFill>
-                  <a:srgbClr val="44524B"/>
+                  <a:srgbClr val="17332B"/>
                 </a:solidFill>
                 <a:latin typeface="IBM Plex Sans" pitchFamily="34" charset="0"/>
                 <a:ea typeface="IBM Plex Sans" pitchFamily="34" charset="-122"/>
                 <a:cs typeface="IBM Plex Sans" pitchFamily="34" charset="-120"/>
               </a:rPr>
-              <a:t>Native pixel grid, not H3</a:t>
+              <a:t>The satellite’s own pixel grid</a:t>
             </a:r>
-            <a:endParaRPr lang="en-US" sz="1200" dirty="0"/>
-          </a:p>
-          <a:p>
-            <a:pPr algn="l" marL="155194" indent="-155194">
+            <a:endParaRPr lang="en-US" sz="1300" dirty="0"/>
+          </a:p>
+        </p:txBody>
+      </p:sp>
+      <p:sp>
+        <p:nvSpPr>
+          <p:cNvPr id="7" name="Text 5"/>
+          <p:cNvSpPr/>
+          <p:nvPr/>
+        </p:nvSpPr>
+        <p:spPr>
+          <a:xfrm>
+            <a:off x="812767" y="2580506"/>
+            <a:ext cx="3383687" cy="223424"/>
+          </a:xfrm>
+          <a:prstGeom prst="rect">
+            <a:avLst/>
+          </a:prstGeom>
+          <a:noFill/>
+          <a:ln/>
+        </p:spPr>
+        <p:txBody>
+          <a:bodyPr wrap="square" lIns="0" tIns="0" rIns="0" bIns="0" rtlCol="0" anchor="t">
+            <a:normAutofit/>
+          </a:bodyPr>
+          <a:lstStyle/>
+          <a:p>
+            <a:pPr algn="l" indent="0" marL="0">
               <a:lnSpc>
-                <a:spcPts val="1800"/>
+                <a:spcPts val="1560"/>
               </a:lnSpc>
-              <a:buSzPct val="100000"/>
-              <a:buChar char="•"/>
+              <a:buNone/>
             </a:pPr>
             <a:r>
               <a:rPr lang="en-US" sz="1200" dirty="0">
                 <a:solidFill>
-                  <a:srgbClr val="44524B"/>
+                  <a:srgbClr val="5E6B64"/>
                 </a:solidFill>
                 <a:latin typeface="IBM Plex Sans" pitchFamily="34" charset="0"/>
                 <a:ea typeface="IBM Plex Sans" pitchFamily="34" charset="-122"/>
                 <a:cs typeface="IBM Plex Sans" pitchFamily="34" charset="-120"/>
               </a:rPr>
-              <a:t>16-bit packed base raster</a:t>
+              <a:t>so plot edges match exactly</a:t>
             </a:r>
             <a:endParaRPr lang="en-US" sz="1200" dirty="0"/>
           </a:p>
-          <a:p>
-            <a:pPr algn="l" marL="155194" indent="-155194">
+        </p:txBody>
+      </p:sp>
+      <p:sp>
+        <p:nvSpPr>
+          <p:cNvPr id="8" name="Text 6"/>
+          <p:cNvSpPr/>
+          <p:nvPr/>
+        </p:nvSpPr>
+        <p:spPr>
+          <a:xfrm>
+            <a:off x="812767" y="2892797"/>
+            <a:ext cx="3383687" cy="240043"/>
+          </a:xfrm>
+          <a:prstGeom prst="rect">
+            <a:avLst/>
+          </a:prstGeom>
+          <a:noFill/>
+          <a:ln/>
+        </p:spPr>
+        <p:txBody>
+          <a:bodyPr wrap="square" lIns="0" tIns="0" rIns="0" bIns="0" rtlCol="0" anchor="t">
+            <a:normAutofit/>
+          </a:bodyPr>
+          <a:lstStyle/>
+          <a:p>
+            <a:pPr algn="l" indent="0" marL="0">
               <a:lnSpc>
-                <a:spcPts val="1800"/>
+                <a:spcPts val="1690"/>
               </a:lnSpc>
-              <a:buSzPct val="100000"/>
-              <a:buChar char="•"/>
+              <a:buNone/>
             </a:pPr>
             <a:r>
-              <a:rPr lang="en-US" sz="1200" dirty="0">
+              <a:rPr lang="en-US" sz="1300" b="1" dirty="0">
                 <a:solidFill>
-                  <a:srgbClr val="44524B"/>
+                  <a:srgbClr val="17332B"/>
                 </a:solidFill>
                 <a:latin typeface="IBM Plex Sans" pitchFamily="34" charset="0"/>
                 <a:ea typeface="IBM Plex Sans" pitchFamily="34" charset="-122"/>
                 <a:cs typeface="IBM Plex Sans" pitchFamily="34" charset="-120"/>
               </a:rPr>
-              <a:t>Event log, one file per release</a:t>
+              <a:t>16 bits per cell</a:t>
             </a:r>
-            <a:endParaRPr lang="en-US" sz="1200" dirty="0"/>
-          </a:p>
-          <a:p>
-            <a:pPr algn="l" marL="155194" indent="-155194">
+            <a:endParaRPr lang="en-US" sz="1300" dirty="0"/>
+          </a:p>
+        </p:txBody>
+      </p:sp>
+      <p:sp>
+        <p:nvSpPr>
+          <p:cNvPr id="9" name="Text 7"/>
+          <p:cNvSpPr/>
+          <p:nvPr/>
+        </p:nvSpPr>
+        <p:spPr>
+          <a:xfrm>
+            <a:off x="812767" y="3120095"/>
+            <a:ext cx="3383687" cy="223424"/>
+          </a:xfrm>
+          <a:prstGeom prst="rect">
+            <a:avLst/>
+          </a:prstGeom>
+          <a:noFill/>
+          <a:ln/>
+        </p:spPr>
+        <p:txBody>
+          <a:bodyPr wrap="square" lIns="0" tIns="0" rIns="0" bIns="0" rtlCol="0" anchor="t">
+            <a:normAutofit/>
+          </a:bodyPr>
+          <a:lstStyle/>
+          <a:p>
+            <a:pPr algn="l" indent="0" marL="0">
               <a:lnSpc>
-                <a:spcPts val="1800"/>
+                <a:spcPts val="1560"/>
               </a:lnSpc>
-              <a:buSzPct val="100000"/>
-              <a:buChar char="•"/>
+              <a:buNone/>
             </a:pPr>
             <a:r>
               <a:rPr lang="en-US" sz="1200" dirty="0">
                 <a:solidFill>
-                  <a:srgbClr val="44524B"/>
+                  <a:srgbClr val="5E6B64"/>
                 </a:solidFill>
                 <a:latin typeface="IBM Plex Sans" pitchFamily="34" charset="0"/>
                 <a:ea typeface="IBM Plex Sans" pitchFamily="34" charset="-122"/>
                 <a:cs typeface="IBM Plex Sans" pitchFamily="34" charset="-120"/>
               </a:rPr>
-              <a:t>Run-length plot index</a:t>
+              <a:t>one small read per plot</a:t>
             </a:r>
             <a:endParaRPr lang="en-US" sz="1200" dirty="0"/>
           </a:p>
-          <a:p>
-            <a:pPr algn="l" marL="155194" indent="-155194">
+        </p:txBody>
+      </p:sp>
+      <p:sp>
+        <p:nvSpPr>
+          <p:cNvPr id="10" name="Text 8"/>
+          <p:cNvSpPr/>
+          <p:nvPr/>
+        </p:nvSpPr>
+        <p:spPr>
+          <a:xfrm>
+            <a:off x="812767" y="3432386"/>
+            <a:ext cx="3383687" cy="240043"/>
+          </a:xfrm>
+          <a:prstGeom prst="rect">
+            <a:avLst/>
+          </a:prstGeom>
+          <a:noFill/>
+          <a:ln/>
+        </p:spPr>
+        <p:txBody>
+          <a:bodyPr wrap="square" lIns="0" tIns="0" rIns="0" bIns="0" rtlCol="0" anchor="t">
+            <a:normAutofit/>
+          </a:bodyPr>
+          <a:lstStyle/>
+          <a:p>
+            <a:pPr algn="l" indent="0" marL="0">
               <a:lnSpc>
-                <a:spcPts val="1800"/>
+                <a:spcPts val="1690"/>
               </a:lnSpc>
-              <a:buSzPct val="100000"/>
-              <a:buChar char="•"/>
+              <a:buNone/>
             </a:pPr>
             <a:r>
-              <a:rPr lang="en-US" sz="1200" dirty="0">
+              <a:rPr lang="en-US" sz="1300" b="1" dirty="0">
                 <a:solidFill>
-                  <a:srgbClr val="44524B"/>
+                  <a:srgbClr val="17332B"/>
                 </a:solidFill>
                 <a:latin typeface="IBM Plex Sans" pitchFamily="34" charset="0"/>
                 <a:ea typeface="IBM Plex Sans" pitchFamily="34" charset="-122"/>
                 <a:cs typeface="IBM Plex Sans" pitchFamily="34" charset="-120"/>
               </a:rPr>
-              <a:t>DuckDB, serverless</a:t>
+              <a:t>One small file per data release</a:t>
             </a:r>
-            <a:endParaRPr lang="en-US" sz="1200" dirty="0"/>
-          </a:p>
-          <a:p>
-            <a:pPr algn="l" marL="155194" indent="-155194">
+            <a:endParaRPr lang="en-US" sz="1300" dirty="0"/>
+          </a:p>
+        </p:txBody>
+      </p:sp>
+      <p:sp>
+        <p:nvSpPr>
+          <p:cNvPr id="11" name="Text 9"/>
+          <p:cNvSpPr/>
+          <p:nvPr/>
+        </p:nvSpPr>
+        <p:spPr>
+          <a:xfrm>
+            <a:off x="812767" y="3659684"/>
+            <a:ext cx="3383687" cy="223424"/>
+          </a:xfrm>
+          <a:prstGeom prst="rect">
+            <a:avLst/>
+          </a:prstGeom>
+          <a:noFill/>
+          <a:ln/>
+        </p:spPr>
+        <p:txBody>
+          <a:bodyPr wrap="square" lIns="0" tIns="0" rIns="0" bIns="0" rtlCol="0" anchor="t">
+            <a:normAutofit/>
+          </a:bodyPr>
+          <a:lstStyle/>
+          <a:p>
+            <a:pPr algn="l" indent="0" marL="0">
               <a:lnSpc>
-                <a:spcPts val="1800"/>
+                <a:spcPts val="1560"/>
               </a:lnSpc>
-              <a:buSzPct val="100000"/>
-              <a:buChar char="•"/>
+              <a:buNone/>
             </a:pPr>
             <a:r>
               <a:rPr lang="en-US" sz="1200" dirty="0">
                 <a:solidFill>
-                  <a:srgbClr val="44524B"/>
+                  <a:srgbClr val="5E6B64"/>
+                </a:solidFill>
+                <a:latin typeface="IBM Plex Sans" pitchFamily="34" charset="0"/>
+                <a:ea typeface="IBM Plex Sans" pitchFamily="34" charset="-122"/>
+                <a:cs typeface="IBM Plex Sans" pitchFamily="34" charset="-120"/>
+              </a:rPr>
+              <a:t>re-check only what changed</a:t>
+            </a:r>
+            <a:endParaRPr lang="en-US" sz="1200" dirty="0"/>
+          </a:p>
+        </p:txBody>
+      </p:sp>
+      <p:sp>
+        <p:nvSpPr>
+          <p:cNvPr id="12" name="Text 10"/>
+          <p:cNvSpPr/>
+          <p:nvPr/>
+        </p:nvSpPr>
+        <p:spPr>
+          <a:xfrm>
+            <a:off x="812767" y="3971975"/>
+            <a:ext cx="3383687" cy="240043"/>
+          </a:xfrm>
+          <a:prstGeom prst="rect">
+            <a:avLst/>
+          </a:prstGeom>
+          <a:noFill/>
+          <a:ln/>
+        </p:spPr>
+        <p:txBody>
+          <a:bodyPr wrap="square" lIns="0" tIns="0" rIns="0" bIns="0" rtlCol="0" anchor="t">
+            <a:normAutofit/>
+          </a:bodyPr>
+          <a:lstStyle/>
+          <a:p>
+            <a:pPr algn="l" indent="0" marL="0">
+              <a:lnSpc>
+                <a:spcPts val="1690"/>
+              </a:lnSpc>
+              <a:buNone/>
+            </a:pPr>
+            <a:r>
+              <a:rPr lang="en-US" sz="1300" b="1" dirty="0">
+                <a:solidFill>
+                  <a:srgbClr val="17332B"/>
+                </a:solidFill>
+                <a:latin typeface="IBM Plex Sans" pitchFamily="34" charset="0"/>
+                <a:ea typeface="IBM Plex Sans" pitchFamily="34" charset="-122"/>
+                <a:cs typeface="IBM Plex Sans" pitchFamily="34" charset="-120"/>
+              </a:rPr>
+              <a:t>Plots stored as cell runs</a:t>
+            </a:r>
+            <a:endParaRPr lang="en-US" sz="1300" dirty="0"/>
+          </a:p>
+        </p:txBody>
+      </p:sp>
+      <p:sp>
+        <p:nvSpPr>
+          <p:cNvPr id="13" name="Text 11"/>
+          <p:cNvSpPr/>
+          <p:nvPr/>
+        </p:nvSpPr>
+        <p:spPr>
+          <a:xfrm>
+            <a:off x="812767" y="4199260"/>
+            <a:ext cx="3383687" cy="223424"/>
+          </a:xfrm>
+          <a:prstGeom prst="rect">
+            <a:avLst/>
+          </a:prstGeom>
+          <a:noFill/>
+          <a:ln/>
+        </p:spPr>
+        <p:txBody>
+          <a:bodyPr wrap="square" lIns="0" tIns="0" rIns="0" bIns="0" rtlCol="0" anchor="t">
+            <a:normAutofit/>
+          </a:bodyPr>
+          <a:lstStyle/>
+          <a:p>
+            <a:pPr algn="l" indent="0" marL="0">
+              <a:lnSpc>
+                <a:spcPts val="1560"/>
+              </a:lnSpc>
+              <a:buNone/>
+            </a:pPr>
+            <a:r>
+              <a:rPr lang="en-US" sz="1200" dirty="0">
+                <a:solidFill>
+                  <a:srgbClr val="5E6B64"/>
+                </a:solidFill>
+                <a:latin typeface="IBM Plex Sans" pitchFamily="34" charset="0"/>
+                <a:ea typeface="IBM Plex Sans" pitchFamily="34" charset="-122"/>
+                <a:cs typeface="IBM Plex Sans" pitchFamily="34" charset="-120"/>
+              </a:rPr>
+              <a:t>no geometry at check time</a:t>
+            </a:r>
+            <a:endParaRPr lang="en-US" sz="1200" dirty="0"/>
+          </a:p>
+        </p:txBody>
+      </p:sp>
+      <p:sp>
+        <p:nvSpPr>
+          <p:cNvPr id="14" name="Text 12"/>
+          <p:cNvSpPr/>
+          <p:nvPr/>
+        </p:nvSpPr>
+        <p:spPr>
+          <a:xfrm>
+            <a:off x="812767" y="4511551"/>
+            <a:ext cx="3383687" cy="240043"/>
+          </a:xfrm>
+          <a:prstGeom prst="rect">
+            <a:avLst/>
+          </a:prstGeom>
+          <a:noFill/>
+          <a:ln/>
+        </p:spPr>
+        <p:txBody>
+          <a:bodyPr wrap="square" lIns="0" tIns="0" rIns="0" bIns="0" rtlCol="0" anchor="t">
+            <a:normAutofit/>
+          </a:bodyPr>
+          <a:lstStyle/>
+          <a:p>
+            <a:pPr algn="l" indent="0" marL="0">
+              <a:lnSpc>
+                <a:spcPts val="1690"/>
+              </a:lnSpc>
+              <a:buNone/>
+            </a:pPr>
+            <a:r>
+              <a:rPr lang="en-US" sz="1300" b="1" dirty="0">
+                <a:solidFill>
+                  <a:srgbClr val="17332B"/>
+                </a:solidFill>
+                <a:latin typeface="IBM Plex Sans" pitchFamily="34" charset="0"/>
+                <a:ea typeface="IBM Plex Sans" pitchFamily="34" charset="-122"/>
+                <a:cs typeface="IBM Plex Sans" pitchFamily="34" charset="-120"/>
+              </a:rPr>
+              <a:t>DuckDB on plain files</a:t>
+            </a:r>
+            <a:endParaRPr lang="en-US" sz="1300" dirty="0"/>
+          </a:p>
+        </p:txBody>
+      </p:sp>
+      <p:sp>
+        <p:nvSpPr>
+          <p:cNvPr id="15" name="Text 13"/>
+          <p:cNvSpPr/>
+          <p:nvPr/>
+        </p:nvSpPr>
+        <p:spPr>
+          <a:xfrm>
+            <a:off x="812767" y="4738849"/>
+            <a:ext cx="3383687" cy="223424"/>
+          </a:xfrm>
+          <a:prstGeom prst="rect">
+            <a:avLst/>
+          </a:prstGeom>
+          <a:noFill/>
+          <a:ln/>
+        </p:spPr>
+        <p:txBody>
+          <a:bodyPr wrap="square" lIns="0" tIns="0" rIns="0" bIns="0" rtlCol="0" anchor="t">
+            <a:normAutofit/>
+          </a:bodyPr>
+          <a:lstStyle/>
+          <a:p>
+            <a:pPr algn="l" indent="0" marL="0">
+              <a:lnSpc>
+                <a:spcPts val="1560"/>
+              </a:lnSpc>
+              <a:buNone/>
+            </a:pPr>
+            <a:r>
+              <a:rPr lang="en-US" sz="1200" dirty="0">
+                <a:solidFill>
+                  <a:srgbClr val="5E6B64"/>
+                </a:solidFill>
+                <a:latin typeface="IBM Plex Sans" pitchFamily="34" charset="0"/>
+                <a:ea typeface="IBM Plex Sans" pitchFamily="34" charset="-122"/>
+                <a:cs typeface="IBM Plex Sans" pitchFamily="34" charset="-120"/>
+              </a:rPr>
+              <a:t>no server to run</a:t>
+            </a:r>
+            <a:endParaRPr lang="en-US" sz="1200" dirty="0"/>
+          </a:p>
+        </p:txBody>
+      </p:sp>
+      <p:sp>
+        <p:nvSpPr>
+          <p:cNvPr id="16" name="Text 14"/>
+          <p:cNvSpPr/>
+          <p:nvPr/>
+        </p:nvSpPr>
+        <p:spPr>
+          <a:xfrm>
+            <a:off x="812767" y="5051140"/>
+            <a:ext cx="3383687" cy="240043"/>
+          </a:xfrm>
+          <a:prstGeom prst="rect">
+            <a:avLst/>
+          </a:prstGeom>
+          <a:noFill/>
+          <a:ln/>
+        </p:spPr>
+        <p:txBody>
+          <a:bodyPr wrap="square" lIns="0" tIns="0" rIns="0" bIns="0" rtlCol="0" anchor="t">
+            <a:normAutofit/>
+          </a:bodyPr>
+          <a:lstStyle/>
+          <a:p>
+            <a:pPr algn="l" indent="0" marL="0">
+              <a:lnSpc>
+                <a:spcPts val="1690"/>
+              </a:lnSpc>
+              <a:buNone/>
+            </a:pPr>
+            <a:r>
+              <a:rPr lang="en-US" sz="1300" b="1" dirty="0">
+                <a:solidFill>
+                  <a:srgbClr val="17332B"/>
                 </a:solidFill>
                 <a:latin typeface="IBM Plex Sans" pitchFamily="34" charset="0"/>
                 <a:ea typeface="IBM Plex Sans" pitchFamily="34" charset="-122"/>
@@ -10820,47 +11328,20 @@
               </a:rPr>
               <a:t>Thresholds as settings</a:t>
             </a:r>
-            <a:endParaRPr lang="en-US" sz="1200" dirty="0"/>
-          </a:p>
-        </p:txBody>
-      </p:sp>
-      <p:sp>
-        <p:nvSpPr>
-          <p:cNvPr id="7" name="Shape 5"/>
-          <p:cNvSpPr/>
-          <p:nvPr/>
-        </p:nvSpPr>
-        <p:spPr>
-          <a:xfrm>
-            <a:off x="4405759" y="1806389"/>
-            <a:ext cx="3380399" cy="2127101"/>
-          </a:xfrm>
-          <a:prstGeom prst="roundRect">
-            <a:avLst>
-              <a:gd name="adj" fmla="val 3433"/>
-            </a:avLst>
-          </a:prstGeom>
-          <a:solidFill>
-            <a:srgbClr val="FCFBF7"/>
-          </a:solidFill>
-          <a:ln w="6350">
-            <a:solidFill>
-              <a:srgbClr val="DDD8CA"/>
-            </a:solidFill>
-            <a:prstDash val="solid"/>
-          </a:ln>
-        </p:spPr>
-      </p:sp>
-      <p:sp>
-        <p:nvSpPr>
-          <p:cNvPr id="8" name="Text 6"/>
-          <p:cNvSpPr/>
-          <p:nvPr/>
-        </p:nvSpPr>
-        <p:spPr>
-          <a:xfrm>
-            <a:off x="4611026" y="2011660"/>
-            <a:ext cx="3058961" cy="269230"/>
+            <a:endParaRPr lang="en-US" sz="1300" dirty="0"/>
+          </a:p>
+        </p:txBody>
+      </p:sp>
+      <p:sp>
+        <p:nvSpPr>
+          <p:cNvPr id="17" name="Text 15"/>
+          <p:cNvSpPr/>
+          <p:nvPr/>
+        </p:nvSpPr>
+        <p:spPr>
+          <a:xfrm>
+            <a:off x="812767" y="5278438"/>
+            <a:ext cx="3383687" cy="223424"/>
           </a:xfrm>
           <a:prstGeom prst="rect">
             <a:avLst/>
@@ -10876,12 +11357,79 @@
           <a:p>
             <a:pPr algn="l" indent="0" marL="0">
               <a:lnSpc>
-                <a:spcPts val="1920"/>
+                <a:spcPts val="1560"/>
               </a:lnSpc>
               <a:buNone/>
             </a:pPr>
             <a:r>
-              <a:rPr lang="en-US" sz="1600" b="1" dirty="0">
+              <a:rPr lang="en-US" sz="1200" dirty="0">
+                <a:solidFill>
+                  <a:srgbClr val="5E6B64"/>
+                </a:solidFill>
+                <a:latin typeface="IBM Plex Sans" pitchFamily="34" charset="0"/>
+                <a:ea typeface="IBM Plex Sans" pitchFamily="34" charset="-122"/>
+                <a:cs typeface="IBM Plex Sans" pitchFamily="34" charset="-120"/>
+              </a:rPr>
+              <a:t>Compliant plots held across 12 settings</a:t>
+            </a:r>
+            <a:endParaRPr lang="en-US" sz="1200" dirty="0"/>
+          </a:p>
+        </p:txBody>
+      </p:sp>
+      <p:sp>
+        <p:nvSpPr>
+          <p:cNvPr id="18" name="Shape 16"/>
+          <p:cNvSpPr/>
+          <p:nvPr/>
+        </p:nvSpPr>
+        <p:spPr>
+          <a:xfrm>
+            <a:off x="4453434" y="1822264"/>
+            <a:ext cx="3285133" cy="0"/>
+          </a:xfrm>
+          <a:prstGeom prst="line">
+            <a:avLst/>
+          </a:prstGeom>
+          <a:noFill/>
+          <a:ln w="38100">
+            <a:solidFill>
+              <a:srgbClr val="C2652A"/>
+            </a:solidFill>
+            <a:prstDash val="solid"/>
+          </a:ln>
+        </p:spPr>
+      </p:sp>
+      <p:sp>
+        <p:nvSpPr>
+          <p:cNvPr id="19" name="Text 17"/>
+          <p:cNvSpPr/>
+          <p:nvPr/>
+        </p:nvSpPr>
+        <p:spPr>
+          <a:xfrm>
+            <a:off x="4453434" y="1979910"/>
+            <a:ext cx="3383687" cy="284444"/>
+          </a:xfrm>
+          <a:prstGeom prst="rect">
+            <a:avLst/>
+          </a:prstGeom>
+          <a:noFill/>
+          <a:ln/>
+        </p:spPr>
+        <p:txBody>
+          <a:bodyPr wrap="square" lIns="0" tIns="0" rIns="0" bIns="0" rtlCol="0" anchor="t">
+            <a:normAutofit/>
+          </a:bodyPr>
+          <a:lstStyle/>
+          <a:p>
+            <a:pPr algn="l" indent="0" marL="0">
+              <a:lnSpc>
+                <a:spcPts val="2040"/>
+              </a:lnSpc>
+              <a:buNone/>
+            </a:pPr>
+            <a:r>
+              <a:rPr lang="en-US" sz="1700" b="1" dirty="0">
                 <a:solidFill>
                   <a:srgbClr val="17332B"/>
                 </a:solidFill>
@@ -10889,22 +11437,22 @@
                 <a:ea typeface="IBM Plex Sans" pitchFamily="34" charset="-122"/>
                 <a:cs typeface="IBM Plex Sans" pitchFamily="34" charset="-120"/>
               </a:rPr>
-              <a:t>Limits</a:t>
+              <a:t>Where it stops</a:t>
             </a:r>
-            <a:endParaRPr lang="en-US" sz="1600" dirty="0"/>
-          </a:p>
-        </p:txBody>
-      </p:sp>
-      <p:sp>
-        <p:nvSpPr>
-          <p:cNvPr id="9" name="Text 7"/>
-          <p:cNvSpPr/>
-          <p:nvPr/>
-        </p:nvSpPr>
-        <p:spPr>
-          <a:xfrm>
-            <a:off x="4709832" y="2357016"/>
-            <a:ext cx="2952535" cy="1168069"/>
+            <a:endParaRPr lang="en-US" sz="1700" dirty="0"/>
+          </a:p>
+        </p:txBody>
+      </p:sp>
+      <p:sp>
+        <p:nvSpPr>
+          <p:cNvPr id="20" name="Text 18"/>
+          <p:cNvSpPr/>
+          <p:nvPr/>
+        </p:nvSpPr>
+        <p:spPr>
+          <a:xfrm>
+            <a:off x="4453434" y="2353221"/>
+            <a:ext cx="3383687" cy="240043"/>
           </a:xfrm>
           <a:prstGeom prst="rect">
             <a:avLst/>
@@ -10918,170 +11466,14 @@
           </a:bodyPr>
           <a:lstStyle/>
           <a:p>
-            <a:pPr algn="l" marL="155194" indent="-155194">
-              <a:lnSpc>
-                <a:spcPts val="1800"/>
-              </a:lnSpc>
-              <a:buSzPct val="100000"/>
-              <a:buChar char="•"/>
-            </a:pPr>
-            <a:r>
-              <a:rPr lang="en-US" sz="1200" dirty="0">
-                <a:solidFill>
-                  <a:srgbClr val="44524B"/>
-                </a:solidFill>
-                <a:latin typeface="IBM Plex Sans" pitchFamily="34" charset="0"/>
-                <a:ea typeface="IBM Plex Sans" pitchFamily="34" charset="-122"/>
-                <a:cs typeface="IBM Plex Sans" pitchFamily="34" charset="-120"/>
-              </a:rPr>
-              <a:t>Store is specific to today’s rules</a:t>
-            </a:r>
-            <a:endParaRPr lang="en-US" sz="1200" dirty="0"/>
-          </a:p>
-          <a:p>
-            <a:pPr algn="l" marL="155194" indent="-155194">
-              <a:lnSpc>
-                <a:spcPts val="1800"/>
-              </a:lnSpc>
-              <a:buSzPct val="100000"/>
-              <a:buChar char="•"/>
-            </a:pPr>
-            <a:r>
-              <a:rPr lang="en-US" sz="1200" dirty="0">
-                <a:solidFill>
-                  <a:srgbClr val="44524B"/>
-                </a:solidFill>
-                <a:latin typeface="IBM Plex Sans" pitchFamily="34" charset="0"/>
-                <a:ea typeface="IBM Plex Sans" pitchFamily="34" charset="-122"/>
-                <a:cs typeface="IBM Plex Sans" pitchFamily="34" charset="-120"/>
-              </a:rPr>
-              <a:t>Synthetic plots</a:t>
-            </a:r>
-            <a:endParaRPr lang="en-US" sz="1200" dirty="0"/>
-          </a:p>
-          <a:p>
-            <a:pPr algn="l" marL="155194" indent="-155194">
-              <a:lnSpc>
-                <a:spcPts val="1800"/>
-              </a:lnSpc>
-              <a:buSzPct val="100000"/>
-              <a:buChar char="•"/>
-            </a:pPr>
-            <a:r>
-              <a:rPr lang="en-US" sz="1200" dirty="0">
-                <a:solidFill>
-                  <a:srgbClr val="44524B"/>
-                </a:solidFill>
-                <a:latin typeface="IBM Plex Sans" pitchFamily="34" charset="0"/>
-                <a:ea typeface="IBM Plex Sans" pitchFamily="34" charset="-122"/>
-                <a:cs typeface="IBM Plex Sans" pitchFamily="34" charset="-120"/>
-              </a:rPr>
-              <a:t>One 50 km area; per-km² figures scale</a:t>
-            </a:r>
-            <a:endParaRPr lang="en-US" sz="1200" dirty="0"/>
-          </a:p>
-          <a:p>
-            <a:pPr algn="l" marL="155194" indent="-155194">
-              <a:lnSpc>
-                <a:spcPts val="1800"/>
-              </a:lnSpc>
-              <a:buSzPct val="100000"/>
-              <a:buChar char="•"/>
-            </a:pPr>
-            <a:r>
-              <a:rPr lang="en-US" sz="1200" dirty="0">
-                <a:solidFill>
-                  <a:srgbClr val="44524B"/>
-                </a:solidFill>
-                <a:latin typeface="IBM Plex Sans" pitchFamily="34" charset="0"/>
-                <a:ea typeface="IBM Plex Sans" pitchFamily="34" charset="-122"/>
-                <a:cs typeface="IBM Plex Sans" pitchFamily="34" charset="-120"/>
-              </a:rPr>
-              <a:t>Alert retractions designed, not built</a:t>
-            </a:r>
-            <a:endParaRPr lang="en-US" sz="1200" dirty="0"/>
-          </a:p>
-          <a:p>
-            <a:pPr algn="l" marL="155194" indent="-155194">
-              <a:lnSpc>
-                <a:spcPts val="1800"/>
-              </a:lnSpc>
-              <a:buSzPct val="100000"/>
-              <a:buChar char="•"/>
-            </a:pPr>
-            <a:r>
-              <a:rPr lang="en-US" sz="1200" dirty="0">
-                <a:solidFill>
-                  <a:srgbClr val="44524B"/>
-                </a:solidFill>
-                <a:latin typeface="IBM Plex Sans" pitchFamily="34" charset="0"/>
-                <a:ea typeface="IBM Plex Sans" pitchFamily="34" charset="-122"/>
-                <a:cs typeface="IBM Plex Sans" pitchFamily="34" charset="-120"/>
-              </a:rPr>
-              <a:t>Prices approximate</a:t>
-            </a:r>
-            <a:endParaRPr lang="en-US" sz="1200" dirty="0"/>
-          </a:p>
-        </p:txBody>
-      </p:sp>
-      <p:sp>
-        <p:nvSpPr>
-          <p:cNvPr id="10" name="Shape 8"/>
-          <p:cNvSpPr/>
-          <p:nvPr/>
-        </p:nvSpPr>
-        <p:spPr>
-          <a:xfrm>
-            <a:off x="7995658" y="1806389"/>
-            <a:ext cx="3380399" cy="2127101"/>
-          </a:xfrm>
-          <a:prstGeom prst="roundRect">
-            <a:avLst>
-              <a:gd name="adj" fmla="val 3433"/>
-            </a:avLst>
-          </a:prstGeom>
-          <a:solidFill>
-            <a:srgbClr val="FCFBF7"/>
-          </a:solidFill>
-          <a:ln w="6350">
-            <a:solidFill>
-              <a:srgbClr val="DDD8CA"/>
-            </a:solidFill>
-            <a:prstDash val="solid"/>
-          </a:ln>
-        </p:spPr>
-      </p:sp>
-      <p:sp>
-        <p:nvSpPr>
-          <p:cNvPr id="11" name="Text 9"/>
-          <p:cNvSpPr/>
-          <p:nvPr/>
-        </p:nvSpPr>
-        <p:spPr>
-          <a:xfrm>
-            <a:off x="8200926" y="2011660"/>
-            <a:ext cx="3058961" cy="269230"/>
-          </a:xfrm>
-          <a:prstGeom prst="rect">
-            <a:avLst/>
-          </a:prstGeom>
-          <a:noFill/>
-          <a:ln/>
-        </p:spPr>
-        <p:txBody>
-          <a:bodyPr wrap="square" lIns="0" tIns="0" rIns="0" bIns="0" rtlCol="0" anchor="t">
-            <a:normAutofit/>
-          </a:bodyPr>
-          <a:lstStyle/>
-          <a:p>
             <a:pPr algn="l" indent="0" marL="0">
               <a:lnSpc>
-                <a:spcPts val="1920"/>
+                <a:spcPts val="1690"/>
               </a:lnSpc>
               <a:buNone/>
             </a:pPr>
             <a:r>
-              <a:rPr lang="en-US" sz="1600" b="1" dirty="0">
+              <a:rPr lang="en-US" sz="1300" b="1" dirty="0">
                 <a:solidFill>
                   <a:srgbClr val="17332B"/>
                 </a:solidFill>
@@ -11089,22 +11481,22 @@
                 <a:ea typeface="IBM Plex Sans" pitchFamily="34" charset="-122"/>
                 <a:cs typeface="IBM Plex Sans" pitchFamily="34" charset="-120"/>
               </a:rPr>
-              <a:t>Migration path</a:t>
+              <a:t>Today’s rule only</a:t>
             </a:r>
-            <a:endParaRPr lang="en-US" sz="1600" dirty="0"/>
-          </a:p>
-        </p:txBody>
-      </p:sp>
-      <p:sp>
-        <p:nvSpPr>
-          <p:cNvPr id="12" name="Text 10"/>
-          <p:cNvSpPr/>
-          <p:nvPr/>
-        </p:nvSpPr>
-        <p:spPr>
-          <a:xfrm>
-            <a:off x="8286006" y="2357016"/>
-            <a:ext cx="2966261" cy="939535"/>
+            <a:endParaRPr lang="en-US" sz="1300" dirty="0"/>
+          </a:p>
+        </p:txBody>
+      </p:sp>
+      <p:sp>
+        <p:nvSpPr>
+          <p:cNvPr id="21" name="Text 19"/>
+          <p:cNvSpPr/>
+          <p:nvPr/>
+        </p:nvSpPr>
+        <p:spPr>
+          <a:xfrm>
+            <a:off x="4453434" y="2580506"/>
+            <a:ext cx="3383687" cy="223424"/>
           </a:xfrm>
           <a:prstGeom prst="rect">
             <a:avLst/>
@@ -11118,90 +11510,198 @@
           </a:bodyPr>
           <a:lstStyle/>
           <a:p>
-            <a:pPr algn="l" marL="168920" indent="-168920">
+            <a:pPr algn="l" indent="0" marL="0">
               <a:lnSpc>
-                <a:spcPts val="1800"/>
+                <a:spcPts val="1560"/>
               </a:lnSpc>
-              <a:buSzPct val="100000"/>
-              <a:buFontTx/>
-              <a:buAutoNum type="arabicPeriod" startAt="1"/>
+              <a:buNone/>
             </a:pPr>
             <a:r>
               <a:rPr lang="en-US" sz="1200" dirty="0">
                 <a:solidFill>
-                  <a:srgbClr val="44524B"/>
+                  <a:srgbClr val="5E6B64"/>
                 </a:solidFill>
                 <a:latin typeface="IBM Plex Sans" pitchFamily="34" charset="0"/>
                 <a:ea typeface="IBM Plex Sans" pitchFamily="34" charset="-122"/>
                 <a:cs typeface="IBM Plex Sans" pitchFamily="34" charset="-120"/>
               </a:rPr>
-              <a:t>Run alongside the Earth Engine checks</a:t>
+              <a:t>new questions mean re-extracting</a:t>
             </a:r>
             <a:endParaRPr lang="en-US" sz="1200" dirty="0"/>
           </a:p>
-          <a:p>
-            <a:pPr algn="l" marL="168920" indent="-168920">
+        </p:txBody>
+      </p:sp>
+      <p:sp>
+        <p:nvSpPr>
+          <p:cNvPr id="22" name="Text 20"/>
+          <p:cNvSpPr/>
+          <p:nvPr/>
+        </p:nvSpPr>
+        <p:spPr>
+          <a:xfrm>
+            <a:off x="4453434" y="2892797"/>
+            <a:ext cx="3383687" cy="240043"/>
+          </a:xfrm>
+          <a:prstGeom prst="rect">
+            <a:avLst/>
+          </a:prstGeom>
+          <a:noFill/>
+          <a:ln/>
+        </p:spPr>
+        <p:txBody>
+          <a:bodyPr wrap="square" lIns="0" tIns="0" rIns="0" bIns="0" rtlCol="0" anchor="t">
+            <a:normAutofit/>
+          </a:bodyPr>
+          <a:lstStyle/>
+          <a:p>
+            <a:pPr algn="l" indent="0" marL="0">
               <a:lnSpc>
-                <a:spcPts val="1800"/>
+                <a:spcPts val="1690"/>
               </a:lnSpc>
-              <a:buSzPct val="100000"/>
-              <a:buFontTx/>
-              <a:buAutoNum type="arabicPeriod" startAt="1"/>
+              <a:buNone/>
             </a:pPr>
             <a:r>
-              <a:rPr lang="en-US" sz="1200" dirty="0">
+              <a:rPr lang="en-US" sz="1300" b="1" dirty="0">
                 <a:solidFill>
-                  <a:srgbClr val="44524B"/>
+                  <a:srgbClr val="17332B"/>
                 </a:solidFill>
                 <a:latin typeface="IBM Plex Sans" pitchFamily="34" charset="0"/>
                 <a:ea typeface="IBM Plex Sans" pitchFamily="34" charset="-122"/>
                 <a:cs typeface="IBM Plex Sans" pitchFamily="34" charset="-120"/>
               </a:rPr>
-              <a:t>Compare verdicts plot by plot</a:t>
+              <a:t>Simulated test plots</a:t>
             </a:r>
-            <a:endParaRPr lang="en-US" sz="1200" dirty="0"/>
-          </a:p>
-          <a:p>
-            <a:pPr algn="l" marL="168920" indent="-168920">
+            <a:endParaRPr lang="en-US" sz="1300" dirty="0"/>
+          </a:p>
+        </p:txBody>
+      </p:sp>
+      <p:sp>
+        <p:nvSpPr>
+          <p:cNvPr id="23" name="Text 21"/>
+          <p:cNvSpPr/>
+          <p:nvPr/>
+        </p:nvSpPr>
+        <p:spPr>
+          <a:xfrm>
+            <a:off x="4453434" y="3120095"/>
+            <a:ext cx="3383687" cy="223424"/>
+          </a:xfrm>
+          <a:prstGeom prst="rect">
+            <a:avLst/>
+          </a:prstGeom>
+          <a:noFill/>
+          <a:ln/>
+        </p:spPr>
+        <p:txBody>
+          <a:bodyPr wrap="square" lIns="0" tIns="0" rIns="0" bIns="0" rtlCol="0" anchor="t">
+            <a:normAutofit/>
+          </a:bodyPr>
+          <a:lstStyle/>
+          <a:p>
+            <a:pPr algn="l" indent="0" marL="0">
               <a:lnSpc>
-                <a:spcPts val="1800"/>
+                <a:spcPts val="1560"/>
               </a:lnSpc>
-              <a:buSzPct val="100000"/>
-              <a:buFontTx/>
-              <a:buAutoNum type="arabicPeriod" startAt="1"/>
+              <a:buNone/>
             </a:pPr>
             <a:r>
               <a:rPr lang="en-US" sz="1200" dirty="0">
                 <a:solidFill>
-                  <a:srgbClr val="44524B"/>
+                  <a:srgbClr val="5E6B64"/>
                 </a:solidFill>
                 <a:latin typeface="IBM Plex Sans" pitchFamily="34" charset="0"/>
                 <a:ea typeface="IBM Plex Sans" pitchFamily="34" charset="-122"/>
                 <a:cs typeface="IBM Plex Sans" pitchFamily="34" charset="-120"/>
               </a:rPr>
-              <a:t>Switch re-checks to the compact store</a:t>
+              <a:t>no field data yet</a:t>
             </a:r>
             <a:endParaRPr lang="en-US" sz="1200" dirty="0"/>
           </a:p>
-          <a:p>
-            <a:pPr algn="l" marL="168920" indent="-168920">
+        </p:txBody>
+      </p:sp>
+      <p:sp>
+        <p:nvSpPr>
+          <p:cNvPr id="24" name="Text 22"/>
+          <p:cNvSpPr/>
+          <p:nvPr/>
+        </p:nvSpPr>
+        <p:spPr>
+          <a:xfrm>
+            <a:off x="4453434" y="3432386"/>
+            <a:ext cx="3383687" cy="240043"/>
+          </a:xfrm>
+          <a:prstGeom prst="rect">
+            <a:avLst/>
+          </a:prstGeom>
+          <a:noFill/>
+          <a:ln/>
+        </p:spPr>
+        <p:txBody>
+          <a:bodyPr wrap="square" lIns="0" tIns="0" rIns="0" bIns="0" rtlCol="0" anchor="t">
+            <a:normAutofit/>
+          </a:bodyPr>
+          <a:lstStyle/>
+          <a:p>
+            <a:pPr algn="l" indent="0" marL="0">
               <a:lnSpc>
-                <a:spcPts val="1800"/>
+                <a:spcPts val="1690"/>
               </a:lnSpc>
-              <a:buSzPct val="100000"/>
-              <a:buFontTx/>
-              <a:buAutoNum type="arabicPeriod" startAt="1"/>
+              <a:buNone/>
             </a:pPr>
             <a:r>
-              <a:rPr lang="en-US" sz="1200" dirty="0">
+              <a:rPr lang="en-US" sz="1300" b="1" dirty="0">
                 <a:solidFill>
-                  <a:srgbClr val="44524B"/>
+                  <a:srgbClr val="17332B"/>
                 </a:solidFill>
                 <a:latin typeface="IBM Plex Sans" pitchFamily="34" charset="0"/>
                 <a:ea typeface="IBM Plex Sans" pitchFamily="34" charset="-122"/>
                 <a:cs typeface="IBM Plex Sans" pitchFamily="34" charset="-120"/>
               </a:rPr>
-              <a:t>Keep Earth Engine for extraction</a:t>
+              <a:t>One 50 km area tested</a:t>
+            </a:r>
+            <a:endParaRPr lang="en-US" sz="1300" dirty="0"/>
+          </a:p>
+        </p:txBody>
+      </p:sp>
+      <p:sp>
+        <p:nvSpPr>
+          <p:cNvPr id="25" name="Text 23"/>
+          <p:cNvSpPr/>
+          <p:nvPr/>
+        </p:nvSpPr>
+        <p:spPr>
+          <a:xfrm>
+            <a:off x="4453434" y="3659684"/>
+            <a:ext cx="3383687" cy="223424"/>
+          </a:xfrm>
+          <a:prstGeom prst="rect">
+            <a:avLst/>
+          </a:prstGeom>
+          <a:noFill/>
+          <a:ln/>
+        </p:spPr>
+        <p:txBody>
+          <a:bodyPr wrap="square" lIns="0" tIns="0" rIns="0" bIns="0" rtlCol="0" anchor="t">
+            <a:normAutofit/>
+          </a:bodyPr>
+          <a:lstStyle/>
+          <a:p>
+            <a:pPr algn="l" indent="0" marL="0">
+              <a:lnSpc>
+                <a:spcPts val="1560"/>
+              </a:lnSpc>
+              <a:buNone/>
+            </a:pPr>
+            <a:r>
+              <a:rPr lang="en-US" sz="1200" dirty="0">
+                <a:solidFill>
+                  <a:srgbClr val="5E6B64"/>
+                </a:solidFill>
+                <a:latin typeface="IBM Plex Sans" pitchFamily="34" charset="0"/>
+                <a:ea typeface="IBM Plex Sans" pitchFamily="34" charset="-122"/>
+                <a:cs typeface="IBM Plex Sans" pitchFamily="34" charset="-120"/>
+              </a:rPr>
+              <a:t>per-km² figures scale</a:t>
             </a:r>
             <a:endParaRPr lang="en-US" sz="1200" dirty="0"/>
           </a:p>
@@ -11209,7 +11709,778 @@
       </p:sp>
       <p:sp>
         <p:nvSpPr>
-          <p:cNvPr id="13" name="Text 11"/>
+          <p:cNvPr id="26" name="Text 24"/>
+          <p:cNvSpPr/>
+          <p:nvPr/>
+        </p:nvSpPr>
+        <p:spPr>
+          <a:xfrm>
+            <a:off x="4453434" y="3971975"/>
+            <a:ext cx="3383687" cy="240043"/>
+          </a:xfrm>
+          <a:prstGeom prst="rect">
+            <a:avLst/>
+          </a:prstGeom>
+          <a:noFill/>
+          <a:ln/>
+        </p:spPr>
+        <p:txBody>
+          <a:bodyPr wrap="square" lIns="0" tIns="0" rIns="0" bIns="0" rtlCol="0" anchor="t">
+            <a:normAutofit/>
+          </a:bodyPr>
+          <a:lstStyle/>
+          <a:p>
+            <a:pPr algn="l" indent="0" marL="0">
+              <a:lnSpc>
+                <a:spcPts val="1690"/>
+              </a:lnSpc>
+              <a:buNone/>
+            </a:pPr>
+            <a:r>
+              <a:rPr lang="en-US" sz="1300" b="1" dirty="0">
+                <a:solidFill>
+                  <a:srgbClr val="17332B"/>
+                </a:solidFill>
+                <a:latin typeface="IBM Plex Sans" pitchFamily="34" charset="0"/>
+                <a:ea typeface="IBM Plex Sans" pitchFamily="34" charset="-122"/>
+                <a:cs typeface="IBM Plex Sans" pitchFamily="34" charset="-120"/>
+              </a:rPr>
+              <a:t>Withdrawn alerts</a:t>
+            </a:r>
+            <a:endParaRPr lang="en-US" sz="1300" dirty="0"/>
+          </a:p>
+        </p:txBody>
+      </p:sp>
+      <p:sp>
+        <p:nvSpPr>
+          <p:cNvPr id="27" name="Text 25"/>
+          <p:cNvSpPr/>
+          <p:nvPr/>
+        </p:nvSpPr>
+        <p:spPr>
+          <a:xfrm>
+            <a:off x="4453434" y="4199260"/>
+            <a:ext cx="3383687" cy="223424"/>
+          </a:xfrm>
+          <a:prstGeom prst="rect">
+            <a:avLst/>
+          </a:prstGeom>
+          <a:noFill/>
+          <a:ln/>
+        </p:spPr>
+        <p:txBody>
+          <a:bodyPr wrap="square" lIns="0" tIns="0" rIns="0" bIns="0" rtlCol="0" anchor="t">
+            <a:normAutofit/>
+          </a:bodyPr>
+          <a:lstStyle/>
+          <a:p>
+            <a:pPr algn="l" indent="0" marL="0">
+              <a:lnSpc>
+                <a:spcPts val="1560"/>
+              </a:lnSpc>
+              <a:buNone/>
+            </a:pPr>
+            <a:r>
+              <a:rPr lang="en-US" sz="1200" dirty="0">
+                <a:solidFill>
+                  <a:srgbClr val="5E6B64"/>
+                </a:solidFill>
+                <a:latin typeface="IBM Plex Sans" pitchFamily="34" charset="0"/>
+                <a:ea typeface="IBM Plex Sans" pitchFamily="34" charset="-122"/>
+                <a:cs typeface="IBM Plex Sans" pitchFamily="34" charset="-120"/>
+              </a:rPr>
+              <a:t>designed, not built</a:t>
+            </a:r>
+            <a:endParaRPr lang="en-US" sz="1200" dirty="0"/>
+          </a:p>
+        </p:txBody>
+      </p:sp>
+      <p:sp>
+        <p:nvSpPr>
+          <p:cNvPr id="28" name="Text 26"/>
+          <p:cNvSpPr/>
+          <p:nvPr/>
+        </p:nvSpPr>
+        <p:spPr>
+          <a:xfrm>
+            <a:off x="4453434" y="4511551"/>
+            <a:ext cx="3383687" cy="240043"/>
+          </a:xfrm>
+          <a:prstGeom prst="rect">
+            <a:avLst/>
+          </a:prstGeom>
+          <a:noFill/>
+          <a:ln/>
+        </p:spPr>
+        <p:txBody>
+          <a:bodyPr wrap="square" lIns="0" tIns="0" rIns="0" bIns="0" rtlCol="0" anchor="t">
+            <a:normAutofit/>
+          </a:bodyPr>
+          <a:lstStyle/>
+          <a:p>
+            <a:pPr algn="l" indent="0" marL="0">
+              <a:lnSpc>
+                <a:spcPts val="1690"/>
+              </a:lnSpc>
+              <a:buNone/>
+            </a:pPr>
+            <a:r>
+              <a:rPr lang="en-US" sz="1300" b="1" dirty="0">
+                <a:solidFill>
+                  <a:srgbClr val="17332B"/>
+                </a:solidFill>
+                <a:latin typeface="IBM Plex Sans" pitchFamily="34" charset="0"/>
+                <a:ea typeface="IBM Plex Sans" pitchFamily="34" charset="-122"/>
+                <a:cs typeface="IBM Plex Sans" pitchFamily="34" charset="-120"/>
+              </a:rPr>
+              <a:t>Prices are estimates</a:t>
+            </a:r>
+            <a:endParaRPr lang="en-US" sz="1300" dirty="0"/>
+          </a:p>
+        </p:txBody>
+      </p:sp>
+      <p:sp>
+        <p:nvSpPr>
+          <p:cNvPr id="29" name="Text 27"/>
+          <p:cNvSpPr/>
+          <p:nvPr/>
+        </p:nvSpPr>
+        <p:spPr>
+          <a:xfrm>
+            <a:off x="4453434" y="4738849"/>
+            <a:ext cx="3383687" cy="223424"/>
+          </a:xfrm>
+          <a:prstGeom prst="rect">
+            <a:avLst/>
+          </a:prstGeom>
+          <a:noFill/>
+          <a:ln/>
+        </p:spPr>
+        <p:txBody>
+          <a:bodyPr wrap="square" lIns="0" tIns="0" rIns="0" bIns="0" rtlCol="0" anchor="t">
+            <a:normAutofit/>
+          </a:bodyPr>
+          <a:lstStyle/>
+          <a:p>
+            <a:pPr algn="l" indent="0" marL="0">
+              <a:lnSpc>
+                <a:spcPts val="1560"/>
+              </a:lnSpc>
+              <a:buNone/>
+            </a:pPr>
+            <a:r>
+              <a:rPr lang="en-US" sz="1200" dirty="0">
+                <a:solidFill>
+                  <a:srgbClr val="5E6B64"/>
+                </a:solidFill>
+                <a:latin typeface="IBM Plex Sans" pitchFamily="34" charset="0"/>
+                <a:ea typeface="IBM Plex Sans" pitchFamily="34" charset="-122"/>
+                <a:cs typeface="IBM Plex Sans" pitchFamily="34" charset="-120"/>
+              </a:rPr>
+              <a:t>the conclusion holds even if 10× off</a:t>
+            </a:r>
+            <a:endParaRPr lang="en-US" sz="1200" dirty="0"/>
+          </a:p>
+        </p:txBody>
+      </p:sp>
+      <p:sp>
+        <p:nvSpPr>
+          <p:cNvPr id="30" name="Shape 28"/>
+          <p:cNvSpPr/>
+          <p:nvPr/>
+        </p:nvSpPr>
+        <p:spPr>
+          <a:xfrm>
+            <a:off x="8094100" y="1822264"/>
+            <a:ext cx="3285133" cy="0"/>
+          </a:xfrm>
+          <a:prstGeom prst="line">
+            <a:avLst/>
+          </a:prstGeom>
+          <a:noFill/>
+          <a:ln w="38100">
+            <a:solidFill>
+              <a:srgbClr val="2F6FA3"/>
+            </a:solidFill>
+            <a:prstDash val="solid"/>
+          </a:ln>
+        </p:spPr>
+      </p:sp>
+      <p:sp>
+        <p:nvSpPr>
+          <p:cNvPr id="31" name="Text 29"/>
+          <p:cNvSpPr/>
+          <p:nvPr/>
+        </p:nvSpPr>
+        <p:spPr>
+          <a:xfrm>
+            <a:off x="8094100" y="1979910"/>
+            <a:ext cx="3383687" cy="284444"/>
+          </a:xfrm>
+          <a:prstGeom prst="rect">
+            <a:avLst/>
+          </a:prstGeom>
+          <a:noFill/>
+          <a:ln/>
+        </p:spPr>
+        <p:txBody>
+          <a:bodyPr wrap="square" lIns="0" tIns="0" rIns="0" bIns="0" rtlCol="0" anchor="t">
+            <a:normAutofit/>
+          </a:bodyPr>
+          <a:lstStyle/>
+          <a:p>
+            <a:pPr algn="l" indent="0" marL="0">
+              <a:lnSpc>
+                <a:spcPts val="2040"/>
+              </a:lnSpc>
+              <a:buNone/>
+            </a:pPr>
+            <a:r>
+              <a:rPr lang="en-US" sz="1700" b="1" dirty="0">
+                <a:solidFill>
+                  <a:srgbClr val="17332B"/>
+                </a:solidFill>
+                <a:latin typeface="IBM Plex Sans" pitchFamily="34" charset="0"/>
+                <a:ea typeface="IBM Plex Sans" pitchFamily="34" charset="-122"/>
+                <a:cs typeface="IBM Plex Sans" pitchFamily="34" charset="-120"/>
+              </a:rPr>
+              <a:t>How to adopt it</a:t>
+            </a:r>
+            <a:endParaRPr lang="en-US" sz="1700" dirty="0"/>
+          </a:p>
+        </p:txBody>
+      </p:sp>
+      <p:sp>
+        <p:nvSpPr>
+          <p:cNvPr id="32" name="Text 30"/>
+          <p:cNvSpPr/>
+          <p:nvPr/>
+        </p:nvSpPr>
+        <p:spPr>
+          <a:xfrm>
+            <a:off x="8094100" y="2353221"/>
+            <a:ext cx="330183" cy="279400"/>
+          </a:xfrm>
+          <a:prstGeom prst="rect">
+            <a:avLst/>
+          </a:prstGeom>
+          <a:noFill/>
+          <a:ln/>
+        </p:spPr>
+        <p:txBody>
+          <a:bodyPr wrap="square" lIns="0" tIns="0" rIns="0" bIns="0" rtlCol="0" anchor="t">
+            <a:normAutofit/>
+          </a:bodyPr>
+          <a:lstStyle/>
+          <a:p>
+            <a:pPr algn="l" indent="0" marL="0">
+              <a:lnSpc>
+                <a:spcPts val="2000"/>
+              </a:lnSpc>
+              <a:buNone/>
+            </a:pPr>
+            <a:r>
+              <a:rPr lang="en-US" sz="2000" b="1" dirty="0">
+                <a:solidFill>
+                  <a:srgbClr val="2F6FA3"/>
+                </a:solidFill>
+                <a:latin typeface="Source Serif 4" pitchFamily="18" charset="0"/>
+                <a:ea typeface="Source Serif 4" pitchFamily="18" charset="-122"/>
+                <a:cs typeface="Source Serif 4" pitchFamily="18" charset="-120"/>
+              </a:rPr>
+              <a:t>1</a:t>
+            </a:r>
+            <a:endParaRPr lang="en-US" sz="2000" dirty="0"/>
+          </a:p>
+        </p:txBody>
+      </p:sp>
+      <p:sp>
+        <p:nvSpPr>
+          <p:cNvPr id="33" name="Text 31"/>
+          <p:cNvSpPr/>
+          <p:nvPr/>
+        </p:nvSpPr>
+        <p:spPr>
+          <a:xfrm>
+            <a:off x="8449634" y="2353221"/>
+            <a:ext cx="3017487" cy="240043"/>
+          </a:xfrm>
+          <a:prstGeom prst="rect">
+            <a:avLst/>
+          </a:prstGeom>
+          <a:noFill/>
+          <a:ln/>
+        </p:spPr>
+        <p:txBody>
+          <a:bodyPr wrap="square" lIns="0" tIns="0" rIns="0" bIns="0" rtlCol="0" anchor="t">
+            <a:normAutofit/>
+          </a:bodyPr>
+          <a:lstStyle/>
+          <a:p>
+            <a:pPr algn="l" indent="0" marL="0">
+              <a:lnSpc>
+                <a:spcPts val="1690"/>
+              </a:lnSpc>
+              <a:buNone/>
+            </a:pPr>
+            <a:r>
+              <a:rPr lang="en-US" sz="1300" b="1" dirty="0">
+                <a:solidFill>
+                  <a:srgbClr val="17332B"/>
+                </a:solidFill>
+                <a:latin typeface="IBM Plex Sans" pitchFamily="34" charset="0"/>
+                <a:ea typeface="IBM Plex Sans" pitchFamily="34" charset="-122"/>
+                <a:cs typeface="IBM Plex Sans" pitchFamily="34" charset="-120"/>
+              </a:rPr>
+              <a:t>Run alongside Earth Engine</a:t>
+            </a:r>
+            <a:endParaRPr lang="en-US" sz="1300" dirty="0"/>
+          </a:p>
+        </p:txBody>
+      </p:sp>
+      <p:sp>
+        <p:nvSpPr>
+          <p:cNvPr id="34" name="Text 32"/>
+          <p:cNvSpPr/>
+          <p:nvPr/>
+        </p:nvSpPr>
+        <p:spPr>
+          <a:xfrm>
+            <a:off x="8449634" y="2580506"/>
+            <a:ext cx="3017487" cy="223424"/>
+          </a:xfrm>
+          <a:prstGeom prst="rect">
+            <a:avLst/>
+          </a:prstGeom>
+          <a:noFill/>
+          <a:ln/>
+        </p:spPr>
+        <p:txBody>
+          <a:bodyPr wrap="square" lIns="0" tIns="0" rIns="0" bIns="0" rtlCol="0" anchor="t">
+            <a:normAutofit/>
+          </a:bodyPr>
+          <a:lstStyle/>
+          <a:p>
+            <a:pPr algn="l" indent="0" marL="0">
+              <a:lnSpc>
+                <a:spcPts val="1560"/>
+              </a:lnSpc>
+              <a:buNone/>
+            </a:pPr>
+            <a:r>
+              <a:rPr lang="en-US" sz="1200" dirty="0">
+                <a:solidFill>
+                  <a:srgbClr val="5E6B64"/>
+                </a:solidFill>
+                <a:latin typeface="IBM Plex Sans" pitchFamily="34" charset="0"/>
+                <a:ea typeface="IBM Plex Sans" pitchFamily="34" charset="-122"/>
+                <a:cs typeface="IBM Plex Sans" pitchFamily="34" charset="-120"/>
+              </a:rPr>
+              <a:t>no change for users</a:t>
+            </a:r>
+            <a:endParaRPr lang="en-US" sz="1200" dirty="0"/>
+          </a:p>
+        </p:txBody>
+      </p:sp>
+      <p:sp>
+        <p:nvSpPr>
+          <p:cNvPr id="35" name="Text 33"/>
+          <p:cNvSpPr/>
+          <p:nvPr/>
+        </p:nvSpPr>
+        <p:spPr>
+          <a:xfrm>
+            <a:off x="8094100" y="2892797"/>
+            <a:ext cx="330183" cy="279400"/>
+          </a:xfrm>
+          <a:prstGeom prst="rect">
+            <a:avLst/>
+          </a:prstGeom>
+          <a:noFill/>
+          <a:ln/>
+        </p:spPr>
+        <p:txBody>
+          <a:bodyPr wrap="square" lIns="0" tIns="0" rIns="0" bIns="0" rtlCol="0" anchor="t">
+            <a:normAutofit/>
+          </a:bodyPr>
+          <a:lstStyle/>
+          <a:p>
+            <a:pPr algn="l" indent="0" marL="0">
+              <a:lnSpc>
+                <a:spcPts val="2000"/>
+              </a:lnSpc>
+              <a:buNone/>
+            </a:pPr>
+            <a:r>
+              <a:rPr lang="en-US" sz="2000" b="1" dirty="0">
+                <a:solidFill>
+                  <a:srgbClr val="2F6FA3"/>
+                </a:solidFill>
+                <a:latin typeface="Source Serif 4" pitchFamily="18" charset="0"/>
+                <a:ea typeface="Source Serif 4" pitchFamily="18" charset="-122"/>
+                <a:cs typeface="Source Serif 4" pitchFamily="18" charset="-120"/>
+              </a:rPr>
+              <a:t>2</a:t>
+            </a:r>
+            <a:endParaRPr lang="en-US" sz="2000" dirty="0"/>
+          </a:p>
+        </p:txBody>
+      </p:sp>
+      <p:sp>
+        <p:nvSpPr>
+          <p:cNvPr id="36" name="Text 34"/>
+          <p:cNvSpPr/>
+          <p:nvPr/>
+        </p:nvSpPr>
+        <p:spPr>
+          <a:xfrm>
+            <a:off x="8449634" y="2892797"/>
+            <a:ext cx="3017487" cy="240043"/>
+          </a:xfrm>
+          <a:prstGeom prst="rect">
+            <a:avLst/>
+          </a:prstGeom>
+          <a:noFill/>
+          <a:ln/>
+        </p:spPr>
+        <p:txBody>
+          <a:bodyPr wrap="square" lIns="0" tIns="0" rIns="0" bIns="0" rtlCol="0" anchor="t">
+            <a:normAutofit/>
+          </a:bodyPr>
+          <a:lstStyle/>
+          <a:p>
+            <a:pPr algn="l" indent="0" marL="0">
+              <a:lnSpc>
+                <a:spcPts val="1690"/>
+              </a:lnSpc>
+              <a:buNone/>
+            </a:pPr>
+            <a:r>
+              <a:rPr lang="en-US" sz="1300" b="1" dirty="0">
+                <a:solidFill>
+                  <a:srgbClr val="17332B"/>
+                </a:solidFill>
+                <a:latin typeface="IBM Plex Sans" pitchFamily="34" charset="0"/>
+                <a:ea typeface="IBM Plex Sans" pitchFamily="34" charset="-122"/>
+                <a:cs typeface="IBM Plex Sans" pitchFamily="34" charset="-120"/>
+              </a:rPr>
+              <a:t>Compare verdicts</a:t>
+            </a:r>
+            <a:endParaRPr lang="en-US" sz="1300" dirty="0"/>
+          </a:p>
+        </p:txBody>
+      </p:sp>
+      <p:sp>
+        <p:nvSpPr>
+          <p:cNvPr id="37" name="Text 35"/>
+          <p:cNvSpPr/>
+          <p:nvPr/>
+        </p:nvSpPr>
+        <p:spPr>
+          <a:xfrm>
+            <a:off x="8449634" y="3120095"/>
+            <a:ext cx="3017487" cy="223424"/>
+          </a:xfrm>
+          <a:prstGeom prst="rect">
+            <a:avLst/>
+          </a:prstGeom>
+          <a:noFill/>
+          <a:ln/>
+        </p:spPr>
+        <p:txBody>
+          <a:bodyPr wrap="square" lIns="0" tIns="0" rIns="0" bIns="0" rtlCol="0" anchor="t">
+            <a:normAutofit/>
+          </a:bodyPr>
+          <a:lstStyle/>
+          <a:p>
+            <a:pPr algn="l" indent="0" marL="0">
+              <a:lnSpc>
+                <a:spcPts val="1560"/>
+              </a:lnSpc>
+              <a:buNone/>
+            </a:pPr>
+            <a:r>
+              <a:rPr lang="en-US" sz="1200" dirty="0">
+                <a:solidFill>
+                  <a:srgbClr val="5E6B64"/>
+                </a:solidFill>
+                <a:latin typeface="IBM Plex Sans" pitchFamily="34" charset="0"/>
+                <a:ea typeface="IBM Plex Sans" pitchFamily="34" charset="-122"/>
+                <a:cs typeface="IBM Plex Sans" pitchFamily="34" charset="-120"/>
+              </a:rPr>
+              <a:t>plot by plot</a:t>
+            </a:r>
+            <a:endParaRPr lang="en-US" sz="1200" dirty="0"/>
+          </a:p>
+        </p:txBody>
+      </p:sp>
+      <p:sp>
+        <p:nvSpPr>
+          <p:cNvPr id="38" name="Text 36"/>
+          <p:cNvSpPr/>
+          <p:nvPr/>
+        </p:nvSpPr>
+        <p:spPr>
+          <a:xfrm>
+            <a:off x="8094100" y="3432386"/>
+            <a:ext cx="330183" cy="279400"/>
+          </a:xfrm>
+          <a:prstGeom prst="rect">
+            <a:avLst/>
+          </a:prstGeom>
+          <a:noFill/>
+          <a:ln/>
+        </p:spPr>
+        <p:txBody>
+          <a:bodyPr wrap="square" lIns="0" tIns="0" rIns="0" bIns="0" rtlCol="0" anchor="t">
+            <a:normAutofit/>
+          </a:bodyPr>
+          <a:lstStyle/>
+          <a:p>
+            <a:pPr algn="l" indent="0" marL="0">
+              <a:lnSpc>
+                <a:spcPts val="2000"/>
+              </a:lnSpc>
+              <a:buNone/>
+            </a:pPr>
+            <a:r>
+              <a:rPr lang="en-US" sz="2000" b="1" dirty="0">
+                <a:solidFill>
+                  <a:srgbClr val="2F6FA3"/>
+                </a:solidFill>
+                <a:latin typeface="Source Serif 4" pitchFamily="18" charset="0"/>
+                <a:ea typeface="Source Serif 4" pitchFamily="18" charset="-122"/>
+                <a:cs typeface="Source Serif 4" pitchFamily="18" charset="-120"/>
+              </a:rPr>
+              <a:t>3</a:t>
+            </a:r>
+            <a:endParaRPr lang="en-US" sz="2000" dirty="0"/>
+          </a:p>
+        </p:txBody>
+      </p:sp>
+      <p:sp>
+        <p:nvSpPr>
+          <p:cNvPr id="39" name="Text 37"/>
+          <p:cNvSpPr/>
+          <p:nvPr/>
+        </p:nvSpPr>
+        <p:spPr>
+          <a:xfrm>
+            <a:off x="8449634" y="3432386"/>
+            <a:ext cx="3017487" cy="240043"/>
+          </a:xfrm>
+          <a:prstGeom prst="rect">
+            <a:avLst/>
+          </a:prstGeom>
+          <a:noFill/>
+          <a:ln/>
+        </p:spPr>
+        <p:txBody>
+          <a:bodyPr wrap="square" lIns="0" tIns="0" rIns="0" bIns="0" rtlCol="0" anchor="t">
+            <a:normAutofit/>
+          </a:bodyPr>
+          <a:lstStyle/>
+          <a:p>
+            <a:pPr algn="l" indent="0" marL="0">
+              <a:lnSpc>
+                <a:spcPts val="1690"/>
+              </a:lnSpc>
+              <a:buNone/>
+            </a:pPr>
+            <a:r>
+              <a:rPr lang="en-US" sz="1300" b="1" dirty="0">
+                <a:solidFill>
+                  <a:srgbClr val="17332B"/>
+                </a:solidFill>
+                <a:latin typeface="IBM Plex Sans" pitchFamily="34" charset="0"/>
+                <a:ea typeface="IBM Plex Sans" pitchFamily="34" charset="-122"/>
+                <a:cs typeface="IBM Plex Sans" pitchFamily="34" charset="-120"/>
+              </a:rPr>
+              <a:t>Switch re-checks over</a:t>
+            </a:r>
+            <a:endParaRPr lang="en-US" sz="1300" dirty="0"/>
+          </a:p>
+        </p:txBody>
+      </p:sp>
+      <p:sp>
+        <p:nvSpPr>
+          <p:cNvPr id="40" name="Text 38"/>
+          <p:cNvSpPr/>
+          <p:nvPr/>
+        </p:nvSpPr>
+        <p:spPr>
+          <a:xfrm>
+            <a:off x="8449634" y="3659684"/>
+            <a:ext cx="3017487" cy="223424"/>
+          </a:xfrm>
+          <a:prstGeom prst="rect">
+            <a:avLst/>
+          </a:prstGeom>
+          <a:noFill/>
+          <a:ln/>
+        </p:spPr>
+        <p:txBody>
+          <a:bodyPr wrap="square" lIns="0" tIns="0" rIns="0" bIns="0" rtlCol="0" anchor="t">
+            <a:normAutofit/>
+          </a:bodyPr>
+          <a:lstStyle/>
+          <a:p>
+            <a:pPr algn="l" indent="0" marL="0">
+              <a:lnSpc>
+                <a:spcPts val="1560"/>
+              </a:lnSpc>
+              <a:buNone/>
+            </a:pPr>
+            <a:r>
+              <a:rPr lang="en-US" sz="1200" dirty="0">
+                <a:solidFill>
+                  <a:srgbClr val="5E6B64"/>
+                </a:solidFill>
+                <a:latin typeface="IBM Plex Sans" pitchFamily="34" charset="0"/>
+                <a:ea typeface="IBM Plex Sans" pitchFamily="34" charset="-122"/>
+                <a:cs typeface="IBM Plex Sans" pitchFamily="34" charset="-120"/>
+              </a:rPr>
+              <a:t>to the compact store</a:t>
+            </a:r>
+            <a:endParaRPr lang="en-US" sz="1200" dirty="0"/>
+          </a:p>
+        </p:txBody>
+      </p:sp>
+      <p:sp>
+        <p:nvSpPr>
+          <p:cNvPr id="41" name="Text 39"/>
+          <p:cNvSpPr/>
+          <p:nvPr/>
+        </p:nvSpPr>
+        <p:spPr>
+          <a:xfrm>
+            <a:off x="8094100" y="3971975"/>
+            <a:ext cx="330183" cy="279400"/>
+          </a:xfrm>
+          <a:prstGeom prst="rect">
+            <a:avLst/>
+          </a:prstGeom>
+          <a:noFill/>
+          <a:ln/>
+        </p:spPr>
+        <p:txBody>
+          <a:bodyPr wrap="square" lIns="0" tIns="0" rIns="0" bIns="0" rtlCol="0" anchor="t">
+            <a:normAutofit/>
+          </a:bodyPr>
+          <a:lstStyle/>
+          <a:p>
+            <a:pPr algn="l" indent="0" marL="0">
+              <a:lnSpc>
+                <a:spcPts val="2000"/>
+              </a:lnSpc>
+              <a:buNone/>
+            </a:pPr>
+            <a:r>
+              <a:rPr lang="en-US" sz="2000" b="1" dirty="0">
+                <a:solidFill>
+                  <a:srgbClr val="2F6FA3"/>
+                </a:solidFill>
+                <a:latin typeface="Source Serif 4" pitchFamily="18" charset="0"/>
+                <a:ea typeface="Source Serif 4" pitchFamily="18" charset="-122"/>
+                <a:cs typeface="Source Serif 4" pitchFamily="18" charset="-120"/>
+              </a:rPr>
+              <a:t>4</a:t>
+            </a:r>
+            <a:endParaRPr lang="en-US" sz="2000" dirty="0"/>
+          </a:p>
+        </p:txBody>
+      </p:sp>
+      <p:sp>
+        <p:nvSpPr>
+          <p:cNvPr id="42" name="Text 40"/>
+          <p:cNvSpPr/>
+          <p:nvPr/>
+        </p:nvSpPr>
+        <p:spPr>
+          <a:xfrm>
+            <a:off x="8449634" y="3971975"/>
+            <a:ext cx="3017487" cy="240043"/>
+          </a:xfrm>
+          <a:prstGeom prst="rect">
+            <a:avLst/>
+          </a:prstGeom>
+          <a:noFill/>
+          <a:ln/>
+        </p:spPr>
+        <p:txBody>
+          <a:bodyPr wrap="square" lIns="0" tIns="0" rIns="0" bIns="0" rtlCol="0" anchor="t">
+            <a:normAutofit/>
+          </a:bodyPr>
+          <a:lstStyle/>
+          <a:p>
+            <a:pPr algn="l" indent="0" marL="0">
+              <a:lnSpc>
+                <a:spcPts val="1690"/>
+              </a:lnSpc>
+              <a:buNone/>
+            </a:pPr>
+            <a:r>
+              <a:rPr lang="en-US" sz="1300" b="1" dirty="0">
+                <a:solidFill>
+                  <a:srgbClr val="17332B"/>
+                </a:solidFill>
+                <a:latin typeface="IBM Plex Sans" pitchFamily="34" charset="0"/>
+                <a:ea typeface="IBM Plex Sans" pitchFamily="34" charset="-122"/>
+                <a:cs typeface="IBM Plex Sans" pitchFamily="34" charset="-120"/>
+              </a:rPr>
+              <a:t>Keep Earth Engine</a:t>
+            </a:r>
+            <a:endParaRPr lang="en-US" sz="1300" dirty="0"/>
+          </a:p>
+        </p:txBody>
+      </p:sp>
+      <p:sp>
+        <p:nvSpPr>
+          <p:cNvPr id="43" name="Text 41"/>
+          <p:cNvSpPr/>
+          <p:nvPr/>
+        </p:nvSpPr>
+        <p:spPr>
+          <a:xfrm>
+            <a:off x="8449634" y="4199260"/>
+            <a:ext cx="3017487" cy="223424"/>
+          </a:xfrm>
+          <a:prstGeom prst="rect">
+            <a:avLst/>
+          </a:prstGeom>
+          <a:noFill/>
+          <a:ln/>
+        </p:spPr>
+        <p:txBody>
+          <a:bodyPr wrap="square" lIns="0" tIns="0" rIns="0" bIns="0" rtlCol="0" anchor="t">
+            <a:normAutofit/>
+          </a:bodyPr>
+          <a:lstStyle/>
+          <a:p>
+            <a:pPr algn="l" indent="0" marL="0">
+              <a:lnSpc>
+                <a:spcPts val="1560"/>
+              </a:lnSpc>
+              <a:buNone/>
+            </a:pPr>
+            <a:r>
+              <a:rPr lang="en-US" sz="1200" dirty="0">
+                <a:solidFill>
+                  <a:srgbClr val="5E6B64"/>
+                </a:solidFill>
+                <a:latin typeface="IBM Plex Sans" pitchFamily="34" charset="0"/>
+                <a:ea typeface="IBM Plex Sans" pitchFamily="34" charset="-122"/>
+                <a:cs typeface="IBM Plex Sans" pitchFamily="34" charset="-120"/>
+              </a:rPr>
+              <a:t>for extracting each release</a:t>
+            </a:r>
+            <a:endParaRPr lang="en-US" sz="1200" dirty="0"/>
+          </a:p>
+        </p:txBody>
+      </p:sp>
+      <p:sp>
+        <p:nvSpPr>
+          <p:cNvPr id="44" name="Text 42"/>
           <p:cNvSpPr/>
           <p:nvPr/>
         </p:nvSpPr>
@@ -11253,7 +12524,7 @@
       </p:sp>
       <p:sp>
         <p:nvSpPr>
-          <p:cNvPr id="14" name="Text 12"/>
+          <p:cNvPr id="45" name="Text 43"/>
           <p:cNvSpPr/>
           <p:nvPr/>
         </p:nvSpPr>
@@ -18931,6 +20202,2837 @@
                 <a:cs typeface="IBM Plex Sans" pitchFamily="34" charset="-120"/>
               </a:rPr>
               <a:t>A4</a:t>
+            </a:r>
+            <a:endParaRPr lang="en-US" sz="1200" dirty="0"/>
+          </a:p>
+        </p:txBody>
+      </p:sp>
+    </p:spTree>
+  </p:cSld>
+  <p:clrMapOvr>
+    <a:masterClrMapping/>
+  </p:clrMapOvr>
+</p:sld>
+</file>
+
+<file path=ppt/slides/slide22.xml><?xml version="1.0" encoding="utf-8"?>
+<p:sld xmlns:a="http://schemas.openxmlformats.org/drawingml/2006/main" xmlns:r="http://schemas.openxmlformats.org/officeDocument/2006/relationships" xmlns:p="http://schemas.openxmlformats.org/presentationml/2006/main">
+  <p:cSld name="Slide 22">
+    <p:bg>
+      <p:bgPr>
+        <a:solidFill>
+          <a:srgbClr val="EFEBE0"/>
+        </a:solidFill>
+      </p:bgPr>
+    </p:bg>
+    <p:spTree>
+      <p:nvGrpSpPr>
+        <p:cNvPr id="1" name=""/>
+        <p:cNvGrpSpPr/>
+        <p:nvPr/>
+      </p:nvGrpSpPr>
+      <p:grpSpPr>
+        <a:xfrm>
+          <a:off x="0" y="0"/>
+          <a:ext cx="0" cy="0"/>
+          <a:chOff x="0" y="0"/>
+          <a:chExt cx="0" cy="0"/>
+        </a:xfrm>
+      </p:grpSpPr>
+      <p:sp>
+        <p:nvSpPr>
+          <p:cNvPr id="2" name="Text 0"/>
+          <p:cNvSpPr/>
+          <p:nvPr/>
+        </p:nvSpPr>
+        <p:spPr>
+          <a:xfrm>
+            <a:off x="812767" y="812763"/>
+            <a:ext cx="10883460" cy="238720"/>
+          </a:xfrm>
+          <a:prstGeom prst="rect">
+            <a:avLst/>
+          </a:prstGeom>
+          <a:noFill/>
+          <a:ln/>
+        </p:spPr>
+        <p:txBody>
+          <a:bodyPr wrap="square" lIns="0" tIns="0" rIns="0" bIns="0" rtlCol="0" anchor="t">
+            <a:normAutofit/>
+          </a:bodyPr>
+          <a:lstStyle/>
+          <a:p>
+            <a:pPr algn="l" indent="0" marL="0">
+              <a:lnSpc>
+                <a:spcPts val="1680"/>
+              </a:lnSpc>
+              <a:buNone/>
+            </a:pPr>
+            <a:r>
+              <a:rPr lang="en-US" sz="1200" b="1" spc="100" kern="0" dirty="0">
+                <a:solidFill>
+                  <a:srgbClr val="A4501C"/>
+                </a:solidFill>
+                <a:latin typeface="IBM Plex Sans" pitchFamily="34" charset="0"/>
+                <a:ea typeface="IBM Plex Sans" pitchFamily="34" charset="-122"/>
+                <a:cs typeface="IBM Plex Sans" pitchFamily="34" charset="-120"/>
+              </a:rPr>
+              <a:t>APPENDIX · QUESTIONS ON THE CHECK ENGINE</a:t>
+            </a:r>
+            <a:endParaRPr lang="en-US" sz="1200" dirty="0"/>
+          </a:p>
+        </p:txBody>
+      </p:sp>
+      <p:sp>
+        <p:nvSpPr>
+          <p:cNvPr id="3" name="Text 1"/>
+          <p:cNvSpPr/>
+          <p:nvPr>
+            <p:ph type="title"/>
+          </p:nvPr>
+        </p:nvSpPr>
+        <p:spPr>
+          <a:xfrm>
+            <a:off x="812767" y="1102233"/>
+            <a:ext cx="10883460" cy="472380"/>
+          </a:xfrm>
+          <a:prstGeom prst="rect">
+            <a:avLst/>
+          </a:prstGeom>
+          <a:noFill/>
+          <a:ln/>
+        </p:spPr>
+        <p:txBody>
+          <a:bodyPr wrap="square" lIns="0" tIns="0" rIns="0" bIns="0" rtlCol="0" anchor="t">
+            <a:normAutofit/>
+          </a:bodyPr>
+          <a:lstStyle/>
+          <a:p>
+            <a:pPr algn="l" indent="0" marL="0">
+              <a:lnSpc>
+                <a:spcPts val="3520"/>
+              </a:lnSpc>
+              <a:buNone/>
+            </a:pPr>
+            <a:r>
+              <a:rPr lang="en-US" sz="3200" b="1" i="0" dirty="0">
+                <a:solidFill>
+                  <a:srgbClr val="17332B"/>
+                </a:solidFill>
+                <a:latin typeface="Source Serif 4" pitchFamily="18" charset="0"/>
+                <a:ea typeface="Source Serif 4" pitchFamily="18" charset="-122"/>
+                <a:cs typeface="Source Serif 4" pitchFamily="18" charset="-120"/>
+              </a:rPr>
+              <a:t>Why DuckDB and not something else</a:t>
+            </a:r>
+            <a:endParaRPr lang="en-US" sz="3200" dirty="0"/>
+          </a:p>
+        </p:txBody>
+      </p:sp>
+      <p:sp>
+        <p:nvSpPr>
+          <p:cNvPr id="4" name="Shape 2"/>
+          <p:cNvSpPr/>
+          <p:nvPr/>
+        </p:nvSpPr>
+        <p:spPr>
+          <a:xfrm>
+            <a:off x="812767" y="1757656"/>
+            <a:ext cx="10566466" cy="0"/>
+          </a:xfrm>
+          <a:prstGeom prst="line">
+            <a:avLst/>
+          </a:prstGeom>
+          <a:noFill/>
+          <a:ln w="10583">
+            <a:solidFill>
+              <a:srgbClr val="141413">
+                <a:alpha val="22000"/>
+              </a:srgbClr>
+            </a:solidFill>
+            <a:prstDash val="solid"/>
+          </a:ln>
+        </p:spPr>
+      </p:sp>
+      <p:sp>
+        <p:nvSpPr>
+          <p:cNvPr id="5" name="Shape 3"/>
+          <p:cNvSpPr/>
+          <p:nvPr/>
+        </p:nvSpPr>
+        <p:spPr>
+          <a:xfrm>
+            <a:off x="818059" y="1752364"/>
+            <a:ext cx="0" cy="2221342"/>
+          </a:xfrm>
+          <a:prstGeom prst="line">
+            <a:avLst/>
+          </a:prstGeom>
+          <a:noFill/>
+          <a:ln w="10583">
+            <a:solidFill>
+              <a:srgbClr val="141413">
+                <a:alpha val="22000"/>
+              </a:srgbClr>
+            </a:solidFill>
+            <a:prstDash val="solid"/>
+          </a:ln>
+        </p:spPr>
+      </p:sp>
+      <p:graphicFrame>
+        <p:nvGraphicFramePr>
+          <p:cNvPr id="6" name="Table 0"/>
+          <p:cNvGraphicFramePr>
+            <a:graphicFrameLocks noGrp="1"/>
+          </p:cNvGraphicFramePr>
+          <p:nvPr>
+            <p:extLst>
+              <p:ext uri="{D42A27DB-BD31-4B8C-83A1-F6EECF244321}">
+                <p14:modId xmlns:p14="http://schemas.microsoft.com/office/powerpoint/2010/main" val="1579011935"/>
+              </p:ext>
+            </p:extLst>
+          </p:nvPr>
+        </p:nvGraphicFramePr>
+        <p:xfrm>
+          <a:off x="950350" y="1851848"/>
+          <a:ext cx="10301883" cy="2032992"/>
+        </p:xfrm>
+        <a:graphic>
+          <a:graphicData uri="http://schemas.openxmlformats.org/drawingml/2006/table">
+            <a:tbl>
+              <a:tblPr/>
+              <a:tblGrid>
+                <a:gridCol w="3090565"/>
+                <a:gridCol w="7211318"/>
+              </a:tblGrid>
+              <a:tr h="383811">
+                <a:tc>
+                  <a:txBody>
+                    <a:bodyPr/>
+                    <a:lstStyle/>
+                    <a:p>
+                      <a:pPr indent="0" marL="0">
+                        <a:lnSpc>
+                          <a:spcPts val="1960"/>
+                        </a:lnSpc>
+                        <a:buNone/>
+                      </a:pPr>
+                      <a:r>
+                        <a:rPr lang="en-US" sz="1400" b="1" dirty="0">
+                          <a:solidFill>
+                            <a:srgbClr val="F7F5EF"/>
+                          </a:solidFill>
+                          <a:latin typeface="IBM Plex Sans" pitchFamily="34" charset="0"/>
+                          <a:ea typeface="IBM Plex Sans" pitchFamily="34" charset="-122"/>
+                          <a:cs typeface="IBM Plex Sans" pitchFamily="34" charset="-120"/>
+                        </a:rPr>
+                        <a:t>Alternative</a:t>
+                      </a:r>
+                      <a:endParaRPr lang="en-US" sz="1400" dirty="0">
+                        <a:latin typeface="IBM Plex Sans" charset="0"/>
+                        <a:ea typeface="IBM Plex Sans" charset="0"/>
+                        <a:cs typeface="IBM Plex Sans" charset="0"/>
+                      </a:endParaRPr>
+                    </a:p>
+                  </a:txBody>
+                  <a:tcPr marL="62230" marR="62230" marT="62230" marB="62230" anchor="t">
+                    <a:lnL w="0" cap="flat" cmpd="sng" algn="ctr">
+                      <a:noFill/>
+                    </a:lnL>
+                    <a:lnR w="12700" cap="flat" cmpd="sng" algn="ctr">
+                      <a:solidFill>
+                        <a:srgbClr val="162C26"/>
+                      </a:solidFill>
+                      <a:prstDash val="solid"/>
+                      <a:round/>
+                      <a:headEnd type="none" w="med" len="med"/>
+                      <a:tailEnd type="none" w="med" len="med"/>
+                    </a:lnR>
+                    <a:lnT w="0" cap="flat" cmpd="sng" algn="ctr">
+                      <a:noFill/>
+                    </a:lnT>
+                    <a:lnB w="12700" cap="flat" cmpd="sng" algn="ctr">
+                      <a:solidFill>
+                        <a:srgbClr val="162C26"/>
+                      </a:solidFill>
+                      <a:prstDash val="solid"/>
+                      <a:round/>
+                      <a:headEnd type="none" w="med" len="med"/>
+                      <a:tailEnd type="none" w="med" len="med"/>
+                    </a:lnB>
+                    <a:solidFill>
+                      <a:srgbClr val="17332B"/>
+                    </a:solidFill>
+                  </a:tcPr>
+                </a:tc>
+                <a:tc>
+                  <a:txBody>
+                    <a:bodyPr/>
+                    <a:lstStyle/>
+                    <a:p>
+                      <a:pPr indent="0" marL="0">
+                        <a:lnSpc>
+                          <a:spcPts val="1960"/>
+                        </a:lnSpc>
+                        <a:buNone/>
+                      </a:pPr>
+                      <a:r>
+                        <a:rPr lang="en-US" sz="1400" b="1" dirty="0">
+                          <a:solidFill>
+                            <a:srgbClr val="F7F5EF"/>
+                          </a:solidFill>
+                          <a:latin typeface="IBM Plex Sans" pitchFamily="34" charset="0"/>
+                          <a:ea typeface="IBM Plex Sans" pitchFamily="34" charset="-122"/>
+                          <a:cs typeface="IBM Plex Sans" pitchFamily="34" charset="-120"/>
+                        </a:rPr>
+                        <a:t>Why not</a:t>
+                      </a:r>
+                      <a:endParaRPr lang="en-US" sz="1400" dirty="0">
+                        <a:latin typeface="IBM Plex Sans" charset="0"/>
+                        <a:ea typeface="IBM Plex Sans" charset="0"/>
+                        <a:cs typeface="IBM Plex Sans" charset="0"/>
+                      </a:endParaRPr>
+                    </a:p>
+                  </a:txBody>
+                  <a:tcPr marL="62230" marR="62230" marT="62230" marB="62230" anchor="t">
+                    <a:lnL w="12700" cap="flat" cmpd="sng" algn="ctr">
+                      <a:solidFill>
+                        <a:srgbClr val="162C26"/>
+                      </a:solidFill>
+                      <a:prstDash val="solid"/>
+                      <a:round/>
+                      <a:headEnd type="none" w="med" len="med"/>
+                      <a:tailEnd type="none" w="med" len="med"/>
+                    </a:lnL>
+                    <a:lnR w="12700" cap="flat" cmpd="sng" algn="ctr">
+                      <a:solidFill>
+                        <a:srgbClr val="162C26"/>
+                      </a:solidFill>
+                      <a:prstDash val="solid"/>
+                      <a:round/>
+                      <a:headEnd type="none" w="med" len="med"/>
+                      <a:tailEnd type="none" w="med" len="med"/>
+                    </a:lnR>
+                    <a:lnT w="0" cap="flat" cmpd="sng" algn="ctr">
+                      <a:noFill/>
+                    </a:lnT>
+                    <a:lnB w="12700" cap="flat" cmpd="sng" algn="ctr">
+                      <a:solidFill>
+                        <a:srgbClr val="162C26"/>
+                      </a:solidFill>
+                      <a:prstDash val="solid"/>
+                      <a:round/>
+                      <a:headEnd type="none" w="med" len="med"/>
+                      <a:tailEnd type="none" w="med" len="med"/>
+                    </a:lnB>
+                    <a:solidFill>
+                      <a:srgbClr val="17332B"/>
+                    </a:solidFill>
+                  </a:tcPr>
+                </a:tc>
+              </a:tr>
+              <a:tr h="632685">
+                <a:tc>
+                  <a:txBody>
+                    <a:bodyPr/>
+                    <a:lstStyle/>
+                    <a:p>
+                      <a:pPr indent="0" marL="0">
+                        <a:lnSpc>
+                          <a:spcPts val="1960"/>
+                        </a:lnSpc>
+                        <a:buNone/>
+                      </a:pPr>
+                      <a:r>
+                        <a:rPr lang="en-US" sz="1400" dirty="0">
+                          <a:solidFill>
+                            <a:srgbClr val="2E3B35"/>
+                          </a:solidFill>
+                          <a:latin typeface="IBM Plex Sans" pitchFamily="34" charset="0"/>
+                          <a:ea typeface="IBM Plex Sans" pitchFamily="34" charset="-122"/>
+                          <a:cs typeface="IBM Plex Sans" pitchFamily="34" charset="-120"/>
+                        </a:rPr>
+                        <a:t>PostGIS (what SystemEarth has)</a:t>
+                      </a:r>
+                      <a:endParaRPr lang="en-US" sz="1400" dirty="0">
+                        <a:latin typeface="IBM Plex Sans" charset="0"/>
+                        <a:ea typeface="IBM Plex Sans" charset="0"/>
+                        <a:cs typeface="IBM Plex Sans" charset="0"/>
+                      </a:endParaRPr>
+                    </a:p>
+                  </a:txBody>
+                  <a:tcPr marL="62230" marR="62230" marT="62230" marB="62230" anchor="t">
+                    <a:lnL w="0" cap="flat" cmpd="sng" algn="ctr">
+                      <a:noFill/>
+                    </a:lnL>
+                    <a:lnR w="12700" cap="flat" cmpd="sng" algn="ctr">
+                      <a:solidFill>
+                        <a:srgbClr val="C9C8C5"/>
+                      </a:solidFill>
+                      <a:prstDash val="solid"/>
+                      <a:round/>
+                      <a:headEnd type="none" w="med" len="med"/>
+                      <a:tailEnd type="none" w="med" len="med"/>
+                    </a:lnR>
+                    <a:lnT w="12700" cap="flat" cmpd="sng" algn="ctr">
+                      <a:solidFill>
+                        <a:srgbClr val="162C26"/>
+                      </a:solidFill>
+                      <a:prstDash val="solid"/>
+                      <a:round/>
+                      <a:headEnd type="none" w="med" len="med"/>
+                      <a:tailEnd type="none" w="med" len="med"/>
+                    </a:lnT>
+                    <a:lnB w="12700" cap="flat" cmpd="sng" algn="ctr">
+                      <a:solidFill>
+                        <a:srgbClr val="C9C8C5"/>
+                      </a:solidFill>
+                      <a:prstDash val="solid"/>
+                      <a:round/>
+                      <a:headEnd type="none" w="med" len="med"/>
+                      <a:tailEnd type="none" w="med" len="med"/>
+                    </a:lnB>
+                    <a:solidFill>
+                      <a:srgbClr val="FCFBF7"/>
+                    </a:solidFill>
+                  </a:tcPr>
+                </a:tc>
+                <a:tc>
+                  <a:txBody>
+                    <a:bodyPr/>
+                    <a:lstStyle/>
+                    <a:p>
+                      <a:pPr indent="0" marL="0">
+                        <a:lnSpc>
+                          <a:spcPts val="1960"/>
+                        </a:lnSpc>
+                        <a:buNone/>
+                      </a:pPr>
+                      <a:r>
+                        <a:rPr lang="en-US" sz="1400" dirty="0">
+                          <a:solidFill>
+                            <a:srgbClr val="2E3B35"/>
+                          </a:solidFill>
+                          <a:latin typeface="IBM Plex Sans" pitchFamily="34" charset="0"/>
+                          <a:ea typeface="IBM Plex Sans" pitchFamily="34" charset="-122"/>
+                          <a:cs typeface="IBM Plex Sans" pitchFamily="34" charset="-120"/>
+                        </a:rPr>
+                        <a:t>A database server that must run all the time; overkill for lookups over small, unchanging files</a:t>
+                      </a:r>
+                      <a:endParaRPr lang="en-US" sz="1400" dirty="0">
+                        <a:latin typeface="IBM Plex Sans" charset="0"/>
+                        <a:ea typeface="IBM Plex Sans" charset="0"/>
+                        <a:cs typeface="IBM Plex Sans" charset="0"/>
+                      </a:endParaRPr>
+                    </a:p>
+                  </a:txBody>
+                  <a:tcPr marL="62230" marR="62230" marT="62230" marB="62230" anchor="t">
+                    <a:lnL w="12700" cap="flat" cmpd="sng" algn="ctr">
+                      <a:solidFill>
+                        <a:srgbClr val="C9C8C5"/>
+                      </a:solidFill>
+                      <a:prstDash val="solid"/>
+                      <a:round/>
+                      <a:headEnd type="none" w="med" len="med"/>
+                      <a:tailEnd type="none" w="med" len="med"/>
+                    </a:lnL>
+                    <a:lnR w="12700" cap="flat" cmpd="sng" algn="ctr">
+                      <a:solidFill>
+                        <a:srgbClr val="C9C8C5"/>
+                      </a:solidFill>
+                      <a:prstDash val="solid"/>
+                      <a:round/>
+                      <a:headEnd type="none" w="med" len="med"/>
+                      <a:tailEnd type="none" w="med" len="med"/>
+                    </a:lnR>
+                    <a:lnT w="12700" cap="flat" cmpd="sng" algn="ctr">
+                      <a:solidFill>
+                        <a:srgbClr val="162C26"/>
+                      </a:solidFill>
+                      <a:prstDash val="solid"/>
+                      <a:round/>
+                      <a:headEnd type="none" w="med" len="med"/>
+                      <a:tailEnd type="none" w="med" len="med"/>
+                    </a:lnT>
+                    <a:lnB w="12700" cap="flat" cmpd="sng" algn="ctr">
+                      <a:solidFill>
+                        <a:srgbClr val="C9C8C5"/>
+                      </a:solidFill>
+                      <a:prstDash val="solid"/>
+                      <a:round/>
+                      <a:headEnd type="none" w="med" len="med"/>
+                      <a:tailEnd type="none" w="med" len="med"/>
+                    </a:lnB>
+                    <a:solidFill>
+                      <a:srgbClr val="FCFBF7"/>
+                    </a:solidFill>
+                  </a:tcPr>
+                </a:tc>
+              </a:tr>
+              <a:tr h="383811">
+                <a:tc>
+                  <a:txBody>
+                    <a:bodyPr/>
+                    <a:lstStyle/>
+                    <a:p>
+                      <a:pPr indent="0" marL="0">
+                        <a:lnSpc>
+                          <a:spcPts val="1960"/>
+                        </a:lnSpc>
+                        <a:buNone/>
+                      </a:pPr>
+                      <a:r>
+                        <a:rPr lang="en-US" sz="1400" dirty="0">
+                          <a:solidFill>
+                            <a:srgbClr val="2E3B35"/>
+                          </a:solidFill>
+                          <a:latin typeface="IBM Plex Sans" pitchFamily="34" charset="0"/>
+                          <a:ea typeface="IBM Plex Sans" pitchFamily="34" charset="-122"/>
+                          <a:cs typeface="IBM Plex Sans" pitchFamily="34" charset="-120"/>
+                        </a:rPr>
+                        <a:t>Earth Engine</a:t>
+                      </a:r>
+                      <a:endParaRPr lang="en-US" sz="1400" dirty="0">
+                        <a:latin typeface="IBM Plex Sans" charset="0"/>
+                        <a:ea typeface="IBM Plex Sans" charset="0"/>
+                        <a:cs typeface="IBM Plex Sans" charset="0"/>
+                      </a:endParaRPr>
+                    </a:p>
+                  </a:txBody>
+                  <a:tcPr marL="62230" marR="62230" marT="62230" marB="62230" anchor="t">
+                    <a:lnL w="0" cap="flat" cmpd="sng" algn="ctr">
+                      <a:noFill/>
+                    </a:lnL>
+                    <a:lnR w="12700" cap="flat" cmpd="sng" algn="ctr">
+                      <a:solidFill>
+                        <a:srgbClr val="C3C0B9"/>
+                      </a:solidFill>
+                      <a:prstDash val="solid"/>
+                      <a:round/>
+                      <a:headEnd type="none" w="med" len="med"/>
+                      <a:tailEnd type="none" w="med" len="med"/>
+                    </a:lnR>
+                    <a:lnT w="12700" cap="flat" cmpd="sng" algn="ctr">
+                      <a:solidFill>
+                        <a:srgbClr val="C9C8C5"/>
+                      </a:solidFill>
+                      <a:prstDash val="solid"/>
+                      <a:round/>
+                      <a:headEnd type="none" w="med" len="med"/>
+                      <a:tailEnd type="none" w="med" len="med"/>
+                    </a:lnT>
+                    <a:lnB w="12700" cap="flat" cmpd="sng" algn="ctr">
+                      <a:solidFill>
+                        <a:srgbClr val="C3C0B9"/>
+                      </a:solidFill>
+                      <a:prstDash val="solid"/>
+                      <a:round/>
+                      <a:headEnd type="none" w="med" len="med"/>
+                      <a:tailEnd type="none" w="med" len="med"/>
+                    </a:lnB>
+                    <a:solidFill>
+                      <a:srgbClr val="F4F1E8"/>
+                    </a:solidFill>
+                  </a:tcPr>
+                </a:tc>
+                <a:tc>
+                  <a:txBody>
+                    <a:bodyPr/>
+                    <a:lstStyle/>
+                    <a:p>
+                      <a:pPr indent="0" marL="0">
+                        <a:lnSpc>
+                          <a:spcPts val="1960"/>
+                        </a:lnSpc>
+                        <a:buNone/>
+                      </a:pPr>
+                      <a:r>
+                        <a:rPr lang="en-US" sz="1400" dirty="0">
+                          <a:solidFill>
+                            <a:srgbClr val="2E3B35"/>
+                          </a:solidFill>
+                          <a:latin typeface="IBM Plex Sans" pitchFamily="34" charset="0"/>
+                          <a:ea typeface="IBM Plex Sans" pitchFamily="34" charset="-122"/>
+                          <a:cs typeface="IBM Plex Sans" pitchFamily="34" charset="-120"/>
+                        </a:rPr>
+                        <a:t>Remote, about 0.5 s per request, paid per use, 20 requests at once</a:t>
+                      </a:r>
+                      <a:endParaRPr lang="en-US" sz="1400" dirty="0">
+                        <a:latin typeface="IBM Plex Sans" charset="0"/>
+                        <a:ea typeface="IBM Plex Sans" charset="0"/>
+                        <a:cs typeface="IBM Plex Sans" charset="0"/>
+                      </a:endParaRPr>
+                    </a:p>
+                  </a:txBody>
+                  <a:tcPr marL="62230" marR="62230" marT="62230" marB="62230" anchor="t">
+                    <a:lnL w="12700" cap="flat" cmpd="sng" algn="ctr">
+                      <a:solidFill>
+                        <a:srgbClr val="C3C0B9"/>
+                      </a:solidFill>
+                      <a:prstDash val="solid"/>
+                      <a:round/>
+                      <a:headEnd type="none" w="med" len="med"/>
+                      <a:tailEnd type="none" w="med" len="med"/>
+                    </a:lnL>
+                    <a:lnR w="12700" cap="flat" cmpd="sng" algn="ctr">
+                      <a:solidFill>
+                        <a:srgbClr val="C3C0B9"/>
+                      </a:solidFill>
+                      <a:prstDash val="solid"/>
+                      <a:round/>
+                      <a:headEnd type="none" w="med" len="med"/>
+                      <a:tailEnd type="none" w="med" len="med"/>
+                    </a:lnR>
+                    <a:lnT w="12700" cap="flat" cmpd="sng" algn="ctr">
+                      <a:solidFill>
+                        <a:srgbClr val="C9C8C5"/>
+                      </a:solidFill>
+                      <a:prstDash val="solid"/>
+                      <a:round/>
+                      <a:headEnd type="none" w="med" len="med"/>
+                      <a:tailEnd type="none" w="med" len="med"/>
+                    </a:lnT>
+                    <a:lnB w="12700" cap="flat" cmpd="sng" algn="ctr">
+                      <a:solidFill>
+                        <a:srgbClr val="C3C0B9"/>
+                      </a:solidFill>
+                      <a:prstDash val="solid"/>
+                      <a:round/>
+                      <a:headEnd type="none" w="med" len="med"/>
+                      <a:tailEnd type="none" w="med" len="med"/>
+                    </a:lnB>
+                    <a:solidFill>
+                      <a:srgbClr val="F4F1E8"/>
+                    </a:solidFill>
+                  </a:tcPr>
+                </a:tc>
+              </a:tr>
+              <a:tr h="632685">
+                <a:tc>
+                  <a:txBody>
+                    <a:bodyPr/>
+                    <a:lstStyle/>
+                    <a:p>
+                      <a:pPr indent="0" marL="0">
+                        <a:lnSpc>
+                          <a:spcPts val="1960"/>
+                        </a:lnSpc>
+                        <a:buNone/>
+                      </a:pPr>
+                      <a:r>
+                        <a:rPr lang="en-US" sz="1400" dirty="0">
+                          <a:solidFill>
+                            <a:srgbClr val="2E3B35"/>
+                          </a:solidFill>
+                          <a:latin typeface="IBM Plex Sans" pitchFamily="34" charset="0"/>
+                          <a:ea typeface="IBM Plex Sans" pitchFamily="34" charset="-122"/>
+                          <a:cs typeface="IBM Plex Sans" pitchFamily="34" charset="-120"/>
+                        </a:rPr>
+                        <a:t>Plain Python</a:t>
+                      </a:r>
+                      <a:endParaRPr lang="en-US" sz="1400" dirty="0">
+                        <a:latin typeface="IBM Plex Sans" charset="0"/>
+                        <a:ea typeface="IBM Plex Sans" charset="0"/>
+                        <a:cs typeface="IBM Plex Sans" charset="0"/>
+                      </a:endParaRPr>
+                    </a:p>
+                  </a:txBody>
+                  <a:tcPr marL="62230" marR="62230" marT="62230" marB="62230" anchor="t">
+                    <a:lnL w="0" cap="flat" cmpd="sng" algn="ctr">
+                      <a:noFill/>
+                    </a:lnL>
+                    <a:lnR w="12700" cap="flat" cmpd="sng" algn="ctr">
+                      <a:solidFill>
+                        <a:srgbClr val="C9C8C5"/>
+                      </a:solidFill>
+                      <a:prstDash val="solid"/>
+                      <a:round/>
+                      <a:headEnd type="none" w="med" len="med"/>
+                      <a:tailEnd type="none" w="med" len="med"/>
+                    </a:lnR>
+                    <a:lnT w="12700" cap="flat" cmpd="sng" algn="ctr">
+                      <a:solidFill>
+                        <a:srgbClr val="C3C0B9"/>
+                      </a:solidFill>
+                      <a:prstDash val="solid"/>
+                      <a:round/>
+                      <a:headEnd type="none" w="med" len="med"/>
+                      <a:tailEnd type="none" w="med" len="med"/>
+                    </a:lnT>
+                    <a:lnB w="12700" cap="flat" cmpd="sng" algn="ctr">
+                      <a:solidFill>
+                        <a:srgbClr val="C9C8C5"/>
+                      </a:solidFill>
+                      <a:prstDash val="solid"/>
+                      <a:round/>
+                      <a:headEnd type="none" w="med" len="med"/>
+                      <a:tailEnd type="none" w="med" len="med"/>
+                    </a:lnB>
+                    <a:solidFill>
+                      <a:srgbClr val="FCFBF7"/>
+                    </a:solidFill>
+                  </a:tcPr>
+                </a:tc>
+                <a:tc>
+                  <a:txBody>
+                    <a:bodyPr/>
+                    <a:lstStyle/>
+                    <a:p>
+                      <a:pPr indent="0" marL="0">
+                        <a:lnSpc>
+                          <a:spcPts val="1960"/>
+                        </a:lnSpc>
+                        <a:buNone/>
+                      </a:pPr>
+                      <a:r>
+                        <a:rPr lang="en-US" sz="1400" dirty="0">
+                          <a:solidFill>
+                            <a:srgbClr val="2E3B35"/>
+                          </a:solidFill>
+                          <a:latin typeface="IBM Plex Sans" pitchFamily="34" charset="0"/>
+                          <a:ea typeface="IBM Plex Sans" pitchFamily="34" charset="-122"/>
+                          <a:cs typeface="IBM Plex Sans" pitchFamily="34" charset="-120"/>
+                        </a:rPr>
+                        <a:t>Works (it’s how the raw pipeline does it), but the SQL version is a second, independent implementation of the rules, which is what makes the 100% fidelity check meaningful</a:t>
+                      </a:r>
+                      <a:endParaRPr lang="en-US" sz="1400" dirty="0">
+                        <a:latin typeface="IBM Plex Sans" charset="0"/>
+                        <a:ea typeface="IBM Plex Sans" charset="0"/>
+                        <a:cs typeface="IBM Plex Sans" charset="0"/>
+                      </a:endParaRPr>
+                    </a:p>
+                  </a:txBody>
+                  <a:tcPr marL="62230" marR="62230" marT="62230" marB="62230" anchor="t">
+                    <a:lnL w="12700" cap="flat" cmpd="sng" algn="ctr">
+                      <a:solidFill>
+                        <a:srgbClr val="C9C8C5"/>
+                      </a:solidFill>
+                      <a:prstDash val="solid"/>
+                      <a:round/>
+                      <a:headEnd type="none" w="med" len="med"/>
+                      <a:tailEnd type="none" w="med" len="med"/>
+                    </a:lnL>
+                    <a:lnR w="12700" cap="flat" cmpd="sng" algn="ctr">
+                      <a:solidFill>
+                        <a:srgbClr val="C9C8C5"/>
+                      </a:solidFill>
+                      <a:prstDash val="solid"/>
+                      <a:round/>
+                      <a:headEnd type="none" w="med" len="med"/>
+                      <a:tailEnd type="none" w="med" len="med"/>
+                    </a:lnR>
+                    <a:lnT w="12700" cap="flat" cmpd="sng" algn="ctr">
+                      <a:solidFill>
+                        <a:srgbClr val="C3C0B9"/>
+                      </a:solidFill>
+                      <a:prstDash val="solid"/>
+                      <a:round/>
+                      <a:headEnd type="none" w="med" len="med"/>
+                      <a:tailEnd type="none" w="med" len="med"/>
+                    </a:lnT>
+                    <a:lnB w="12700" cap="flat" cmpd="sng" algn="ctr">
+                      <a:solidFill>
+                        <a:srgbClr val="C9C8C5"/>
+                      </a:solidFill>
+                      <a:prstDash val="solid"/>
+                      <a:round/>
+                      <a:headEnd type="none" w="med" len="med"/>
+                      <a:tailEnd type="none" w="med" len="med"/>
+                    </a:lnB>
+                    <a:solidFill>
+                      <a:srgbClr val="FCFBF7"/>
+                    </a:solidFill>
+                  </a:tcPr>
+                </a:tc>
+              </a:tr>
+            </a:tbl>
+          </a:graphicData>
+        </a:graphic>
+      </p:graphicFrame>
+      <p:sp>
+        <p:nvSpPr>
+          <p:cNvPr id="7" name="Shape 4"/>
+          <p:cNvSpPr/>
+          <p:nvPr/>
+        </p:nvSpPr>
+        <p:spPr>
+          <a:xfrm>
+            <a:off x="812767" y="4189561"/>
+            <a:ext cx="10566466" cy="0"/>
+          </a:xfrm>
+          <a:prstGeom prst="line">
+            <a:avLst/>
+          </a:prstGeom>
+          <a:noFill/>
+          <a:ln w="25400">
+            <a:solidFill>
+              <a:srgbClr val="17332B"/>
+            </a:solidFill>
+            <a:prstDash val="solid"/>
+          </a:ln>
+        </p:spPr>
+      </p:sp>
+      <p:sp>
+        <p:nvSpPr>
+          <p:cNvPr id="8" name="Text 5"/>
+          <p:cNvSpPr/>
+          <p:nvPr/>
+        </p:nvSpPr>
+        <p:spPr>
+          <a:xfrm>
+            <a:off x="812767" y="4325020"/>
+            <a:ext cx="10883460" cy="238720"/>
+          </a:xfrm>
+          <a:prstGeom prst="rect">
+            <a:avLst/>
+          </a:prstGeom>
+          <a:noFill/>
+          <a:ln/>
+        </p:spPr>
+        <p:txBody>
+          <a:bodyPr wrap="square" lIns="0" tIns="0" rIns="0" bIns="0" rtlCol="0" anchor="t">
+            <a:normAutofit/>
+          </a:bodyPr>
+          <a:lstStyle/>
+          <a:p>
+            <a:pPr algn="l" indent="0" marL="0">
+              <a:lnSpc>
+                <a:spcPts val="1680"/>
+              </a:lnSpc>
+              <a:buNone/>
+            </a:pPr>
+            <a:r>
+              <a:rPr lang="en-US" sz="1400" b="1" dirty="0">
+                <a:solidFill>
+                  <a:srgbClr val="17332B"/>
+                </a:solidFill>
+                <a:latin typeface="IBM Plex Sans" pitchFamily="34" charset="0"/>
+                <a:ea typeface="IBM Plex Sans" pitchFamily="34" charset="-122"/>
+                <a:cs typeface="IBM Plex Sans" pitchFamily="34" charset="-120"/>
+              </a:rPr>
+              <a:t>What DuckDB gives us</a:t>
+            </a:r>
+            <a:endParaRPr lang="en-US" sz="1400" dirty="0"/>
+          </a:p>
+        </p:txBody>
+      </p:sp>
+      <p:sp>
+        <p:nvSpPr>
+          <p:cNvPr id="9" name="Text 6"/>
+          <p:cNvSpPr/>
+          <p:nvPr/>
+        </p:nvSpPr>
+        <p:spPr>
+          <a:xfrm>
+            <a:off x="812767" y="4589115"/>
+            <a:ext cx="10883460" cy="238720"/>
+          </a:xfrm>
+          <a:prstGeom prst="rect">
+            <a:avLst/>
+          </a:prstGeom>
+          <a:noFill/>
+          <a:ln/>
+        </p:spPr>
+        <p:txBody>
+          <a:bodyPr wrap="square" lIns="0" tIns="0" rIns="0" bIns="0" rtlCol="0" anchor="t">
+            <a:normAutofit/>
+          </a:bodyPr>
+          <a:lstStyle/>
+          <a:p>
+            <a:pPr algn="l" indent="0" marL="0">
+              <a:lnSpc>
+                <a:spcPts val="1680"/>
+              </a:lnSpc>
+              <a:buNone/>
+            </a:pPr>
+            <a:r>
+              <a:rPr lang="en-US" sz="1200" dirty="0">
+                <a:solidFill>
+                  <a:srgbClr val="44524B"/>
+                </a:solidFill>
+                <a:latin typeface="IBM Plex Sans" pitchFamily="34" charset="0"/>
+                <a:ea typeface="IBM Plex Sans" pitchFamily="34" charset="-122"/>
+                <a:cs typeface="IBM Plex Sans" pitchFamily="34" charset="-120"/>
+              </a:rPr>
+              <a:t>SQL over plain files, in-process: no server to run, no request cap, 32 ms per check. Trade-off: one machine, and start-up is most of those 32 ms.</a:t>
+            </a:r>
+            <a:endParaRPr lang="en-US" sz="1200" dirty="0"/>
+          </a:p>
+        </p:txBody>
+      </p:sp>
+      <p:sp>
+        <p:nvSpPr>
+          <p:cNvPr id="10" name="Text 7"/>
+          <p:cNvSpPr/>
+          <p:nvPr/>
+        </p:nvSpPr>
+        <p:spPr>
+          <a:xfrm>
+            <a:off x="812767" y="6235725"/>
+            <a:ext cx="2260798" cy="241283"/>
+          </a:xfrm>
+          <a:prstGeom prst="rect">
+            <a:avLst/>
+          </a:prstGeom>
+          <a:noFill/>
+          <a:ln/>
+        </p:spPr>
+        <p:txBody>
+          <a:bodyPr wrap="square" lIns="0" tIns="0" rIns="0" bIns="0" rtlCol="0" anchor="t">
+            <a:normAutofit/>
+          </a:bodyPr>
+          <a:lstStyle/>
+          <a:p>
+            <a:pPr algn="l" indent="0" marL="0">
+              <a:lnSpc>
+                <a:spcPts val="1680"/>
+              </a:lnSpc>
+              <a:buNone/>
+            </a:pPr>
+            <a:r>
+              <a:rPr lang="en-US" sz="1200" dirty="0">
+                <a:solidFill>
+                  <a:srgbClr val="5E6B64"/>
+                </a:solidFill>
+                <a:latin typeface="IBM Plex Sans" pitchFamily="34" charset="0"/>
+                <a:ea typeface="IBM Plex Sans" pitchFamily="34" charset="-122"/>
+                <a:cs typeface="IBM Plex Sans" pitchFamily="34" charset="-120"/>
+              </a:rPr>
+              <a:t>Backup · show only if asked</a:t>
+            </a:r>
+            <a:endParaRPr lang="en-US" sz="1200" dirty="0"/>
+          </a:p>
+        </p:txBody>
+      </p:sp>
+      <p:sp>
+        <p:nvSpPr>
+          <p:cNvPr id="11" name="Text 8"/>
+          <p:cNvSpPr/>
+          <p:nvPr/>
+        </p:nvSpPr>
+        <p:spPr>
+          <a:xfrm>
+            <a:off x="11139173" y="6235725"/>
+            <a:ext cx="239977" cy="241283"/>
+          </a:xfrm>
+          <a:prstGeom prst="rect">
+            <a:avLst/>
+          </a:prstGeom>
+          <a:noFill/>
+          <a:ln/>
+        </p:spPr>
+        <p:txBody>
+          <a:bodyPr wrap="square" lIns="0" tIns="0" rIns="0" bIns="0" rtlCol="0" anchor="t">
+            <a:normAutofit/>
+          </a:bodyPr>
+          <a:lstStyle/>
+          <a:p>
+            <a:pPr algn="r" indent="0" marL="0">
+              <a:lnSpc>
+                <a:spcPts val="1680"/>
+              </a:lnSpc>
+              <a:buNone/>
+            </a:pPr>
+            <a:r>
+              <a:rPr lang="en-US" sz="1200" dirty="0">
+                <a:solidFill>
+                  <a:srgbClr val="5E6B64"/>
+                </a:solidFill>
+                <a:latin typeface="IBM Plex Sans" pitchFamily="34" charset="0"/>
+                <a:ea typeface="IBM Plex Sans" pitchFamily="34" charset="-122"/>
+                <a:cs typeface="IBM Plex Sans" pitchFamily="34" charset="-120"/>
+              </a:rPr>
+              <a:t>A5</a:t>
+            </a:r>
+            <a:endParaRPr lang="en-US" sz="1200" dirty="0"/>
+          </a:p>
+        </p:txBody>
+      </p:sp>
+    </p:spTree>
+  </p:cSld>
+  <p:clrMapOvr>
+    <a:masterClrMapping/>
+  </p:clrMapOvr>
+</p:sld>
+</file>
+
+<file path=ppt/slides/slide23.xml><?xml version="1.0" encoding="utf-8"?>
+<p:sld xmlns:a="http://schemas.openxmlformats.org/drawingml/2006/main" xmlns:r="http://schemas.openxmlformats.org/officeDocument/2006/relationships" xmlns:p="http://schemas.openxmlformats.org/presentationml/2006/main">
+  <p:cSld name="Slide 23">
+    <p:bg>
+      <p:bgPr>
+        <a:solidFill>
+          <a:srgbClr val="EFEBE0"/>
+        </a:solidFill>
+      </p:bgPr>
+    </p:bg>
+    <p:spTree>
+      <p:nvGrpSpPr>
+        <p:cNvPr id="1" name=""/>
+        <p:cNvGrpSpPr/>
+        <p:nvPr/>
+      </p:nvGrpSpPr>
+      <p:grpSpPr>
+        <a:xfrm>
+          <a:off x="0" y="0"/>
+          <a:ext cx="0" cy="0"/>
+          <a:chOff x="0" y="0"/>
+          <a:chExt cx="0" cy="0"/>
+        </a:xfrm>
+      </p:grpSpPr>
+      <p:sp>
+        <p:nvSpPr>
+          <p:cNvPr id="2" name="Text 0"/>
+          <p:cNvSpPr/>
+          <p:nvPr/>
+        </p:nvSpPr>
+        <p:spPr>
+          <a:xfrm>
+            <a:off x="812767" y="812763"/>
+            <a:ext cx="10883460" cy="238720"/>
+          </a:xfrm>
+          <a:prstGeom prst="rect">
+            <a:avLst/>
+          </a:prstGeom>
+          <a:noFill/>
+          <a:ln/>
+        </p:spPr>
+        <p:txBody>
+          <a:bodyPr wrap="square" lIns="0" tIns="0" rIns="0" bIns="0" rtlCol="0" anchor="t">
+            <a:normAutofit/>
+          </a:bodyPr>
+          <a:lstStyle/>
+          <a:p>
+            <a:pPr algn="l" indent="0" marL="0">
+              <a:lnSpc>
+                <a:spcPts val="1680"/>
+              </a:lnSpc>
+              <a:buNone/>
+            </a:pPr>
+            <a:r>
+              <a:rPr lang="en-US" sz="1200" b="1" spc="100" kern="0" dirty="0">
+                <a:solidFill>
+                  <a:srgbClr val="A4501C"/>
+                </a:solidFill>
+                <a:latin typeface="IBM Plex Sans" pitchFamily="34" charset="0"/>
+                <a:ea typeface="IBM Plex Sans" pitchFamily="34" charset="-122"/>
+                <a:cs typeface="IBM Plex Sans" pitchFamily="34" charset="-120"/>
+              </a:rPr>
+              <a:t>APPENDIX · QUESTIONS ON WHY IT’S FASTER</a:t>
+            </a:r>
+            <a:endParaRPr lang="en-US" sz="1200" dirty="0"/>
+          </a:p>
+        </p:txBody>
+      </p:sp>
+      <p:sp>
+        <p:nvSpPr>
+          <p:cNvPr id="3" name="Text 1"/>
+          <p:cNvSpPr/>
+          <p:nvPr>
+            <p:ph type="title"/>
+          </p:nvPr>
+        </p:nvSpPr>
+        <p:spPr>
+          <a:xfrm>
+            <a:off x="812767" y="1102233"/>
+            <a:ext cx="10883460" cy="472380"/>
+          </a:xfrm>
+          <a:prstGeom prst="rect">
+            <a:avLst/>
+          </a:prstGeom>
+          <a:noFill/>
+          <a:ln/>
+        </p:spPr>
+        <p:txBody>
+          <a:bodyPr wrap="square" lIns="0" tIns="0" rIns="0" bIns="0" rtlCol="0" anchor="t">
+            <a:normAutofit/>
+          </a:bodyPr>
+          <a:lstStyle/>
+          <a:p>
+            <a:pPr algn="l" indent="0" marL="0">
+              <a:lnSpc>
+                <a:spcPts val="3520"/>
+              </a:lnSpc>
+              <a:buNone/>
+            </a:pPr>
+            <a:r>
+              <a:rPr lang="en-US" sz="3200" b="1" i="0" dirty="0">
+                <a:solidFill>
+                  <a:srgbClr val="17332B"/>
+                </a:solidFill>
+                <a:latin typeface="Source Serif 4" pitchFamily="18" charset="0"/>
+                <a:ea typeface="Source Serif 4" pitchFamily="18" charset="-122"/>
+                <a:cs typeface="Source Serif 4" pitchFamily="18" charset="-120"/>
+              </a:rPr>
+              <a:t>The hard work is done before anyone asks</a:t>
+            </a:r>
+            <a:endParaRPr lang="en-US" sz="3200" dirty="0"/>
+          </a:p>
+        </p:txBody>
+      </p:sp>
+      <p:sp>
+        <p:nvSpPr>
+          <p:cNvPr id="4" name="Shape 2"/>
+          <p:cNvSpPr/>
+          <p:nvPr/>
+        </p:nvSpPr>
+        <p:spPr>
+          <a:xfrm>
+            <a:off x="812767" y="1732268"/>
+            <a:ext cx="10566466" cy="0"/>
+          </a:xfrm>
+          <a:prstGeom prst="line">
+            <a:avLst/>
+          </a:prstGeom>
+          <a:noFill/>
+          <a:ln w="10583">
+            <a:solidFill>
+              <a:srgbClr val="141413">
+                <a:alpha val="22000"/>
+              </a:srgbClr>
+            </a:solidFill>
+            <a:prstDash val="solid"/>
+          </a:ln>
+        </p:spPr>
+      </p:sp>
+      <p:sp>
+        <p:nvSpPr>
+          <p:cNvPr id="5" name="Shape 3"/>
+          <p:cNvSpPr/>
+          <p:nvPr/>
+        </p:nvSpPr>
+        <p:spPr>
+          <a:xfrm>
+            <a:off x="818059" y="1726977"/>
+            <a:ext cx="0" cy="2857004"/>
+          </a:xfrm>
+          <a:prstGeom prst="line">
+            <a:avLst/>
+          </a:prstGeom>
+          <a:noFill/>
+          <a:ln w="10583">
+            <a:solidFill>
+              <a:srgbClr val="141413">
+                <a:alpha val="22000"/>
+              </a:srgbClr>
+            </a:solidFill>
+            <a:prstDash val="solid"/>
+          </a:ln>
+        </p:spPr>
+      </p:sp>
+      <p:graphicFrame>
+        <p:nvGraphicFramePr>
+          <p:cNvPr id="6" name="Table 0"/>
+          <p:cNvGraphicFramePr>
+            <a:graphicFrameLocks noGrp="1"/>
+          </p:cNvGraphicFramePr>
+          <p:nvPr>
+            <p:extLst>
+              <p:ext uri="{D42A27DB-BD31-4B8C-83A1-F6EECF244321}">
+                <p14:modId xmlns:p14="http://schemas.microsoft.com/office/powerpoint/2010/main" val="1579011935"/>
+              </p:ext>
+            </p:extLst>
+          </p:nvPr>
+        </p:nvGraphicFramePr>
+        <p:xfrm>
+          <a:off x="937650" y="1801060"/>
+          <a:ext cx="10327283" cy="2719420"/>
+        </p:xfrm>
+        <a:graphic>
+          <a:graphicData uri="http://schemas.openxmlformats.org/drawingml/2006/table">
+            <a:tbl>
+              <a:tblPr/>
+              <a:tblGrid>
+                <a:gridCol w="2065457"/>
+                <a:gridCol w="3201458"/>
+                <a:gridCol w="3201458"/>
+                <a:gridCol w="1858911"/>
+              </a:tblGrid>
+              <a:tr h="330564">
+                <a:tc>
+                  <a:txBody>
+                    <a:bodyPr/>
+                    <a:lstStyle/>
+                    <a:p>
+                      <a:pPr indent="0" marL="0">
+                        <a:lnSpc>
+                          <a:spcPts val="1680"/>
+                        </a:lnSpc>
+                        <a:buNone/>
+                      </a:pPr>
+                      <a:r>
+                        <a:rPr lang="en-US" sz="1200" b="1" dirty="0">
+                          <a:solidFill>
+                            <a:srgbClr val="F7F5EF"/>
+                          </a:solidFill>
+                          <a:latin typeface="IBM Plex Sans" pitchFamily="34" charset="0"/>
+                          <a:ea typeface="IBM Plex Sans" pitchFamily="34" charset="-122"/>
+                          <a:cs typeface="IBM Plex Sans" pitchFamily="34" charset="-120"/>
+                        </a:rPr>
+                        <a:t>Reason</a:t>
+                      </a:r>
+                      <a:endParaRPr lang="en-US" sz="1200" dirty="0">
+                        <a:latin typeface="IBM Plex Sans" charset="0"/>
+                        <a:ea typeface="IBM Plex Sans" charset="0"/>
+                        <a:cs typeface="IBM Plex Sans" charset="0"/>
+                      </a:endParaRPr>
+                    </a:p>
+                  </a:txBody>
+                  <a:tcPr marL="53340" marR="53340" marT="53340" marB="53340" anchor="t">
+                    <a:lnL w="0" cap="flat" cmpd="sng" algn="ctr">
+                      <a:noFill/>
+                    </a:lnL>
+                    <a:lnR w="12700" cap="flat" cmpd="sng" algn="ctr">
+                      <a:solidFill>
+                        <a:srgbClr val="162C26"/>
+                      </a:solidFill>
+                      <a:prstDash val="solid"/>
+                      <a:round/>
+                      <a:headEnd type="none" w="med" len="med"/>
+                      <a:tailEnd type="none" w="med" len="med"/>
+                    </a:lnR>
+                    <a:lnT w="0" cap="flat" cmpd="sng" algn="ctr">
+                      <a:noFill/>
+                    </a:lnT>
+                    <a:lnB w="12700" cap="flat" cmpd="sng" algn="ctr">
+                      <a:solidFill>
+                        <a:srgbClr val="162C26"/>
+                      </a:solidFill>
+                      <a:prstDash val="solid"/>
+                      <a:round/>
+                      <a:headEnd type="none" w="med" len="med"/>
+                      <a:tailEnd type="none" w="med" len="med"/>
+                    </a:lnB>
+                    <a:solidFill>
+                      <a:srgbClr val="17332B"/>
+                    </a:solidFill>
+                  </a:tcPr>
+                </a:tc>
+                <a:tc>
+                  <a:txBody>
+                    <a:bodyPr/>
+                    <a:lstStyle/>
+                    <a:p>
+                      <a:pPr indent="0" marL="0">
+                        <a:lnSpc>
+                          <a:spcPts val="1680"/>
+                        </a:lnSpc>
+                        <a:buNone/>
+                      </a:pPr>
+                      <a:r>
+                        <a:rPr lang="en-US" sz="1200" b="1" dirty="0">
+                          <a:solidFill>
+                            <a:srgbClr val="F7F5EF"/>
+                          </a:solidFill>
+                          <a:latin typeface="IBM Plex Sans" pitchFamily="34" charset="0"/>
+                          <a:ea typeface="IBM Plex Sans" pitchFamily="34" charset="-122"/>
+                          <a:cs typeface="IBM Plex Sans" pitchFamily="34" charset="-120"/>
+                        </a:rPr>
+                        <a:t>Earth Engine (today)</a:t>
+                      </a:r>
+                      <a:endParaRPr lang="en-US" sz="1200" dirty="0">
+                        <a:latin typeface="IBM Plex Sans" charset="0"/>
+                        <a:ea typeface="IBM Plex Sans" charset="0"/>
+                        <a:cs typeface="IBM Plex Sans" charset="0"/>
+                      </a:endParaRPr>
+                    </a:p>
+                  </a:txBody>
+                  <a:tcPr marL="53340" marR="53340" marT="53340" marB="53340" anchor="t">
+                    <a:lnL w="12700" cap="flat" cmpd="sng" algn="ctr">
+                      <a:solidFill>
+                        <a:srgbClr val="162C26"/>
+                      </a:solidFill>
+                      <a:prstDash val="solid"/>
+                      <a:round/>
+                      <a:headEnd type="none" w="med" len="med"/>
+                      <a:tailEnd type="none" w="med" len="med"/>
+                    </a:lnL>
+                    <a:lnR w="12700" cap="flat" cmpd="sng" algn="ctr">
+                      <a:solidFill>
+                        <a:srgbClr val="162C26"/>
+                      </a:solidFill>
+                      <a:prstDash val="solid"/>
+                      <a:round/>
+                      <a:headEnd type="none" w="med" len="med"/>
+                      <a:tailEnd type="none" w="med" len="med"/>
+                    </a:lnR>
+                    <a:lnT w="0" cap="flat" cmpd="sng" algn="ctr">
+                      <a:noFill/>
+                    </a:lnT>
+                    <a:lnB w="12700" cap="flat" cmpd="sng" algn="ctr">
+                      <a:solidFill>
+                        <a:srgbClr val="162C26"/>
+                      </a:solidFill>
+                      <a:prstDash val="solid"/>
+                      <a:round/>
+                      <a:headEnd type="none" w="med" len="med"/>
+                      <a:tailEnd type="none" w="med" len="med"/>
+                    </a:lnB>
+                    <a:solidFill>
+                      <a:srgbClr val="17332B"/>
+                    </a:solidFill>
+                  </a:tcPr>
+                </a:tc>
+                <a:tc>
+                  <a:txBody>
+                    <a:bodyPr/>
+                    <a:lstStyle/>
+                    <a:p>
+                      <a:pPr indent="0" marL="0">
+                        <a:lnSpc>
+                          <a:spcPts val="1680"/>
+                        </a:lnSpc>
+                        <a:buNone/>
+                      </a:pPr>
+                      <a:r>
+                        <a:rPr lang="en-US" sz="1200" b="1" dirty="0">
+                          <a:solidFill>
+                            <a:srgbClr val="F7F5EF"/>
+                          </a:solidFill>
+                          <a:latin typeface="IBM Plex Sans" pitchFamily="34" charset="0"/>
+                          <a:ea typeface="IBM Plex Sans" pitchFamily="34" charset="-122"/>
+                          <a:cs typeface="IBM Plex Sans" pitchFamily="34" charset="-120"/>
+                        </a:rPr>
+                        <a:t>Ours</a:t>
+                      </a:r>
+                      <a:endParaRPr lang="en-US" sz="1200" dirty="0">
+                        <a:latin typeface="IBM Plex Sans" charset="0"/>
+                        <a:ea typeface="IBM Plex Sans" charset="0"/>
+                        <a:cs typeface="IBM Plex Sans" charset="0"/>
+                      </a:endParaRPr>
+                    </a:p>
+                  </a:txBody>
+                  <a:tcPr marL="53340" marR="53340" marT="53340" marB="53340" anchor="t">
+                    <a:lnL w="12700" cap="flat" cmpd="sng" algn="ctr">
+                      <a:solidFill>
+                        <a:srgbClr val="162C26"/>
+                      </a:solidFill>
+                      <a:prstDash val="solid"/>
+                      <a:round/>
+                      <a:headEnd type="none" w="med" len="med"/>
+                      <a:tailEnd type="none" w="med" len="med"/>
+                    </a:lnL>
+                    <a:lnR w="12700" cap="flat" cmpd="sng" algn="ctr">
+                      <a:solidFill>
+                        <a:srgbClr val="162C26"/>
+                      </a:solidFill>
+                      <a:prstDash val="solid"/>
+                      <a:round/>
+                      <a:headEnd type="none" w="med" len="med"/>
+                      <a:tailEnd type="none" w="med" len="med"/>
+                    </a:lnR>
+                    <a:lnT w="0" cap="flat" cmpd="sng" algn="ctr">
+                      <a:noFill/>
+                    </a:lnT>
+                    <a:lnB w="12700" cap="flat" cmpd="sng" algn="ctr">
+                      <a:solidFill>
+                        <a:srgbClr val="162C26"/>
+                      </a:solidFill>
+                      <a:prstDash val="solid"/>
+                      <a:round/>
+                      <a:headEnd type="none" w="med" len="med"/>
+                      <a:tailEnd type="none" w="med" len="med"/>
+                    </a:lnB>
+                    <a:solidFill>
+                      <a:srgbClr val="17332B"/>
+                    </a:solidFill>
+                  </a:tcPr>
+                </a:tc>
+                <a:tc>
+                  <a:txBody>
+                    <a:bodyPr/>
+                    <a:lstStyle/>
+                    <a:p>
+                      <a:pPr indent="0" marL="0">
+                        <a:lnSpc>
+                          <a:spcPts val="1680"/>
+                        </a:lnSpc>
+                        <a:buNone/>
+                      </a:pPr>
+                      <a:r>
+                        <a:rPr lang="en-US" sz="1200" b="1" dirty="0">
+                          <a:solidFill>
+                            <a:srgbClr val="F7F5EF"/>
+                          </a:solidFill>
+                          <a:latin typeface="IBM Plex Sans" pitchFamily="34" charset="0"/>
+                          <a:ea typeface="IBM Plex Sans" pitchFamily="34" charset="-122"/>
+                          <a:cs typeface="IBM Plex Sans" pitchFamily="34" charset="-120"/>
+                        </a:rPr>
+                        <a:t>Effect</a:t>
+                      </a:r>
+                      <a:endParaRPr lang="en-US" sz="1200" dirty="0">
+                        <a:latin typeface="IBM Plex Sans" charset="0"/>
+                        <a:ea typeface="IBM Plex Sans" charset="0"/>
+                        <a:cs typeface="IBM Plex Sans" charset="0"/>
+                      </a:endParaRPr>
+                    </a:p>
+                  </a:txBody>
+                  <a:tcPr marL="53340" marR="53340" marT="53340" marB="53340" anchor="t">
+                    <a:lnL w="12700" cap="flat" cmpd="sng" algn="ctr">
+                      <a:solidFill>
+                        <a:srgbClr val="162C26"/>
+                      </a:solidFill>
+                      <a:prstDash val="solid"/>
+                      <a:round/>
+                      <a:headEnd type="none" w="med" len="med"/>
+                      <a:tailEnd type="none" w="med" len="med"/>
+                    </a:lnL>
+                    <a:lnR w="12700" cap="flat" cmpd="sng" algn="ctr">
+                      <a:solidFill>
+                        <a:srgbClr val="162C26"/>
+                      </a:solidFill>
+                      <a:prstDash val="solid"/>
+                      <a:round/>
+                      <a:headEnd type="none" w="med" len="med"/>
+                      <a:tailEnd type="none" w="med" len="med"/>
+                    </a:lnR>
+                    <a:lnT w="0" cap="flat" cmpd="sng" algn="ctr">
+                      <a:noFill/>
+                    </a:lnT>
+                    <a:lnB w="12700" cap="flat" cmpd="sng" algn="ctr">
+                      <a:solidFill>
+                        <a:srgbClr val="162C26"/>
+                      </a:solidFill>
+                      <a:prstDash val="solid"/>
+                      <a:round/>
+                      <a:headEnd type="none" w="med" len="med"/>
+                      <a:tailEnd type="none" w="med" len="med"/>
+                    </a:lnB>
+                    <a:solidFill>
+                      <a:srgbClr val="17332B"/>
+                    </a:solidFill>
+                  </a:tcPr>
+                </a:tc>
+              </a:tr>
+              <a:tr h="757204">
+                <a:tc>
+                  <a:txBody>
+                    <a:bodyPr/>
+                    <a:lstStyle/>
+                    <a:p>
+                      <a:pPr indent="0" marL="0">
+                        <a:lnSpc>
+                          <a:spcPts val="1680"/>
+                        </a:lnSpc>
+                        <a:buNone/>
+                      </a:pPr>
+                      <a:r>
+                        <a:rPr lang="en-US" sz="1200" dirty="0">
+                          <a:solidFill>
+                            <a:srgbClr val="2E3B35"/>
+                          </a:solidFill>
+                          <a:latin typeface="IBM Plex Sans" pitchFamily="34" charset="0"/>
+                          <a:ea typeface="IBM Plex Sans" pitchFamily="34" charset="-122"/>
+                          <a:cs typeface="IBM Plex Sans" pitchFamily="34" charset="-120"/>
+                        </a:rPr>
+                        <a:t>1. When the work happens</a:t>
+                      </a:r>
+                      <a:endParaRPr lang="en-US" sz="1200" dirty="0">
+                        <a:latin typeface="IBM Plex Sans" charset="0"/>
+                        <a:ea typeface="IBM Plex Sans" charset="0"/>
+                        <a:cs typeface="IBM Plex Sans" charset="0"/>
+                      </a:endParaRPr>
+                    </a:p>
+                  </a:txBody>
+                  <a:tcPr marL="53340" marR="53340" marT="53340" marB="53340" anchor="t">
+                    <a:lnL w="0" cap="flat" cmpd="sng" algn="ctr">
+                      <a:noFill/>
+                    </a:lnL>
+                    <a:lnR w="12700" cap="flat" cmpd="sng" algn="ctr">
+                      <a:solidFill>
+                        <a:srgbClr val="C9C8C5"/>
+                      </a:solidFill>
+                      <a:prstDash val="solid"/>
+                      <a:round/>
+                      <a:headEnd type="none" w="med" len="med"/>
+                      <a:tailEnd type="none" w="med" len="med"/>
+                    </a:lnR>
+                    <a:lnT w="12700" cap="flat" cmpd="sng" algn="ctr">
+                      <a:solidFill>
+                        <a:srgbClr val="162C26"/>
+                      </a:solidFill>
+                      <a:prstDash val="solid"/>
+                      <a:round/>
+                      <a:headEnd type="none" w="med" len="med"/>
+                      <a:tailEnd type="none" w="med" len="med"/>
+                    </a:lnT>
+                    <a:lnB w="12700" cap="flat" cmpd="sng" algn="ctr">
+                      <a:solidFill>
+                        <a:srgbClr val="C9C8C5"/>
+                      </a:solidFill>
+                      <a:prstDash val="solid"/>
+                      <a:round/>
+                      <a:headEnd type="none" w="med" len="med"/>
+                      <a:tailEnd type="none" w="med" len="med"/>
+                    </a:lnB>
+                    <a:solidFill>
+                      <a:srgbClr val="FCFBF7"/>
+                    </a:solidFill>
+                  </a:tcPr>
+                </a:tc>
+                <a:tc>
+                  <a:txBody>
+                    <a:bodyPr/>
+                    <a:lstStyle/>
+                    <a:p>
+                      <a:pPr indent="0" marL="0">
+                        <a:lnSpc>
+                          <a:spcPts val="1680"/>
+                        </a:lnSpc>
+                        <a:buNone/>
+                      </a:pPr>
+                      <a:r>
+                        <a:rPr lang="en-US" sz="1200" dirty="0">
+                          <a:solidFill>
+                            <a:srgbClr val="2E3B35"/>
+                          </a:solidFill>
+                          <a:latin typeface="IBM Plex Sans" pitchFamily="34" charset="0"/>
+                          <a:ea typeface="IBM Plex Sans" pitchFamily="34" charset="-122"/>
+                          <a:cs typeface="IBM Plex Sans" pitchFamily="34" charset="-120"/>
+                        </a:rPr>
+                        <a:t>Every request redoes it all: which pixels fall in the farm, processing the full layers</a:t>
+                      </a:r>
+                      <a:endParaRPr lang="en-US" sz="1200" dirty="0">
+                        <a:latin typeface="IBM Plex Sans" charset="0"/>
+                        <a:ea typeface="IBM Plex Sans" charset="0"/>
+                        <a:cs typeface="IBM Plex Sans" charset="0"/>
+                      </a:endParaRPr>
+                    </a:p>
+                  </a:txBody>
+                  <a:tcPr marL="53340" marR="53340" marT="53340" marB="53340" anchor="t">
+                    <a:lnL w="12700" cap="flat" cmpd="sng" algn="ctr">
+                      <a:solidFill>
+                        <a:srgbClr val="C9C8C5"/>
+                      </a:solidFill>
+                      <a:prstDash val="solid"/>
+                      <a:round/>
+                      <a:headEnd type="none" w="med" len="med"/>
+                      <a:tailEnd type="none" w="med" len="med"/>
+                    </a:lnL>
+                    <a:lnR w="12700" cap="flat" cmpd="sng" algn="ctr">
+                      <a:solidFill>
+                        <a:srgbClr val="C9C8C5"/>
+                      </a:solidFill>
+                      <a:prstDash val="solid"/>
+                      <a:round/>
+                      <a:headEnd type="none" w="med" len="med"/>
+                      <a:tailEnd type="none" w="med" len="med"/>
+                    </a:lnR>
+                    <a:lnT w="12700" cap="flat" cmpd="sng" algn="ctr">
+                      <a:solidFill>
+                        <a:srgbClr val="162C26"/>
+                      </a:solidFill>
+                      <a:prstDash val="solid"/>
+                      <a:round/>
+                      <a:headEnd type="none" w="med" len="med"/>
+                      <a:tailEnd type="none" w="med" len="med"/>
+                    </a:lnT>
+                    <a:lnB w="12700" cap="flat" cmpd="sng" algn="ctr">
+                      <a:solidFill>
+                        <a:srgbClr val="C9C8C5"/>
+                      </a:solidFill>
+                      <a:prstDash val="solid"/>
+                      <a:round/>
+                      <a:headEnd type="none" w="med" len="med"/>
+                      <a:tailEnd type="none" w="med" len="med"/>
+                    </a:lnB>
+                    <a:solidFill>
+                      <a:srgbClr val="FCFBF7"/>
+                    </a:solidFill>
+                  </a:tcPr>
+                </a:tc>
+                <a:tc>
+                  <a:txBody>
+                    <a:bodyPr/>
+                    <a:lstStyle/>
+                    <a:p>
+                      <a:pPr indent="0" marL="0">
+                        <a:lnSpc>
+                          <a:spcPts val="1680"/>
+                        </a:lnSpc>
+                        <a:buNone/>
+                      </a:pPr>
+                      <a:r>
+                        <a:rPr lang="en-US" sz="1200" dirty="0">
+                          <a:solidFill>
+                            <a:srgbClr val="2E3B35"/>
+                          </a:solidFill>
+                          <a:latin typeface="IBM Plex Sans" pitchFamily="34" charset="0"/>
+                          <a:ea typeface="IBM Plex Sans" pitchFamily="34" charset="-122"/>
+                          <a:cs typeface="IBM Plex Sans" pitchFamily="34" charset="-120"/>
+                        </a:rPr>
+                        <a:t>Done once: farm cells at upload, layers condensed to 16 bits per cell at each release</a:t>
+                      </a:r>
+                      <a:endParaRPr lang="en-US" sz="1200" dirty="0">
+                        <a:latin typeface="IBM Plex Sans" charset="0"/>
+                        <a:ea typeface="IBM Plex Sans" charset="0"/>
+                        <a:cs typeface="IBM Plex Sans" charset="0"/>
+                      </a:endParaRPr>
+                    </a:p>
+                  </a:txBody>
+                  <a:tcPr marL="53340" marR="53340" marT="53340" marB="53340" anchor="t">
+                    <a:lnL w="12700" cap="flat" cmpd="sng" algn="ctr">
+                      <a:solidFill>
+                        <a:srgbClr val="C9C8C5"/>
+                      </a:solidFill>
+                      <a:prstDash val="solid"/>
+                      <a:round/>
+                      <a:headEnd type="none" w="med" len="med"/>
+                      <a:tailEnd type="none" w="med" len="med"/>
+                    </a:lnL>
+                    <a:lnR w="12700" cap="flat" cmpd="sng" algn="ctr">
+                      <a:solidFill>
+                        <a:srgbClr val="C9C8C5"/>
+                      </a:solidFill>
+                      <a:prstDash val="solid"/>
+                      <a:round/>
+                      <a:headEnd type="none" w="med" len="med"/>
+                      <a:tailEnd type="none" w="med" len="med"/>
+                    </a:lnR>
+                    <a:lnT w="12700" cap="flat" cmpd="sng" algn="ctr">
+                      <a:solidFill>
+                        <a:srgbClr val="162C26"/>
+                      </a:solidFill>
+                      <a:prstDash val="solid"/>
+                      <a:round/>
+                      <a:headEnd type="none" w="med" len="med"/>
+                      <a:tailEnd type="none" w="med" len="med"/>
+                    </a:lnT>
+                    <a:lnB w="12700" cap="flat" cmpd="sng" algn="ctr">
+                      <a:solidFill>
+                        <a:srgbClr val="C9C8C5"/>
+                      </a:solidFill>
+                      <a:prstDash val="solid"/>
+                      <a:round/>
+                      <a:headEnd type="none" w="med" len="med"/>
+                      <a:tailEnd type="none" w="med" len="med"/>
+                    </a:lnB>
+                    <a:solidFill>
+                      <a:srgbClr val="FCFBF7"/>
+                    </a:solidFill>
+                  </a:tcPr>
+                </a:tc>
+                <a:tc>
+                  <a:txBody>
+                    <a:bodyPr/>
+                    <a:lstStyle/>
+                    <a:p>
+                      <a:pPr indent="0" marL="0">
+                        <a:lnSpc>
+                          <a:spcPts val="1680"/>
+                        </a:lnSpc>
+                        <a:buNone/>
+                      </a:pPr>
+                      <a:r>
+                        <a:rPr lang="en-US" sz="1200" dirty="0">
+                          <a:solidFill>
+                            <a:srgbClr val="2F6FA3"/>
+                          </a:solidFill>
+                          <a:latin typeface="IBM Plex Sans" pitchFamily="34" charset="0"/>
+                          <a:ea typeface="IBM Plex Sans" pitchFamily="34" charset="-122"/>
+                          <a:cs typeface="IBM Plex Sans" pitchFamily="34" charset="-120"/>
+                        </a:rPr>
+                        <a:t>A check is a lookup</a:t>
+                      </a:r>
+                      <a:endParaRPr lang="en-US" sz="1200" dirty="0">
+                        <a:latin typeface="IBM Plex Sans" charset="0"/>
+                        <a:ea typeface="IBM Plex Sans" charset="0"/>
+                        <a:cs typeface="IBM Plex Sans" charset="0"/>
+                      </a:endParaRPr>
+                    </a:p>
+                  </a:txBody>
+                  <a:tcPr marL="53340" marR="53340" marT="53340" marB="53340" anchor="t">
+                    <a:lnL w="12700" cap="flat" cmpd="sng" algn="ctr">
+                      <a:solidFill>
+                        <a:srgbClr val="C9C8C5"/>
+                      </a:solidFill>
+                      <a:prstDash val="solid"/>
+                      <a:round/>
+                      <a:headEnd type="none" w="med" len="med"/>
+                      <a:tailEnd type="none" w="med" len="med"/>
+                    </a:lnL>
+                    <a:lnR w="12700" cap="flat" cmpd="sng" algn="ctr">
+                      <a:solidFill>
+                        <a:srgbClr val="C9C8C5"/>
+                      </a:solidFill>
+                      <a:prstDash val="solid"/>
+                      <a:round/>
+                      <a:headEnd type="none" w="med" len="med"/>
+                      <a:tailEnd type="none" w="med" len="med"/>
+                    </a:lnR>
+                    <a:lnT w="12700" cap="flat" cmpd="sng" algn="ctr">
+                      <a:solidFill>
+                        <a:srgbClr val="162C26"/>
+                      </a:solidFill>
+                      <a:prstDash val="solid"/>
+                      <a:round/>
+                      <a:headEnd type="none" w="med" len="med"/>
+                      <a:tailEnd type="none" w="med" len="med"/>
+                    </a:lnT>
+                    <a:lnB w="12700" cap="flat" cmpd="sng" algn="ctr">
+                      <a:solidFill>
+                        <a:srgbClr val="C9C8C5"/>
+                      </a:solidFill>
+                      <a:prstDash val="solid"/>
+                      <a:round/>
+                      <a:headEnd type="none" w="med" len="med"/>
+                      <a:tailEnd type="none" w="med" len="med"/>
+                    </a:lnB>
+                    <a:solidFill>
+                      <a:srgbClr val="FCFBF7"/>
+                    </a:solidFill>
+                  </a:tcPr>
+                </a:tc>
+              </a:tr>
+              <a:tr h="543884">
+                <a:tc>
+                  <a:txBody>
+                    <a:bodyPr/>
+                    <a:lstStyle/>
+                    <a:p>
+                      <a:pPr indent="0" marL="0">
+                        <a:lnSpc>
+                          <a:spcPts val="1680"/>
+                        </a:lnSpc>
+                        <a:buNone/>
+                      </a:pPr>
+                      <a:r>
+                        <a:rPr lang="en-US" sz="1200" dirty="0">
+                          <a:solidFill>
+                            <a:srgbClr val="2E3B35"/>
+                          </a:solidFill>
+                          <a:latin typeface="IBM Plex Sans" pitchFamily="34" charset="0"/>
+                          <a:ea typeface="IBM Plex Sans" pitchFamily="34" charset="-122"/>
+                          <a:cs typeface="IBM Plex Sans" pitchFamily="34" charset="-120"/>
+                        </a:rPr>
+                        <a:t>2. Data touched</a:t>
+                      </a:r>
+                      <a:endParaRPr lang="en-US" sz="1200" dirty="0">
+                        <a:latin typeface="IBM Plex Sans" charset="0"/>
+                        <a:ea typeface="IBM Plex Sans" charset="0"/>
+                        <a:cs typeface="IBM Plex Sans" charset="0"/>
+                      </a:endParaRPr>
+                    </a:p>
+                  </a:txBody>
+                  <a:tcPr marL="53340" marR="53340" marT="53340" marB="53340" anchor="t">
+                    <a:lnL w="0" cap="flat" cmpd="sng" algn="ctr">
+                      <a:noFill/>
+                    </a:lnL>
+                    <a:lnR w="12700" cap="flat" cmpd="sng" algn="ctr">
+                      <a:solidFill>
+                        <a:srgbClr val="C3C0B9"/>
+                      </a:solidFill>
+                      <a:prstDash val="solid"/>
+                      <a:round/>
+                      <a:headEnd type="none" w="med" len="med"/>
+                      <a:tailEnd type="none" w="med" len="med"/>
+                    </a:lnR>
+                    <a:lnT w="12700" cap="flat" cmpd="sng" algn="ctr">
+                      <a:solidFill>
+                        <a:srgbClr val="C9C8C5"/>
+                      </a:solidFill>
+                      <a:prstDash val="solid"/>
+                      <a:round/>
+                      <a:headEnd type="none" w="med" len="med"/>
+                      <a:tailEnd type="none" w="med" len="med"/>
+                    </a:lnT>
+                    <a:lnB w="12700" cap="flat" cmpd="sng" algn="ctr">
+                      <a:solidFill>
+                        <a:srgbClr val="C3C0B9"/>
+                      </a:solidFill>
+                      <a:prstDash val="solid"/>
+                      <a:round/>
+                      <a:headEnd type="none" w="med" len="med"/>
+                      <a:tailEnd type="none" w="med" len="med"/>
+                    </a:lnB>
+                    <a:solidFill>
+                      <a:srgbClr val="F4F1E8"/>
+                    </a:solidFill>
+                  </a:tcPr>
+                </a:tc>
+                <a:tc>
+                  <a:txBody>
+                    <a:bodyPr/>
+                    <a:lstStyle/>
+                    <a:p>
+                      <a:pPr indent="0" marL="0">
+                        <a:lnSpc>
+                          <a:spcPts val="1680"/>
+                        </a:lnSpc>
+                        <a:buNone/>
+                      </a:pPr>
+                      <a:r>
+                        <a:rPr lang="en-US" sz="1200" dirty="0">
+                          <a:solidFill>
+                            <a:srgbClr val="2E3B35"/>
+                          </a:solidFill>
+                          <a:latin typeface="IBM Plex Sans" pitchFamily="34" charset="0"/>
+                          <a:ea typeface="IBM Plex Sans" pitchFamily="34" charset="-122"/>
+                          <a:cs typeface="IBM Plex Sans" pitchFamily="34" charset="-120"/>
+                        </a:rPr>
+                        <a:t>Full layers, several bands, combined on the fly; most compute goes on preparing pixels</a:t>
+                      </a:r>
+                      <a:endParaRPr lang="en-US" sz="1200" dirty="0">
+                        <a:latin typeface="IBM Plex Sans" charset="0"/>
+                        <a:ea typeface="IBM Plex Sans" charset="0"/>
+                        <a:cs typeface="IBM Plex Sans" charset="0"/>
+                      </a:endParaRPr>
+                    </a:p>
+                  </a:txBody>
+                  <a:tcPr marL="53340" marR="53340" marT="53340" marB="53340" anchor="t">
+                    <a:lnL w="12700" cap="flat" cmpd="sng" algn="ctr">
+                      <a:solidFill>
+                        <a:srgbClr val="C3C0B9"/>
+                      </a:solidFill>
+                      <a:prstDash val="solid"/>
+                      <a:round/>
+                      <a:headEnd type="none" w="med" len="med"/>
+                      <a:tailEnd type="none" w="med" len="med"/>
+                    </a:lnL>
+                    <a:lnR w="12700" cap="flat" cmpd="sng" algn="ctr">
+                      <a:solidFill>
+                        <a:srgbClr val="C3C0B9"/>
+                      </a:solidFill>
+                      <a:prstDash val="solid"/>
+                      <a:round/>
+                      <a:headEnd type="none" w="med" len="med"/>
+                      <a:tailEnd type="none" w="med" len="med"/>
+                    </a:lnR>
+                    <a:lnT w="12700" cap="flat" cmpd="sng" algn="ctr">
+                      <a:solidFill>
+                        <a:srgbClr val="C9C8C5"/>
+                      </a:solidFill>
+                      <a:prstDash val="solid"/>
+                      <a:round/>
+                      <a:headEnd type="none" w="med" len="med"/>
+                      <a:tailEnd type="none" w="med" len="med"/>
+                    </a:lnT>
+                    <a:lnB w="12700" cap="flat" cmpd="sng" algn="ctr">
+                      <a:solidFill>
+                        <a:srgbClr val="C3C0B9"/>
+                      </a:solidFill>
+                      <a:prstDash val="solid"/>
+                      <a:round/>
+                      <a:headEnd type="none" w="med" len="med"/>
+                      <a:tailEnd type="none" w="med" len="med"/>
+                    </a:lnB>
+                    <a:solidFill>
+                      <a:srgbClr val="F4F1E8"/>
+                    </a:solidFill>
+                  </a:tcPr>
+                </a:tc>
+                <a:tc>
+                  <a:txBody>
+                    <a:bodyPr/>
+                    <a:lstStyle/>
+                    <a:p>
+                      <a:pPr indent="0" marL="0">
+                        <a:lnSpc>
+                          <a:spcPts val="1680"/>
+                        </a:lnSpc>
+                        <a:buNone/>
+                      </a:pPr>
+                      <a:r>
+                        <a:rPr lang="en-US" sz="1200" dirty="0">
+                          <a:solidFill>
+                            <a:srgbClr val="2E3B35"/>
+                          </a:solidFill>
+                          <a:latin typeface="IBM Plex Sans" pitchFamily="34" charset="0"/>
+                          <a:ea typeface="IBM Plex Sans" pitchFamily="34" charset="-122"/>
+                          <a:cs typeface="IBM Plex Sans" pitchFamily="34" charset="-120"/>
+                        </a:rPr>
+                        <a:t>About one tile, under 1 kB, already filtered to what the rule needs</a:t>
+                      </a:r>
+                      <a:endParaRPr lang="en-US" sz="1200" dirty="0">
+                        <a:latin typeface="IBM Plex Sans" charset="0"/>
+                        <a:ea typeface="IBM Plex Sans" charset="0"/>
+                        <a:cs typeface="IBM Plex Sans" charset="0"/>
+                      </a:endParaRPr>
+                    </a:p>
+                  </a:txBody>
+                  <a:tcPr marL="53340" marR="53340" marT="53340" marB="53340" anchor="t">
+                    <a:lnL w="12700" cap="flat" cmpd="sng" algn="ctr">
+                      <a:solidFill>
+                        <a:srgbClr val="C3C0B9"/>
+                      </a:solidFill>
+                      <a:prstDash val="solid"/>
+                      <a:round/>
+                      <a:headEnd type="none" w="med" len="med"/>
+                      <a:tailEnd type="none" w="med" len="med"/>
+                    </a:lnL>
+                    <a:lnR w="12700" cap="flat" cmpd="sng" algn="ctr">
+                      <a:solidFill>
+                        <a:srgbClr val="C3C0B9"/>
+                      </a:solidFill>
+                      <a:prstDash val="solid"/>
+                      <a:round/>
+                      <a:headEnd type="none" w="med" len="med"/>
+                      <a:tailEnd type="none" w="med" len="med"/>
+                    </a:lnR>
+                    <a:lnT w="12700" cap="flat" cmpd="sng" algn="ctr">
+                      <a:solidFill>
+                        <a:srgbClr val="C9C8C5"/>
+                      </a:solidFill>
+                      <a:prstDash val="solid"/>
+                      <a:round/>
+                      <a:headEnd type="none" w="med" len="med"/>
+                      <a:tailEnd type="none" w="med" len="med"/>
+                    </a:lnT>
+                    <a:lnB w="12700" cap="flat" cmpd="sng" algn="ctr">
+                      <a:solidFill>
+                        <a:srgbClr val="C3C0B9"/>
+                      </a:solidFill>
+                      <a:prstDash val="solid"/>
+                      <a:round/>
+                      <a:headEnd type="none" w="med" len="med"/>
+                      <a:tailEnd type="none" w="med" len="med"/>
+                    </a:lnB>
+                    <a:solidFill>
+                      <a:srgbClr val="F4F1E8"/>
+                    </a:solidFill>
+                  </a:tcPr>
+                </a:tc>
+                <a:tc>
+                  <a:txBody>
+                    <a:bodyPr/>
+                    <a:lstStyle/>
+                    <a:p>
+                      <a:pPr indent="0" marL="0">
+                        <a:lnSpc>
+                          <a:spcPts val="1680"/>
+                        </a:lnSpc>
+                        <a:buNone/>
+                      </a:pPr>
+                      <a:r>
+                        <a:rPr lang="en-US" sz="1200" dirty="0">
+                          <a:solidFill>
+                            <a:srgbClr val="2F6FA3"/>
+                          </a:solidFill>
+                          <a:latin typeface="IBM Plex Sans" pitchFamily="34" charset="0"/>
+                          <a:ea typeface="IBM Plex Sans" pitchFamily="34" charset="-122"/>
+                          <a:cs typeface="IBM Plex Sans" pitchFamily="34" charset="-120"/>
+                        </a:rPr>
+                        <a:t>Tiny reads</a:t>
+                      </a:r>
+                      <a:endParaRPr lang="en-US" sz="1200" dirty="0">
+                        <a:latin typeface="IBM Plex Sans" charset="0"/>
+                        <a:ea typeface="IBM Plex Sans" charset="0"/>
+                        <a:cs typeface="IBM Plex Sans" charset="0"/>
+                      </a:endParaRPr>
+                    </a:p>
+                  </a:txBody>
+                  <a:tcPr marL="53340" marR="53340" marT="53340" marB="53340" anchor="t">
+                    <a:lnL w="12700" cap="flat" cmpd="sng" algn="ctr">
+                      <a:solidFill>
+                        <a:srgbClr val="C3C0B9"/>
+                      </a:solidFill>
+                      <a:prstDash val="solid"/>
+                      <a:round/>
+                      <a:headEnd type="none" w="med" len="med"/>
+                      <a:tailEnd type="none" w="med" len="med"/>
+                    </a:lnL>
+                    <a:lnR w="12700" cap="flat" cmpd="sng" algn="ctr">
+                      <a:solidFill>
+                        <a:srgbClr val="C3C0B9"/>
+                      </a:solidFill>
+                      <a:prstDash val="solid"/>
+                      <a:round/>
+                      <a:headEnd type="none" w="med" len="med"/>
+                      <a:tailEnd type="none" w="med" len="med"/>
+                    </a:lnR>
+                    <a:lnT w="12700" cap="flat" cmpd="sng" algn="ctr">
+                      <a:solidFill>
+                        <a:srgbClr val="C9C8C5"/>
+                      </a:solidFill>
+                      <a:prstDash val="solid"/>
+                      <a:round/>
+                      <a:headEnd type="none" w="med" len="med"/>
+                      <a:tailEnd type="none" w="med" len="med"/>
+                    </a:lnT>
+                    <a:lnB w="12700" cap="flat" cmpd="sng" algn="ctr">
+                      <a:solidFill>
+                        <a:srgbClr val="C3C0B9"/>
+                      </a:solidFill>
+                      <a:prstDash val="solid"/>
+                      <a:round/>
+                      <a:headEnd type="none" w="med" len="med"/>
+                      <a:tailEnd type="none" w="med" len="med"/>
+                    </a:lnB>
+                    <a:solidFill>
+                      <a:srgbClr val="F4F1E8"/>
+                    </a:solidFill>
+                  </a:tcPr>
+                </a:tc>
+              </a:tr>
+              <a:tr h="543884">
+                <a:tc>
+                  <a:txBody>
+                    <a:bodyPr/>
+                    <a:lstStyle/>
+                    <a:p>
+                      <a:pPr indent="0" marL="0">
+                        <a:lnSpc>
+                          <a:spcPts val="1680"/>
+                        </a:lnSpc>
+                        <a:buNone/>
+                      </a:pPr>
+                      <a:r>
+                        <a:rPr lang="en-US" sz="1200" dirty="0">
+                          <a:solidFill>
+                            <a:srgbClr val="2E3B35"/>
+                          </a:solidFill>
+                          <a:latin typeface="IBM Plex Sans" pitchFamily="34" charset="0"/>
+                          <a:ea typeface="IBM Plex Sans" pitchFamily="34" charset="-122"/>
+                          <a:cs typeface="IBM Plex Sans" pitchFamily="34" charset="-120"/>
+                        </a:rPr>
+                        <a:t>3. Where it runs</a:t>
+                      </a:r>
+                      <a:endParaRPr lang="en-US" sz="1200" dirty="0">
+                        <a:latin typeface="IBM Plex Sans" charset="0"/>
+                        <a:ea typeface="IBM Plex Sans" charset="0"/>
+                        <a:cs typeface="IBM Plex Sans" charset="0"/>
+                      </a:endParaRPr>
+                    </a:p>
+                  </a:txBody>
+                  <a:tcPr marL="53340" marR="53340" marT="53340" marB="53340" anchor="t">
+                    <a:lnL w="0" cap="flat" cmpd="sng" algn="ctr">
+                      <a:noFill/>
+                    </a:lnL>
+                    <a:lnR w="12700" cap="flat" cmpd="sng" algn="ctr">
+                      <a:solidFill>
+                        <a:srgbClr val="C9C8C5"/>
+                      </a:solidFill>
+                      <a:prstDash val="solid"/>
+                      <a:round/>
+                      <a:headEnd type="none" w="med" len="med"/>
+                      <a:tailEnd type="none" w="med" len="med"/>
+                    </a:lnR>
+                    <a:lnT w="12700" cap="flat" cmpd="sng" algn="ctr">
+                      <a:solidFill>
+                        <a:srgbClr val="C3C0B9"/>
+                      </a:solidFill>
+                      <a:prstDash val="solid"/>
+                      <a:round/>
+                      <a:headEnd type="none" w="med" len="med"/>
+                      <a:tailEnd type="none" w="med" len="med"/>
+                    </a:lnT>
+                    <a:lnB w="12700" cap="flat" cmpd="sng" algn="ctr">
+                      <a:solidFill>
+                        <a:srgbClr val="C9C8C5"/>
+                      </a:solidFill>
+                      <a:prstDash val="solid"/>
+                      <a:round/>
+                      <a:headEnd type="none" w="med" len="med"/>
+                      <a:tailEnd type="none" w="med" len="med"/>
+                    </a:lnB>
+                    <a:solidFill>
+                      <a:srgbClr val="FCFBF7"/>
+                    </a:solidFill>
+                  </a:tcPr>
+                </a:tc>
+                <a:tc>
+                  <a:txBody>
+                    <a:bodyPr/>
+                    <a:lstStyle/>
+                    <a:p>
+                      <a:pPr indent="0" marL="0">
+                        <a:lnSpc>
+                          <a:spcPts val="1680"/>
+                        </a:lnSpc>
+                        <a:buNone/>
+                      </a:pPr>
+                      <a:r>
+                        <a:rPr lang="en-US" sz="1200" dirty="0">
+                          <a:solidFill>
+                            <a:srgbClr val="2E3B35"/>
+                          </a:solidFill>
+                          <a:latin typeface="IBM Plex Sans" pitchFamily="34" charset="0"/>
+                          <a:ea typeface="IBM Plex Sans" pitchFamily="34" charset="-122"/>
+                          <a:cs typeface="IBM Plex Sans" pitchFamily="34" charset="-120"/>
+                        </a:rPr>
+                        <a:t>Google’s servers: a trip over the internet plus queueing, 0.4–6.9 s each</a:t>
+                      </a:r>
+                      <a:endParaRPr lang="en-US" sz="1200" dirty="0">
+                        <a:latin typeface="IBM Plex Sans" charset="0"/>
+                        <a:ea typeface="IBM Plex Sans" charset="0"/>
+                        <a:cs typeface="IBM Plex Sans" charset="0"/>
+                      </a:endParaRPr>
+                    </a:p>
+                  </a:txBody>
+                  <a:tcPr marL="53340" marR="53340" marT="53340" marB="53340" anchor="t">
+                    <a:lnL w="12700" cap="flat" cmpd="sng" algn="ctr">
+                      <a:solidFill>
+                        <a:srgbClr val="C9C8C5"/>
+                      </a:solidFill>
+                      <a:prstDash val="solid"/>
+                      <a:round/>
+                      <a:headEnd type="none" w="med" len="med"/>
+                      <a:tailEnd type="none" w="med" len="med"/>
+                    </a:lnL>
+                    <a:lnR w="12700" cap="flat" cmpd="sng" algn="ctr">
+                      <a:solidFill>
+                        <a:srgbClr val="C9C8C5"/>
+                      </a:solidFill>
+                      <a:prstDash val="solid"/>
+                      <a:round/>
+                      <a:headEnd type="none" w="med" len="med"/>
+                      <a:tailEnd type="none" w="med" len="med"/>
+                    </a:lnR>
+                    <a:lnT w="12700" cap="flat" cmpd="sng" algn="ctr">
+                      <a:solidFill>
+                        <a:srgbClr val="C3C0B9"/>
+                      </a:solidFill>
+                      <a:prstDash val="solid"/>
+                      <a:round/>
+                      <a:headEnd type="none" w="med" len="med"/>
+                      <a:tailEnd type="none" w="med" len="med"/>
+                    </a:lnT>
+                    <a:lnB w="12700" cap="flat" cmpd="sng" algn="ctr">
+                      <a:solidFill>
+                        <a:srgbClr val="C9C8C5"/>
+                      </a:solidFill>
+                      <a:prstDash val="solid"/>
+                      <a:round/>
+                      <a:headEnd type="none" w="med" len="med"/>
+                      <a:tailEnd type="none" w="med" len="med"/>
+                    </a:lnB>
+                    <a:solidFill>
+                      <a:srgbClr val="FCFBF7"/>
+                    </a:solidFill>
+                  </a:tcPr>
+                </a:tc>
+                <a:tc>
+                  <a:txBody>
+                    <a:bodyPr/>
+                    <a:lstStyle/>
+                    <a:p>
+                      <a:pPr indent="0" marL="0">
+                        <a:lnSpc>
+                          <a:spcPts val="1680"/>
+                        </a:lnSpc>
+                        <a:buNone/>
+                      </a:pPr>
+                      <a:r>
+                        <a:rPr lang="en-US" sz="1200" dirty="0">
+                          <a:solidFill>
+                            <a:srgbClr val="2E3B35"/>
+                          </a:solidFill>
+                          <a:latin typeface="IBM Plex Sans" pitchFamily="34" charset="0"/>
+                          <a:ea typeface="IBM Plex Sans" pitchFamily="34" charset="-122"/>
+                          <a:cs typeface="IBM Plex Sans" pitchFamily="34" charset="-120"/>
+                        </a:rPr>
+                        <a:t>On the same machine as the files</a:t>
+                      </a:r>
+                      <a:endParaRPr lang="en-US" sz="1200" dirty="0">
+                        <a:latin typeface="IBM Plex Sans" charset="0"/>
+                        <a:ea typeface="IBM Plex Sans" charset="0"/>
+                        <a:cs typeface="IBM Plex Sans" charset="0"/>
+                      </a:endParaRPr>
+                    </a:p>
+                  </a:txBody>
+                  <a:tcPr marL="53340" marR="53340" marT="53340" marB="53340" anchor="t">
+                    <a:lnL w="12700" cap="flat" cmpd="sng" algn="ctr">
+                      <a:solidFill>
+                        <a:srgbClr val="C9C8C5"/>
+                      </a:solidFill>
+                      <a:prstDash val="solid"/>
+                      <a:round/>
+                      <a:headEnd type="none" w="med" len="med"/>
+                      <a:tailEnd type="none" w="med" len="med"/>
+                    </a:lnL>
+                    <a:lnR w="12700" cap="flat" cmpd="sng" algn="ctr">
+                      <a:solidFill>
+                        <a:srgbClr val="C9C8C5"/>
+                      </a:solidFill>
+                      <a:prstDash val="solid"/>
+                      <a:round/>
+                      <a:headEnd type="none" w="med" len="med"/>
+                      <a:tailEnd type="none" w="med" len="med"/>
+                    </a:lnR>
+                    <a:lnT w="12700" cap="flat" cmpd="sng" algn="ctr">
+                      <a:solidFill>
+                        <a:srgbClr val="C3C0B9"/>
+                      </a:solidFill>
+                      <a:prstDash val="solid"/>
+                      <a:round/>
+                      <a:headEnd type="none" w="med" len="med"/>
+                      <a:tailEnd type="none" w="med" len="med"/>
+                    </a:lnT>
+                    <a:lnB w="12700" cap="flat" cmpd="sng" algn="ctr">
+                      <a:solidFill>
+                        <a:srgbClr val="C9C8C5"/>
+                      </a:solidFill>
+                      <a:prstDash val="solid"/>
+                      <a:round/>
+                      <a:headEnd type="none" w="med" len="med"/>
+                      <a:tailEnd type="none" w="med" len="med"/>
+                    </a:lnB>
+                    <a:solidFill>
+                      <a:srgbClr val="FCFBF7"/>
+                    </a:solidFill>
+                  </a:tcPr>
+                </a:tc>
+                <a:tc>
+                  <a:txBody>
+                    <a:bodyPr/>
+                    <a:lstStyle/>
+                    <a:p>
+                      <a:pPr indent="0" marL="0">
+                        <a:lnSpc>
+                          <a:spcPts val="1680"/>
+                        </a:lnSpc>
+                        <a:buNone/>
+                      </a:pPr>
+                      <a:r>
+                        <a:rPr lang="en-US" sz="1200" dirty="0">
+                          <a:solidFill>
+                            <a:srgbClr val="2F6FA3"/>
+                          </a:solidFill>
+                          <a:latin typeface="IBM Plex Sans" pitchFamily="34" charset="0"/>
+                          <a:ea typeface="IBM Plex Sans" pitchFamily="34" charset="-122"/>
+                          <a:cs typeface="IBM Plex Sans" pitchFamily="34" charset="-120"/>
+                        </a:rPr>
+                        <a:t>No network wait</a:t>
+                      </a:r>
+                      <a:endParaRPr lang="en-US" sz="1200" dirty="0">
+                        <a:latin typeface="IBM Plex Sans" charset="0"/>
+                        <a:ea typeface="IBM Plex Sans" charset="0"/>
+                        <a:cs typeface="IBM Plex Sans" charset="0"/>
+                      </a:endParaRPr>
+                    </a:p>
+                  </a:txBody>
+                  <a:tcPr marL="53340" marR="53340" marT="53340" marB="53340" anchor="t">
+                    <a:lnL w="12700" cap="flat" cmpd="sng" algn="ctr">
+                      <a:solidFill>
+                        <a:srgbClr val="C9C8C5"/>
+                      </a:solidFill>
+                      <a:prstDash val="solid"/>
+                      <a:round/>
+                      <a:headEnd type="none" w="med" len="med"/>
+                      <a:tailEnd type="none" w="med" len="med"/>
+                    </a:lnL>
+                    <a:lnR w="12700" cap="flat" cmpd="sng" algn="ctr">
+                      <a:solidFill>
+                        <a:srgbClr val="C9C8C5"/>
+                      </a:solidFill>
+                      <a:prstDash val="solid"/>
+                      <a:round/>
+                      <a:headEnd type="none" w="med" len="med"/>
+                      <a:tailEnd type="none" w="med" len="med"/>
+                    </a:lnR>
+                    <a:lnT w="12700" cap="flat" cmpd="sng" algn="ctr">
+                      <a:solidFill>
+                        <a:srgbClr val="C3C0B9"/>
+                      </a:solidFill>
+                      <a:prstDash val="solid"/>
+                      <a:round/>
+                      <a:headEnd type="none" w="med" len="med"/>
+                      <a:tailEnd type="none" w="med" len="med"/>
+                    </a:lnT>
+                    <a:lnB w="12700" cap="flat" cmpd="sng" algn="ctr">
+                      <a:solidFill>
+                        <a:srgbClr val="C9C8C5"/>
+                      </a:solidFill>
+                      <a:prstDash val="solid"/>
+                      <a:round/>
+                      <a:headEnd type="none" w="med" len="med"/>
+                      <a:tailEnd type="none" w="med" len="med"/>
+                    </a:lnB>
+                    <a:solidFill>
+                      <a:srgbClr val="FCFBF7"/>
+                    </a:solidFill>
+                  </a:tcPr>
+                </a:tc>
+              </a:tr>
+              <a:tr h="543884">
+                <a:tc>
+                  <a:txBody>
+                    <a:bodyPr/>
+                    <a:lstStyle/>
+                    <a:p>
+                      <a:pPr indent="0" marL="0">
+                        <a:lnSpc>
+                          <a:spcPts val="1680"/>
+                        </a:lnSpc>
+                        <a:buNone/>
+                      </a:pPr>
+                      <a:r>
+                        <a:rPr lang="en-US" sz="1200" dirty="0">
+                          <a:solidFill>
+                            <a:srgbClr val="2E3B35"/>
+                          </a:solidFill>
+                          <a:latin typeface="IBM Plex Sans" pitchFamily="34" charset="0"/>
+                          <a:ea typeface="IBM Plex Sans" pitchFamily="34" charset="-122"/>
+                          <a:cs typeface="IBM Plex Sans" pitchFamily="34" charset="-120"/>
+                        </a:rPr>
+                        <a:t>4. How many at once</a:t>
+                      </a:r>
+                      <a:endParaRPr lang="en-US" sz="1200" dirty="0">
+                        <a:latin typeface="IBM Plex Sans" charset="0"/>
+                        <a:ea typeface="IBM Plex Sans" charset="0"/>
+                        <a:cs typeface="IBM Plex Sans" charset="0"/>
+                      </a:endParaRPr>
+                    </a:p>
+                  </a:txBody>
+                  <a:tcPr marL="53340" marR="53340" marT="53340" marB="53340" anchor="t">
+                    <a:lnL w="0" cap="flat" cmpd="sng" algn="ctr">
+                      <a:noFill/>
+                    </a:lnL>
+                    <a:lnR w="12700" cap="flat" cmpd="sng" algn="ctr">
+                      <a:solidFill>
+                        <a:srgbClr val="C3C0B9"/>
+                      </a:solidFill>
+                      <a:prstDash val="solid"/>
+                      <a:round/>
+                      <a:headEnd type="none" w="med" len="med"/>
+                      <a:tailEnd type="none" w="med" len="med"/>
+                    </a:lnR>
+                    <a:lnT w="12700" cap="flat" cmpd="sng" algn="ctr">
+                      <a:solidFill>
+                        <a:srgbClr val="C9C8C5"/>
+                      </a:solidFill>
+                      <a:prstDash val="solid"/>
+                      <a:round/>
+                      <a:headEnd type="none" w="med" len="med"/>
+                      <a:tailEnd type="none" w="med" len="med"/>
+                    </a:lnT>
+                    <a:lnB w="12700" cap="flat" cmpd="sng" algn="ctr">
+                      <a:solidFill>
+                        <a:srgbClr val="C3C0B9"/>
+                      </a:solidFill>
+                      <a:prstDash val="solid"/>
+                      <a:round/>
+                      <a:headEnd type="none" w="med" len="med"/>
+                      <a:tailEnd type="none" w="med" len="med"/>
+                    </a:lnB>
+                    <a:solidFill>
+                      <a:srgbClr val="F4F1E8"/>
+                    </a:solidFill>
+                  </a:tcPr>
+                </a:tc>
+                <a:tc>
+                  <a:txBody>
+                    <a:bodyPr/>
+                    <a:lstStyle/>
+                    <a:p>
+                      <a:pPr indent="0" marL="0">
+                        <a:lnSpc>
+                          <a:spcPts val="1680"/>
+                        </a:lnSpc>
+                        <a:buNone/>
+                      </a:pPr>
+                      <a:r>
+                        <a:rPr lang="en-US" sz="1200" dirty="0">
+                          <a:solidFill>
+                            <a:srgbClr val="2E3B35"/>
+                          </a:solidFill>
+                          <a:latin typeface="IBM Plex Sans" pitchFamily="34" charset="0"/>
+                          <a:ea typeface="IBM Plex Sans" pitchFamily="34" charset="-122"/>
+                          <a:cs typeface="IBM Plex Sans" pitchFamily="34" charset="-120"/>
+                        </a:rPr>
+                        <a:t>At most 20 requests at once on the Basic plan</a:t>
+                      </a:r>
+                      <a:endParaRPr lang="en-US" sz="1200" dirty="0">
+                        <a:latin typeface="IBM Plex Sans" charset="0"/>
+                        <a:ea typeface="IBM Plex Sans" charset="0"/>
+                        <a:cs typeface="IBM Plex Sans" charset="0"/>
+                      </a:endParaRPr>
+                    </a:p>
+                  </a:txBody>
+                  <a:tcPr marL="53340" marR="53340" marT="53340" marB="53340" anchor="t">
+                    <a:lnL w="12700" cap="flat" cmpd="sng" algn="ctr">
+                      <a:solidFill>
+                        <a:srgbClr val="C3C0B9"/>
+                      </a:solidFill>
+                      <a:prstDash val="solid"/>
+                      <a:round/>
+                      <a:headEnd type="none" w="med" len="med"/>
+                      <a:tailEnd type="none" w="med" len="med"/>
+                    </a:lnL>
+                    <a:lnR w="12700" cap="flat" cmpd="sng" algn="ctr">
+                      <a:solidFill>
+                        <a:srgbClr val="C3C0B9"/>
+                      </a:solidFill>
+                      <a:prstDash val="solid"/>
+                      <a:round/>
+                      <a:headEnd type="none" w="med" len="med"/>
+                      <a:tailEnd type="none" w="med" len="med"/>
+                    </a:lnR>
+                    <a:lnT w="12700" cap="flat" cmpd="sng" algn="ctr">
+                      <a:solidFill>
+                        <a:srgbClr val="C9C8C5"/>
+                      </a:solidFill>
+                      <a:prstDash val="solid"/>
+                      <a:round/>
+                      <a:headEnd type="none" w="med" len="med"/>
+                      <a:tailEnd type="none" w="med" len="med"/>
+                    </a:lnT>
+                    <a:lnB w="12700" cap="flat" cmpd="sng" algn="ctr">
+                      <a:solidFill>
+                        <a:srgbClr val="C3C0B9"/>
+                      </a:solidFill>
+                      <a:prstDash val="solid"/>
+                      <a:round/>
+                      <a:headEnd type="none" w="med" len="med"/>
+                      <a:tailEnd type="none" w="med" len="med"/>
+                    </a:lnB>
+                    <a:solidFill>
+                      <a:srgbClr val="F4F1E8"/>
+                    </a:solidFill>
+                  </a:tcPr>
+                </a:tc>
+                <a:tc>
+                  <a:txBody>
+                    <a:bodyPr/>
+                    <a:lstStyle/>
+                    <a:p>
+                      <a:pPr indent="0" marL="0">
+                        <a:lnSpc>
+                          <a:spcPts val="1680"/>
+                        </a:lnSpc>
+                        <a:buNone/>
+                      </a:pPr>
+                      <a:r>
+                        <a:rPr lang="en-US" sz="1200" dirty="0">
+                          <a:solidFill>
+                            <a:srgbClr val="2E3B35"/>
+                          </a:solidFill>
+                          <a:latin typeface="IBM Plex Sans" pitchFamily="34" charset="0"/>
+                          <a:ea typeface="IBM Plex Sans" pitchFamily="34" charset="-122"/>
+                          <a:cs typeface="IBM Plex Sans" pitchFamily="34" charset="-120"/>
+                        </a:rPr>
+                        <a:t>All farms in one query: 500 in 0.34 s, ≈ 0.67 ms each</a:t>
+                      </a:r>
+                      <a:endParaRPr lang="en-US" sz="1200" dirty="0">
+                        <a:latin typeface="IBM Plex Sans" charset="0"/>
+                        <a:ea typeface="IBM Plex Sans" charset="0"/>
+                        <a:cs typeface="IBM Plex Sans" charset="0"/>
+                      </a:endParaRPr>
+                    </a:p>
+                  </a:txBody>
+                  <a:tcPr marL="53340" marR="53340" marT="53340" marB="53340" anchor="t">
+                    <a:lnL w="12700" cap="flat" cmpd="sng" algn="ctr">
+                      <a:solidFill>
+                        <a:srgbClr val="C3C0B9"/>
+                      </a:solidFill>
+                      <a:prstDash val="solid"/>
+                      <a:round/>
+                      <a:headEnd type="none" w="med" len="med"/>
+                      <a:tailEnd type="none" w="med" len="med"/>
+                    </a:lnL>
+                    <a:lnR w="12700" cap="flat" cmpd="sng" algn="ctr">
+                      <a:solidFill>
+                        <a:srgbClr val="C3C0B9"/>
+                      </a:solidFill>
+                      <a:prstDash val="solid"/>
+                      <a:round/>
+                      <a:headEnd type="none" w="med" len="med"/>
+                      <a:tailEnd type="none" w="med" len="med"/>
+                    </a:lnR>
+                    <a:lnT w="12700" cap="flat" cmpd="sng" algn="ctr">
+                      <a:solidFill>
+                        <a:srgbClr val="C9C8C5"/>
+                      </a:solidFill>
+                      <a:prstDash val="solid"/>
+                      <a:round/>
+                      <a:headEnd type="none" w="med" len="med"/>
+                      <a:tailEnd type="none" w="med" len="med"/>
+                    </a:lnT>
+                    <a:lnB w="12700" cap="flat" cmpd="sng" algn="ctr">
+                      <a:solidFill>
+                        <a:srgbClr val="C3C0B9"/>
+                      </a:solidFill>
+                      <a:prstDash val="solid"/>
+                      <a:round/>
+                      <a:headEnd type="none" w="med" len="med"/>
+                      <a:tailEnd type="none" w="med" len="med"/>
+                    </a:lnB>
+                    <a:solidFill>
+                      <a:srgbClr val="F4F1E8"/>
+                    </a:solidFill>
+                  </a:tcPr>
+                </a:tc>
+                <a:tc>
+                  <a:txBody>
+                    <a:bodyPr/>
+                    <a:lstStyle/>
+                    <a:p>
+                      <a:pPr indent="0" marL="0">
+                        <a:lnSpc>
+                          <a:spcPts val="1680"/>
+                        </a:lnSpc>
+                        <a:buNone/>
+                      </a:pPr>
+                      <a:r>
+                        <a:rPr lang="en-US" sz="1200" dirty="0">
+                          <a:solidFill>
+                            <a:srgbClr val="2F6FA3"/>
+                          </a:solidFill>
+                          <a:latin typeface="IBM Plex Sans" pitchFamily="34" charset="0"/>
+                          <a:ea typeface="IBM Plex Sans" pitchFamily="34" charset="-122"/>
+                          <a:cs typeface="IBM Plex Sans" pitchFamily="34" charset="-120"/>
+                        </a:rPr>
+                        <a:t>No cap</a:t>
+                      </a:r>
+                      <a:endParaRPr lang="en-US" sz="1200" dirty="0">
+                        <a:latin typeface="IBM Plex Sans" charset="0"/>
+                        <a:ea typeface="IBM Plex Sans" charset="0"/>
+                        <a:cs typeface="IBM Plex Sans" charset="0"/>
+                      </a:endParaRPr>
+                    </a:p>
+                  </a:txBody>
+                  <a:tcPr marL="53340" marR="53340" marT="53340" marB="53340" anchor="t">
+                    <a:lnL w="12700" cap="flat" cmpd="sng" algn="ctr">
+                      <a:solidFill>
+                        <a:srgbClr val="C3C0B9"/>
+                      </a:solidFill>
+                      <a:prstDash val="solid"/>
+                      <a:round/>
+                      <a:headEnd type="none" w="med" len="med"/>
+                      <a:tailEnd type="none" w="med" len="med"/>
+                    </a:lnL>
+                    <a:lnR w="12700" cap="flat" cmpd="sng" algn="ctr">
+                      <a:solidFill>
+                        <a:srgbClr val="C3C0B9"/>
+                      </a:solidFill>
+                      <a:prstDash val="solid"/>
+                      <a:round/>
+                      <a:headEnd type="none" w="med" len="med"/>
+                      <a:tailEnd type="none" w="med" len="med"/>
+                    </a:lnR>
+                    <a:lnT w="12700" cap="flat" cmpd="sng" algn="ctr">
+                      <a:solidFill>
+                        <a:srgbClr val="C9C8C5"/>
+                      </a:solidFill>
+                      <a:prstDash val="solid"/>
+                      <a:round/>
+                      <a:headEnd type="none" w="med" len="med"/>
+                      <a:tailEnd type="none" w="med" len="med"/>
+                    </a:lnT>
+                    <a:lnB w="12700" cap="flat" cmpd="sng" algn="ctr">
+                      <a:solidFill>
+                        <a:srgbClr val="C3C0B9"/>
+                      </a:solidFill>
+                      <a:prstDash val="solid"/>
+                      <a:round/>
+                      <a:headEnd type="none" w="med" len="med"/>
+                      <a:tailEnd type="none" w="med" len="med"/>
+                    </a:lnB>
+                    <a:solidFill>
+                      <a:srgbClr val="F4F1E8"/>
+                    </a:solidFill>
+                  </a:tcPr>
+                </a:tc>
+              </a:tr>
+            </a:tbl>
+          </a:graphicData>
+        </a:graphic>
+      </p:graphicFrame>
+      <p:sp>
+        <p:nvSpPr>
+          <p:cNvPr id="7" name="Shape 4"/>
+          <p:cNvSpPr/>
+          <p:nvPr/>
+        </p:nvSpPr>
+        <p:spPr>
+          <a:xfrm>
+            <a:off x="812767" y="4774456"/>
+            <a:ext cx="5207000" cy="0"/>
+          </a:xfrm>
+          <a:prstGeom prst="line">
+            <a:avLst/>
+          </a:prstGeom>
+          <a:noFill/>
+          <a:ln w="25400">
+            <a:solidFill>
+              <a:srgbClr val="2F6FA3"/>
+            </a:solidFill>
+            <a:prstDash val="solid"/>
+          </a:ln>
+        </p:spPr>
+      </p:sp>
+      <p:sp>
+        <p:nvSpPr>
+          <p:cNvPr id="8" name="Text 5"/>
+          <p:cNvSpPr/>
+          <p:nvPr/>
+        </p:nvSpPr>
+        <p:spPr>
+          <a:xfrm>
+            <a:off x="812767" y="4884452"/>
+            <a:ext cx="5363210" cy="238720"/>
+          </a:xfrm>
+          <a:prstGeom prst="rect">
+            <a:avLst/>
+          </a:prstGeom>
+          <a:noFill/>
+          <a:ln/>
+        </p:spPr>
+        <p:txBody>
+          <a:bodyPr wrap="square" lIns="0" tIns="0" rIns="0" bIns="0" rtlCol="0" anchor="t">
+            <a:normAutofit/>
+          </a:bodyPr>
+          <a:lstStyle/>
+          <a:p>
+            <a:pPr algn="l" indent="0" marL="0">
+              <a:lnSpc>
+                <a:spcPts val="1680"/>
+              </a:lnSpc>
+              <a:buNone/>
+            </a:pPr>
+            <a:r>
+              <a:rPr lang="en-US" sz="1400" b="1" dirty="0">
+                <a:solidFill>
+                  <a:srgbClr val="17332B"/>
+                </a:solidFill>
+                <a:latin typeface="IBM Plex Sans" pitchFamily="34" charset="0"/>
+                <a:ea typeface="IBM Plex Sans" pitchFamily="34" charset="-122"/>
+                <a:cs typeface="IBM Plex Sans" pitchFamily="34" charset="-120"/>
+              </a:rPr>
+              <a:t>Reanalysis multiplies it</a:t>
+            </a:r>
+            <a:endParaRPr lang="en-US" sz="1400" dirty="0"/>
+          </a:p>
+        </p:txBody>
+      </p:sp>
+      <p:sp>
+        <p:nvSpPr>
+          <p:cNvPr id="9" name="Text 6"/>
+          <p:cNvSpPr/>
+          <p:nvPr/>
+        </p:nvSpPr>
+        <p:spPr>
+          <a:xfrm>
+            <a:off x="812767" y="5135811"/>
+            <a:ext cx="5363210" cy="436827"/>
+          </a:xfrm>
+          <a:prstGeom prst="rect">
+            <a:avLst/>
+          </a:prstGeom>
+          <a:noFill/>
+          <a:ln/>
+        </p:spPr>
+        <p:txBody>
+          <a:bodyPr wrap="square" lIns="0" tIns="0" rIns="0" bIns="0" rtlCol="0" anchor="t">
+            <a:normAutofit/>
+          </a:bodyPr>
+          <a:lstStyle/>
+          <a:p>
+            <a:pPr algn="l" indent="0" marL="0">
+              <a:lnSpc>
+                <a:spcPts val="1620"/>
+              </a:lnSpc>
+              <a:buNone/>
+            </a:pPr>
+            <a:r>
+              <a:rPr lang="en-US" sz="1200" dirty="0">
+                <a:solidFill>
+                  <a:srgbClr val="44524B"/>
+                </a:solidFill>
+                <a:latin typeface="IBM Plex Sans" pitchFamily="34" charset="0"/>
+                <a:ea typeface="IBM Plex Sans" pitchFamily="34" charset="-122"/>
+                <a:cs typeface="IBM Plex Sans" pitchFamily="34" charset="-120"/>
+              </a:rPr>
+              <a:t>We also skip farms that can’t have changed: an update re-checked 39 of 500.</a:t>
+            </a:r>
+            <a:endParaRPr lang="en-US" sz="1200" dirty="0"/>
+          </a:p>
+        </p:txBody>
+      </p:sp>
+      <p:sp>
+        <p:nvSpPr>
+          <p:cNvPr id="10" name="Shape 7"/>
+          <p:cNvSpPr/>
+          <p:nvPr/>
+        </p:nvSpPr>
+        <p:spPr>
+          <a:xfrm>
+            <a:off x="6172150" y="4774456"/>
+            <a:ext cx="5207083" cy="0"/>
+          </a:xfrm>
+          <a:prstGeom prst="line">
+            <a:avLst/>
+          </a:prstGeom>
+          <a:noFill/>
+          <a:ln w="25400">
+            <a:solidFill>
+              <a:srgbClr val="C2652A"/>
+            </a:solidFill>
+            <a:prstDash val="solid"/>
+          </a:ln>
+        </p:spPr>
+      </p:sp>
+      <p:sp>
+        <p:nvSpPr>
+          <p:cNvPr id="11" name="Text 8"/>
+          <p:cNvSpPr/>
+          <p:nvPr/>
+        </p:nvSpPr>
+        <p:spPr>
+          <a:xfrm>
+            <a:off x="6172150" y="4884452"/>
+            <a:ext cx="5363295" cy="238720"/>
+          </a:xfrm>
+          <a:prstGeom prst="rect">
+            <a:avLst/>
+          </a:prstGeom>
+          <a:noFill/>
+          <a:ln/>
+        </p:spPr>
+        <p:txBody>
+          <a:bodyPr wrap="square" lIns="0" tIns="0" rIns="0" bIns="0" rtlCol="0" anchor="t">
+            <a:normAutofit/>
+          </a:bodyPr>
+          <a:lstStyle/>
+          <a:p>
+            <a:pPr algn="l" indent="0" marL="0">
+              <a:lnSpc>
+                <a:spcPts val="1680"/>
+              </a:lnSpc>
+              <a:buNone/>
+            </a:pPr>
+            <a:r>
+              <a:rPr lang="en-US" sz="1400" b="1" dirty="0">
+                <a:solidFill>
+                  <a:srgbClr val="17332B"/>
+                </a:solidFill>
+                <a:latin typeface="IBM Plex Sans" pitchFamily="34" charset="0"/>
+                <a:ea typeface="IBM Plex Sans" pitchFamily="34" charset="-122"/>
+                <a:cs typeface="IBM Plex Sans" pitchFamily="34" charset="-120"/>
+              </a:rPr>
+              <a:t>Keep it honest</a:t>
+            </a:r>
+            <a:endParaRPr lang="en-US" sz="1400" dirty="0"/>
+          </a:p>
+        </p:txBody>
+      </p:sp>
+      <p:sp>
+        <p:nvSpPr>
+          <p:cNvPr id="12" name="Text 9"/>
+          <p:cNvSpPr/>
+          <p:nvPr/>
+        </p:nvSpPr>
+        <p:spPr>
+          <a:xfrm>
+            <a:off x="6172150" y="5135811"/>
+            <a:ext cx="5363295" cy="436827"/>
+          </a:xfrm>
+          <a:prstGeom prst="rect">
+            <a:avLst/>
+          </a:prstGeom>
+          <a:noFill/>
+          <a:ln/>
+        </p:spPr>
+        <p:txBody>
+          <a:bodyPr wrap="square" lIns="0" tIns="0" rIns="0" bIns="0" rtlCol="0" anchor="t">
+            <a:normAutofit/>
+          </a:bodyPr>
+          <a:lstStyle/>
+          <a:p>
+            <a:pPr algn="l" indent="0" marL="0">
+              <a:lnSpc>
+                <a:spcPts val="1620"/>
+              </a:lnSpc>
+              <a:buNone/>
+            </a:pPr>
+            <a:r>
+              <a:rPr lang="en-US" sz="1200" dirty="0">
+                <a:solidFill>
+                  <a:srgbClr val="44524B"/>
+                </a:solidFill>
+                <a:latin typeface="IBM Plex Sans" pitchFamily="34" charset="0"/>
+                <a:ea typeface="IBM Plex Sans" pitchFamily="34" charset="-122"/>
+                <a:cs typeface="IBM Plex Sans" pitchFamily="34" charset="-120"/>
+              </a:rPr>
+              <a:t>EE compute is small (≈ $19 per million). Batched it’s ≈ 4.4 h per million; we’re still ≈ 24× faster.</a:t>
+            </a:r>
+            <a:endParaRPr lang="en-US" sz="1200" dirty="0"/>
+          </a:p>
+        </p:txBody>
+      </p:sp>
+      <p:sp>
+        <p:nvSpPr>
+          <p:cNvPr id="13" name="Text 10"/>
+          <p:cNvSpPr/>
+          <p:nvPr/>
+        </p:nvSpPr>
+        <p:spPr>
+          <a:xfrm>
+            <a:off x="812767" y="6235725"/>
+            <a:ext cx="7558286" cy="241283"/>
+          </a:xfrm>
+          <a:prstGeom prst="rect">
+            <a:avLst/>
+          </a:prstGeom>
+          <a:noFill/>
+          <a:ln/>
+        </p:spPr>
+        <p:txBody>
+          <a:bodyPr wrap="square" lIns="0" tIns="0" rIns="0" bIns="0" rtlCol="0" anchor="t">
+            <a:normAutofit/>
+          </a:bodyPr>
+          <a:lstStyle/>
+          <a:p>
+            <a:pPr algn="l" indent="0" marL="0">
+              <a:lnSpc>
+                <a:spcPts val="1680"/>
+              </a:lnSpc>
+              <a:buNone/>
+            </a:pPr>
+            <a:r>
+              <a:rPr lang="en-US" sz="1200" dirty="0">
+                <a:solidFill>
+                  <a:srgbClr val="5E6B64"/>
+                </a:solidFill>
+                <a:latin typeface="IBM Plex Sans" pitchFamily="34" charset="0"/>
+                <a:ea typeface="IBM Plex Sans" pitchFamily="34" charset="-122"/>
+                <a:cs typeface="IBM Plex Sans" pitchFamily="34" charset="-120"/>
+              </a:rPr>
+              <a:t>Backup · show only if asked · 11 min per million extrapolated from 500 farms, scales linearly</a:t>
+            </a:r>
+            <a:endParaRPr lang="en-US" sz="1200" dirty="0"/>
+          </a:p>
+        </p:txBody>
+      </p:sp>
+      <p:sp>
+        <p:nvSpPr>
+          <p:cNvPr id="14" name="Text 11"/>
+          <p:cNvSpPr/>
+          <p:nvPr/>
+        </p:nvSpPr>
+        <p:spPr>
+          <a:xfrm>
+            <a:off x="11139173" y="6235725"/>
+            <a:ext cx="239977" cy="241283"/>
+          </a:xfrm>
+          <a:prstGeom prst="rect">
+            <a:avLst/>
+          </a:prstGeom>
+          <a:noFill/>
+          <a:ln/>
+        </p:spPr>
+        <p:txBody>
+          <a:bodyPr wrap="square" lIns="0" tIns="0" rIns="0" bIns="0" rtlCol="0" anchor="t">
+            <a:normAutofit/>
+          </a:bodyPr>
+          <a:lstStyle/>
+          <a:p>
+            <a:pPr algn="r" indent="0" marL="0">
+              <a:lnSpc>
+                <a:spcPts val="1680"/>
+              </a:lnSpc>
+              <a:buNone/>
+            </a:pPr>
+            <a:r>
+              <a:rPr lang="en-US" sz="1200" dirty="0">
+                <a:solidFill>
+                  <a:srgbClr val="5E6B64"/>
+                </a:solidFill>
+                <a:latin typeface="IBM Plex Sans" pitchFamily="34" charset="0"/>
+                <a:ea typeface="IBM Plex Sans" pitchFamily="34" charset="-122"/>
+                <a:cs typeface="IBM Plex Sans" pitchFamily="34" charset="-120"/>
+              </a:rPr>
+              <a:t>A6</a:t>
             </a:r>
             <a:endParaRPr lang="en-US" sz="1200" dirty="0"/>
           </a:p>
@@ -29732,13 +33834,13 @@
         <a:srgbClr val="17332B"/>
       </a:dk1>
       <a:lt1>
-        <a:srgbClr val="F7F5EF"/>
+        <a:srgbClr val="EFEBE0"/>
       </a:lt1>
       <a:dk2>
-        <a:srgbClr val="4F645C"/>
+        <a:srgbClr val="4D6158"/>
       </a:dk2>
       <a:lt2>
-        <a:srgbClr val="E1E2DB"/>
+        <a:srgbClr val="D9D9CE"/>
       </a:lt2>
       <a:accent1>
         <a:srgbClr val="A4501C"/>

--- a/docs/SystemEarth Business Case Slides.pptx
+++ b/docs/SystemEarth Business Case Slides.pptx
@@ -5953,7 +5953,7 @@
                 <a:ea typeface="IBM Plex Sans" pitchFamily="34" charset="-122"/>
                 <a:cs typeface="IBM Plex Sans" pitchFamily="34" charset="-120"/>
               </a:rPr>
-              <a:t>RESULT FIDELITY · RESULT AND RATIONALE</a:t>
+              <a:t>RESULT FIDELITY</a:t>
             </a:r>
             <a:endParaRPr lang="en-US" sz="1200" dirty="0"/>
           </a:p>
@@ -6014,11 +6014,11 @@
         <p:spPr>
           <a:xfrm>
             <a:off x="812767" y="1752364"/>
-            <a:ext cx="2519329" cy="1363844"/>
+            <a:ext cx="3937000" cy="1969409"/>
           </a:xfrm>
           <a:prstGeom prst="roundRect">
             <a:avLst>
-              <a:gd name="adj" fmla="val 5587"/>
+              <a:gd name="adj" fmla="val 3869"/>
             </a:avLst>
           </a:prstGeom>
           <a:solidFill>
@@ -6035,8 +6035,8 @@
         </p:nvSpPr>
         <p:spPr>
           <a:xfrm>
-            <a:off x="990534" y="1904752"/>
-            <a:ext cx="2228709" cy="416570"/>
+            <a:off x="1066767" y="1980902"/>
+            <a:ext cx="3531870" cy="939783"/>
           </a:xfrm>
           <a:prstGeom prst="rect">
             <a:avLst/>
@@ -6052,12 +6052,12 @@
           <a:p>
             <a:pPr algn="l" indent="0" marL="0">
               <a:lnSpc>
-                <a:spcPts val="3080"/>
+                <a:spcPts val="7200"/>
               </a:lnSpc>
               <a:buNone/>
             </a:pPr>
             <a:r>
-              <a:rPr lang="en-US" sz="2800" b="1" dirty="0">
+              <a:rPr lang="en-US" sz="7200" b="1" dirty="0">
                 <a:solidFill>
                   <a:srgbClr val="E3A06B"/>
                 </a:solidFill>
@@ -6067,7 +6067,7 @@
               </a:rPr>
               <a:t>100%</a:t>
             </a:r>
-            <a:endParaRPr lang="en-US" sz="2800" dirty="0"/>
+            <a:endParaRPr lang="en-US" sz="7200" dirty="0"/>
           </a:p>
         </p:txBody>
       </p:sp>
@@ -6079,8 +6079,52 @@
         </p:nvSpPr>
         <p:spPr>
           <a:xfrm>
-            <a:off x="990534" y="2346685"/>
-            <a:ext cx="2228709" cy="642541"/>
+            <a:off x="1066767" y="2971434"/>
+            <a:ext cx="3531870" cy="265344"/>
+          </a:xfrm>
+          <a:prstGeom prst="rect">
+            <a:avLst/>
+          </a:prstGeom>
+          <a:noFill/>
+          <a:ln/>
+        </p:spPr>
+        <p:txBody>
+          <a:bodyPr wrap="square" lIns="0" tIns="0" rIns="0" bIns="0" rtlCol="0" anchor="t">
+            <a:normAutofit/>
+          </a:bodyPr>
+          <a:lstStyle/>
+          <a:p>
+            <a:pPr algn="l" indent="0" marL="0">
+              <a:lnSpc>
+                <a:spcPts val="1890"/>
+              </a:lnSpc>
+              <a:buNone/>
+            </a:pPr>
+            <a:r>
+              <a:rPr lang="en-US" sz="1400" dirty="0">
+                <a:solidFill>
+                  <a:srgbClr val="F7F5EF"/>
+                </a:solidFill>
+                <a:latin typeface="IBM Plex Sans" pitchFamily="34" charset="0"/>
+                <a:ea typeface="IBM Plex Sans" pitchFamily="34" charset="-122"/>
+                <a:cs typeface="IBM Plex Sans" pitchFamily="34" charset="-120"/>
+              </a:rPr>
+              <a:t>of 500 plot verdicts match the raw layers</a:t>
+            </a:r>
+            <a:endParaRPr lang="en-US" sz="1400" dirty="0"/>
+          </a:p>
+        </p:txBody>
+      </p:sp>
+      <p:sp>
+        <p:nvSpPr>
+          <p:cNvPr id="7" name="Text 5"/>
+          <p:cNvSpPr/>
+          <p:nvPr/>
+        </p:nvSpPr>
+        <p:spPr>
+          <a:xfrm>
+            <a:off x="1066767" y="3287526"/>
+            <a:ext cx="3683000" cy="231114"/>
           </a:xfrm>
           <a:prstGeom prst="rect">
             <a:avLst/>
@@ -6109,7 +6153,7 @@
                 <a:ea typeface="IBM Plex Sans" pitchFamily="34" charset="-122"/>
                 <a:cs typeface="IBM Plex Sans" pitchFamily="34" charset="-120"/>
               </a:rPr>
-              <a:t>decision fidelity: 500 plots, 5 strata, before and after the update</a:t>
+              <a:t>before and after the update, across 5 kinds of plot</a:t>
             </a:r>
             <a:endParaRPr lang="en-US" sz="1200" dirty="0"/>
           </a:p>
@@ -6117,23 +6161,19 @@
       </p:sp>
       <p:sp>
         <p:nvSpPr>
-          <p:cNvPr id="7" name="Shape 5"/>
-          <p:cNvSpPr/>
-          <p:nvPr/>
-        </p:nvSpPr>
-        <p:spPr>
-          <a:xfrm>
-            <a:off x="3487655" y="1755539"/>
-            <a:ext cx="2523645" cy="1357494"/>
-          </a:xfrm>
-          <a:prstGeom prst="roundRect">
-            <a:avLst>
-              <a:gd name="adj" fmla="val 5379"/>
-            </a:avLst>
-          </a:prstGeom>
-          <a:solidFill>
-            <a:srgbClr val="FCFBF7"/>
-          </a:solidFill>
+          <p:cNvPr id="8" name="Shape 6"/>
+          <p:cNvSpPr/>
+          <p:nvPr/>
+        </p:nvSpPr>
+        <p:spPr>
+          <a:xfrm>
+            <a:off x="5054534" y="2382042"/>
+            <a:ext cx="6324699" cy="0"/>
+          </a:xfrm>
+          <a:prstGeom prst="line">
+            <a:avLst/>
+          </a:prstGeom>
+          <a:noFill/>
           <a:ln w="6350">
             <a:solidFill>
               <a:srgbClr val="DDD8CA"/>
@@ -6144,14 +6184,14 @@
       </p:sp>
       <p:sp>
         <p:nvSpPr>
-          <p:cNvPr id="8" name="Text 6"/>
-          <p:cNvSpPr/>
-          <p:nvPr/>
-        </p:nvSpPr>
-        <p:spPr>
-          <a:xfrm>
-            <a:off x="3667538" y="1910042"/>
-            <a:ext cx="2228795" cy="416570"/>
+          <p:cNvPr id="9" name="Text 7"/>
+          <p:cNvSpPr/>
+          <p:nvPr/>
+        </p:nvSpPr>
+        <p:spPr>
+          <a:xfrm>
+            <a:off x="5054534" y="1910042"/>
+            <a:ext cx="1320800" cy="381017"/>
           </a:xfrm>
           <a:prstGeom prst="rect">
             <a:avLst/>
@@ -6167,7 +6207,7 @@
           <a:p>
             <a:pPr algn="l" indent="0" marL="0">
               <a:lnSpc>
-                <a:spcPts val="3080"/>
+                <a:spcPts val="2800"/>
               </a:lnSpc>
               <a:buNone/>
             </a:pPr>
@@ -6180,7 +6220,7 @@
                 <a:ea typeface="Source Serif 4" pitchFamily="18" charset="-122"/>
                 <a:cs typeface="Source Serif 4" pitchFamily="18" charset="-120"/>
               </a:rPr>
-              <a:t>100%</a:t>
+              <a:t>32.4 M</a:t>
             </a:r>
             <a:endParaRPr lang="en-US" sz="2800" dirty="0"/>
           </a:p>
@@ -6188,14 +6228,14 @@
       </p:sp>
       <p:sp>
         <p:nvSpPr>
-          <p:cNvPr id="9" name="Text 7"/>
-          <p:cNvSpPr/>
-          <p:nvPr/>
-        </p:nvSpPr>
-        <p:spPr>
-          <a:xfrm>
-            <a:off x="3667538" y="2351980"/>
-            <a:ext cx="2228795" cy="231114"/>
+          <p:cNvPr id="10" name="Text 8"/>
+          <p:cNvSpPr/>
+          <p:nvPr/>
+        </p:nvSpPr>
+        <p:spPr>
+          <a:xfrm>
+            <a:off x="6476917" y="2052917"/>
+            <a:ext cx="5049385" cy="231114"/>
           </a:xfrm>
           <a:prstGeom prst="rect">
             <a:avLst/>
@@ -6224,7 +6264,7 @@
                 <a:ea typeface="IBM Plex Sans" pitchFamily="34" charset="-122"/>
                 <a:cs typeface="IBM Plex Sans" pitchFamily="34" charset="-120"/>
               </a:rPr>
-              <a:t>pixel fidelity on 32.4 M cells</a:t>
+              <a:t>cells, every one identical</a:t>
             </a:r>
             <a:endParaRPr lang="en-US" sz="1200" dirty="0"/>
           </a:p>
@@ -6232,23 +6272,19 @@
       </p:sp>
       <p:sp>
         <p:nvSpPr>
-          <p:cNvPr id="10" name="Shape 8"/>
-          <p:cNvSpPr/>
-          <p:nvPr/>
-        </p:nvSpPr>
-        <p:spPr>
-          <a:xfrm>
-            <a:off x="6170033" y="1755539"/>
-            <a:ext cx="2523645" cy="1357494"/>
-          </a:xfrm>
-          <a:prstGeom prst="roundRect">
-            <a:avLst>
-              <a:gd name="adj" fmla="val 5379"/>
-            </a:avLst>
-          </a:prstGeom>
-          <a:solidFill>
-            <a:srgbClr val="FCFBF7"/>
-          </a:solidFill>
+          <p:cNvPr id="11" name="Shape 9"/>
+          <p:cNvSpPr/>
+          <p:nvPr/>
+        </p:nvSpPr>
+        <p:spPr>
+          <a:xfrm>
+            <a:off x="5054534" y="2971482"/>
+            <a:ext cx="6324699" cy="0"/>
+          </a:xfrm>
+          <a:prstGeom prst="line">
+            <a:avLst/>
+          </a:prstGeom>
+          <a:noFill/>
           <a:ln w="6350">
             <a:solidFill>
               <a:srgbClr val="DDD8CA"/>
@@ -6259,14 +6295,14 @@
       </p:sp>
       <p:sp>
         <p:nvSpPr>
-          <p:cNvPr id="11" name="Text 9"/>
-          <p:cNvSpPr/>
-          <p:nvPr/>
-        </p:nvSpPr>
-        <p:spPr>
-          <a:xfrm>
-            <a:off x="6349917" y="1910042"/>
-            <a:ext cx="2228795" cy="416570"/>
+          <p:cNvPr id="12" name="Text 10"/>
+          <p:cNvSpPr/>
+          <p:nvPr/>
+        </p:nvSpPr>
+        <p:spPr>
+          <a:xfrm>
+            <a:off x="5054534" y="2499482"/>
+            <a:ext cx="1320800" cy="381017"/>
           </a:xfrm>
           <a:prstGeom prst="rect">
             <a:avLst/>
@@ -6282,7 +6318,7 @@
           <a:p>
             <a:pPr algn="l" indent="0" marL="0">
               <a:lnSpc>
-                <a:spcPts val="3080"/>
+                <a:spcPts val="2800"/>
               </a:lnSpc>
               <a:buNone/>
             </a:pPr>
@@ -6303,14 +6339,14 @@
       </p:sp>
       <p:sp>
         <p:nvSpPr>
-          <p:cNvPr id="12" name="Text 10"/>
-          <p:cNvSpPr/>
-          <p:nvPr/>
-        </p:nvSpPr>
-        <p:spPr>
-          <a:xfrm>
-            <a:off x="6349917" y="2351980"/>
-            <a:ext cx="2228795" cy="436827"/>
+          <p:cNvPr id="13" name="Text 11"/>
+          <p:cNvSpPr/>
+          <p:nvPr/>
+        </p:nvSpPr>
+        <p:spPr>
+          <a:xfrm>
+            <a:off x="6476917" y="2642357"/>
+            <a:ext cx="5049385" cy="231114"/>
           </a:xfrm>
           <a:prstGeom prst="rect">
             <a:avLst/>
@@ -6339,7 +6375,7 @@
                 <a:ea typeface="IBM Plex Sans" pitchFamily="34" charset="-122"/>
                 <a:cs typeface="IBM Plex Sans" pitchFamily="34" charset="-120"/>
               </a:rPr>
-              <a:t>area difference; every output field identical</a:t>
+              <a:t>area difference; every output field the same</a:t>
             </a:r>
             <a:endParaRPr lang="en-US" sz="1200" dirty="0"/>
           </a:p>
@@ -6347,23 +6383,19 @@
       </p:sp>
       <p:sp>
         <p:nvSpPr>
-          <p:cNvPr id="13" name="Shape 11"/>
-          <p:cNvSpPr/>
-          <p:nvPr/>
-        </p:nvSpPr>
-        <p:spPr>
-          <a:xfrm>
-            <a:off x="8852412" y="1755539"/>
-            <a:ext cx="2523645" cy="1357494"/>
-          </a:xfrm>
-          <a:prstGeom prst="roundRect">
-            <a:avLst>
-              <a:gd name="adj" fmla="val 5379"/>
-            </a:avLst>
-          </a:prstGeom>
-          <a:solidFill>
-            <a:srgbClr val="FCFBF7"/>
-          </a:solidFill>
+          <p:cNvPr id="14" name="Shape 12"/>
+          <p:cNvSpPr/>
+          <p:nvPr/>
+        </p:nvSpPr>
+        <p:spPr>
+          <a:xfrm>
+            <a:off x="5054534" y="3560928"/>
+            <a:ext cx="6324699" cy="0"/>
+          </a:xfrm>
+          <a:prstGeom prst="line">
+            <a:avLst/>
+          </a:prstGeom>
+          <a:noFill/>
           <a:ln w="6350">
             <a:solidFill>
               <a:srgbClr val="DDD8CA"/>
@@ -6374,14 +6406,14 @@
       </p:sp>
       <p:sp>
         <p:nvSpPr>
-          <p:cNvPr id="14" name="Text 12"/>
-          <p:cNvSpPr/>
-          <p:nvPr/>
-        </p:nvSpPr>
-        <p:spPr>
-          <a:xfrm>
-            <a:off x="9032296" y="1910042"/>
-            <a:ext cx="2228795" cy="416570"/>
+          <p:cNvPr id="15" name="Text 13"/>
+          <p:cNvSpPr/>
+          <p:nvPr/>
+        </p:nvSpPr>
+        <p:spPr>
+          <a:xfrm>
+            <a:off x="5054534" y="3088928"/>
+            <a:ext cx="1320800" cy="381017"/>
           </a:xfrm>
           <a:prstGeom prst="rect">
             <a:avLst/>
@@ -6397,7 +6429,7 @@
           <a:p>
             <a:pPr algn="l" indent="0" marL="0">
               <a:lnSpc>
-                <a:spcPts val="3080"/>
+                <a:spcPts val="2800"/>
               </a:lnSpc>
               <a:buNone/>
             </a:pPr>
@@ -6418,14 +6450,14 @@
       </p:sp>
       <p:sp>
         <p:nvSpPr>
-          <p:cNvPr id="15" name="Text 13"/>
-          <p:cNvSpPr/>
-          <p:nvPr/>
-        </p:nvSpPr>
-        <p:spPr>
-          <a:xfrm>
-            <a:off x="9032296" y="2351980"/>
-            <a:ext cx="2228795" cy="436827"/>
+          <p:cNvPr id="16" name="Text 14"/>
+          <p:cNvSpPr/>
+          <p:nvPr/>
+        </p:nvSpPr>
+        <p:spPr>
+          <a:xfrm>
+            <a:off x="6476917" y="3231803"/>
+            <a:ext cx="5049385" cy="231114"/>
           </a:xfrm>
           <a:prstGeom prst="rect">
             <a:avLst/>
@@ -6454,7 +6486,7 @@
                 <a:ea typeface="IBM Plex Sans" pitchFamily="34" charset="-122"/>
                 <a:cs typeface="IBM Plex Sans" pitchFamily="34" charset="-120"/>
               </a:rPr>
-              <a:t>Compliant in all 12 threshold settings</a:t>
+              <a:t>Compliant plots unchanged across 12 threshold settings</a:t>
             </a:r>
             <a:endParaRPr lang="en-US" sz="1200" dirty="0"/>
           </a:p>
@@ -6462,24 +6494,22 @@
       </p:sp>
       <p:sp>
         <p:nvSpPr>
-          <p:cNvPr id="16" name="Shape 14"/>
-          <p:cNvSpPr/>
-          <p:nvPr/>
-        </p:nvSpPr>
-        <p:spPr>
-          <a:xfrm>
-            <a:off x="812767" y="3324655"/>
+          <p:cNvPr id="17" name="Shape 15"/>
+          <p:cNvSpPr/>
+          <p:nvPr/>
+        </p:nvSpPr>
+        <p:spPr>
+          <a:xfrm>
+            <a:off x="812767" y="3937626"/>
             <a:ext cx="10566466" cy="0"/>
           </a:xfrm>
           <a:prstGeom prst="line">
             <a:avLst/>
           </a:prstGeom>
           <a:noFill/>
-          <a:ln w="10583">
+          <a:ln w="25400">
             <a:solidFill>
-              <a:srgbClr val="141413">
-                <a:alpha val="22000"/>
-              </a:srgbClr>
+              <a:srgbClr val="17332B"/>
             </a:solidFill>
             <a:prstDash val="solid"/>
           </a:ln>
@@ -6487,1097 +6517,14 @@
       </p:sp>
       <p:sp>
         <p:nvSpPr>
-          <p:cNvPr id="17" name="Shape 15"/>
-          <p:cNvSpPr/>
-          <p:nvPr/>
-        </p:nvSpPr>
-        <p:spPr>
-          <a:xfrm>
-            <a:off x="818059" y="3319363"/>
-            <a:ext cx="0" cy="2242344"/>
-          </a:xfrm>
-          <a:prstGeom prst="line">
-            <a:avLst/>
-          </a:prstGeom>
-          <a:noFill/>
-          <a:ln w="10583">
-            <a:solidFill>
-              <a:srgbClr val="141413">
-                <a:alpha val="22000"/>
-              </a:srgbClr>
-            </a:solidFill>
-            <a:prstDash val="solid"/>
-          </a:ln>
-        </p:spPr>
-      </p:sp>
-      <p:graphicFrame>
-        <p:nvGraphicFramePr>
-          <p:cNvPr id="18" name="Table 0"/>
-          <p:cNvGraphicFramePr>
-            <a:graphicFrameLocks noGrp="1"/>
-          </p:cNvGraphicFramePr>
-          <p:nvPr>
-            <p:extLst>
-              <p:ext uri="{D42A27DB-BD31-4B8C-83A1-F6EECF244321}">
-                <p14:modId xmlns:p14="http://schemas.microsoft.com/office/powerpoint/2010/main" val="1579011935"/>
-              </p:ext>
-            </p:extLst>
-          </p:nvPr>
-        </p:nvGraphicFramePr>
-        <p:xfrm>
-          <a:off x="937650" y="3406147"/>
-          <a:ext cx="10327283" cy="2079460"/>
-        </p:xfrm>
-        <a:graphic>
-          <a:graphicData uri="http://schemas.openxmlformats.org/drawingml/2006/table">
-            <a:tbl>
-              <a:tblPr/>
-              <a:tblGrid>
-                <a:gridCol w="2685093"/>
-                <a:gridCol w="4544004"/>
-                <a:gridCol w="3098185"/>
-              </a:tblGrid>
-              <a:tr h="330564">
-                <a:tc>
-                  <a:txBody>
-                    <a:bodyPr/>
-                    <a:lstStyle/>
-                    <a:p>
-                      <a:pPr indent="0" marL="0">
-                        <a:lnSpc>
-                          <a:spcPts val="1680"/>
-                        </a:lnSpc>
-                        <a:buNone/>
-                      </a:pPr>
-                      <a:r>
-                        <a:rPr lang="en-US" sz="1200" b="1" dirty="0">
-                          <a:solidFill>
-                            <a:srgbClr val="F7F5EF"/>
-                          </a:solidFill>
-                          <a:latin typeface="IBM Plex Sans" pitchFamily="34" charset="0"/>
-                          <a:ea typeface="IBM Plex Sans" pitchFamily="34" charset="-122"/>
-                          <a:cs typeface="IBM Plex Sans" pitchFamily="34" charset="-120"/>
-                        </a:rPr>
-                        <a:t>We chose</a:t>
-                      </a:r>
-                      <a:endParaRPr lang="en-US" sz="1200" dirty="0">
-                        <a:latin typeface="IBM Plex Sans" charset="0"/>
-                        <a:ea typeface="IBM Plex Sans" charset="0"/>
-                        <a:cs typeface="IBM Plex Sans" charset="0"/>
-                      </a:endParaRPr>
-                    </a:p>
-                  </a:txBody>
-                  <a:tcPr marL="53340" marR="53340" marT="53340" marB="53340" anchor="t">
-                    <a:lnL w="0" cap="flat" cmpd="sng" algn="ctr">
-                      <a:noFill/>
-                    </a:lnL>
-                    <a:lnR w="12700" cap="flat" cmpd="sng" algn="ctr">
-                      <a:solidFill>
-                        <a:srgbClr val="162C26"/>
-                      </a:solidFill>
-                      <a:prstDash val="solid"/>
-                      <a:round/>
-                      <a:headEnd type="none" w="med" len="med"/>
-                      <a:tailEnd type="none" w="med" len="med"/>
-                    </a:lnR>
-                    <a:lnT w="0" cap="flat" cmpd="sng" algn="ctr">
-                      <a:noFill/>
-                    </a:lnT>
-                    <a:lnB w="12700" cap="flat" cmpd="sng" algn="ctr">
-                      <a:solidFill>
-                        <a:srgbClr val="162C26"/>
-                      </a:solidFill>
-                      <a:prstDash val="solid"/>
-                      <a:round/>
-                      <a:headEnd type="none" w="med" len="med"/>
-                      <a:tailEnd type="none" w="med" len="med"/>
-                    </a:lnB>
-                    <a:solidFill>
-                      <a:srgbClr val="17332B"/>
-                    </a:solidFill>
-                  </a:tcPr>
-                </a:tc>
-                <a:tc>
-                  <a:txBody>
-                    <a:bodyPr/>
-                    <a:lstStyle/>
-                    <a:p>
-                      <a:pPr indent="0" marL="0">
-                        <a:lnSpc>
-                          <a:spcPts val="1680"/>
-                        </a:lnSpc>
-                        <a:buNone/>
-                      </a:pPr>
-                      <a:r>
-                        <a:rPr lang="en-US" sz="1200" b="1" dirty="0">
-                          <a:solidFill>
-                            <a:srgbClr val="F7F5EF"/>
-                          </a:solidFill>
-                          <a:latin typeface="IBM Plex Sans" pitchFamily="34" charset="0"/>
-                          <a:ea typeface="IBM Plex Sans" pitchFamily="34" charset="-122"/>
-                          <a:cs typeface="IBM Plex Sans" pitchFamily="34" charset="-120"/>
-                        </a:rPr>
-                        <a:t>Why</a:t>
-                      </a:r>
-                      <a:endParaRPr lang="en-US" sz="1200" dirty="0">
-                        <a:latin typeface="IBM Plex Sans" charset="0"/>
-                        <a:ea typeface="IBM Plex Sans" charset="0"/>
-                        <a:cs typeface="IBM Plex Sans" charset="0"/>
-                      </a:endParaRPr>
-                    </a:p>
-                  </a:txBody>
-                  <a:tcPr marL="53340" marR="53340" marT="53340" marB="53340" anchor="t">
-                    <a:lnL w="12700" cap="flat" cmpd="sng" algn="ctr">
-                      <a:solidFill>
-                        <a:srgbClr val="162C26"/>
-                      </a:solidFill>
-                      <a:prstDash val="solid"/>
-                      <a:round/>
-                      <a:headEnd type="none" w="med" len="med"/>
-                      <a:tailEnd type="none" w="med" len="med"/>
-                    </a:lnL>
-                    <a:lnR w="12700" cap="flat" cmpd="sng" algn="ctr">
-                      <a:solidFill>
-                        <a:srgbClr val="162C26"/>
-                      </a:solidFill>
-                      <a:prstDash val="solid"/>
-                      <a:round/>
-                      <a:headEnd type="none" w="med" len="med"/>
-                      <a:tailEnd type="none" w="med" len="med"/>
-                    </a:lnR>
-                    <a:lnT w="0" cap="flat" cmpd="sng" algn="ctr">
-                      <a:noFill/>
-                    </a:lnT>
-                    <a:lnB w="12700" cap="flat" cmpd="sng" algn="ctr">
-                      <a:solidFill>
-                        <a:srgbClr val="162C26"/>
-                      </a:solidFill>
-                      <a:prstDash val="solid"/>
-                      <a:round/>
-                      <a:headEnd type="none" w="med" len="med"/>
-                      <a:tailEnd type="none" w="med" len="med"/>
-                    </a:lnB>
-                    <a:solidFill>
-                      <a:srgbClr val="17332B"/>
-                    </a:solidFill>
-                  </a:tcPr>
-                </a:tc>
-                <a:tc>
-                  <a:txBody>
-                    <a:bodyPr/>
-                    <a:lstStyle/>
-                    <a:p>
-                      <a:pPr indent="0" marL="0">
-                        <a:lnSpc>
-                          <a:spcPts val="1680"/>
-                        </a:lnSpc>
-                        <a:buNone/>
-                      </a:pPr>
-                      <a:r>
-                        <a:rPr lang="en-US" sz="1200" b="1" dirty="0">
-                          <a:solidFill>
-                            <a:srgbClr val="F7F5EF"/>
-                          </a:solidFill>
-                          <a:latin typeface="IBM Plex Sans" pitchFamily="34" charset="0"/>
-                          <a:ea typeface="IBM Plex Sans" pitchFamily="34" charset="-122"/>
-                          <a:cs typeface="IBM Plex Sans" pitchFamily="34" charset="-120"/>
-                        </a:rPr>
-                        <a:t>Trade-off</a:t>
-                      </a:r>
-                      <a:endParaRPr lang="en-US" sz="1200" dirty="0">
-                        <a:latin typeface="IBM Plex Sans" charset="0"/>
-                        <a:ea typeface="IBM Plex Sans" charset="0"/>
-                        <a:cs typeface="IBM Plex Sans" charset="0"/>
-                      </a:endParaRPr>
-                    </a:p>
-                  </a:txBody>
-                  <a:tcPr marL="53340" marR="53340" marT="53340" marB="53340" anchor="t">
-                    <a:lnL w="12700" cap="flat" cmpd="sng" algn="ctr">
-                      <a:solidFill>
-                        <a:srgbClr val="162C26"/>
-                      </a:solidFill>
-                      <a:prstDash val="solid"/>
-                      <a:round/>
-                      <a:headEnd type="none" w="med" len="med"/>
-                      <a:tailEnd type="none" w="med" len="med"/>
-                    </a:lnL>
-                    <a:lnR w="12700" cap="flat" cmpd="sng" algn="ctr">
-                      <a:solidFill>
-                        <a:srgbClr val="162C26"/>
-                      </a:solidFill>
-                      <a:prstDash val="solid"/>
-                      <a:round/>
-                      <a:headEnd type="none" w="med" len="med"/>
-                      <a:tailEnd type="none" w="med" len="med"/>
-                    </a:lnR>
-                    <a:lnT w="0" cap="flat" cmpd="sng" algn="ctr">
-                      <a:noFill/>
-                    </a:lnT>
-                    <a:lnB w="12700" cap="flat" cmpd="sng" algn="ctr">
-                      <a:solidFill>
-                        <a:srgbClr val="162C26"/>
-                      </a:solidFill>
-                      <a:prstDash val="solid"/>
-                      <a:round/>
-                      <a:headEnd type="none" w="med" len="med"/>
-                      <a:tailEnd type="none" w="med" len="med"/>
-                    </a:lnB>
-                    <a:solidFill>
-                      <a:srgbClr val="17332B"/>
-                    </a:solidFill>
-                  </a:tcPr>
-                </a:tc>
-              </a:tr>
-              <a:tr h="543884">
-                <a:tc>
-                  <a:txBody>
-                    <a:bodyPr/>
-                    <a:lstStyle/>
-                    <a:p>
-                      <a:pPr indent="0" marL="0">
-                        <a:lnSpc>
-                          <a:spcPts val="1680"/>
-                        </a:lnSpc>
-                        <a:buNone/>
-                      </a:pPr>
-                      <a:r>
-                        <a:rPr lang="en-US" sz="1200" dirty="0">
-                          <a:solidFill>
-                            <a:srgbClr val="17332B"/>
-                          </a:solidFill>
-                          <a:latin typeface="IBM Plex Sans" pitchFamily="34" charset="0"/>
-                          <a:ea typeface="IBM Plex Sans" pitchFamily="34" charset="-122"/>
-                          <a:cs typeface="IBM Plex Sans" pitchFamily="34" charset="-120"/>
-                        </a:rPr>
-                        <a:t>One written spec, both pipelines</a:t>
-                      </a:r>
-                      <a:endParaRPr lang="en-US" sz="1200" dirty="0">
-                        <a:latin typeface="IBM Plex Sans" charset="0"/>
-                        <a:ea typeface="IBM Plex Sans" charset="0"/>
-                        <a:cs typeface="IBM Plex Sans" charset="0"/>
-                      </a:endParaRPr>
-                    </a:p>
-                  </a:txBody>
-                  <a:tcPr marL="53340" marR="53340" marT="53340" marB="53340" anchor="t">
-                    <a:lnL w="0" cap="flat" cmpd="sng" algn="ctr">
-                      <a:noFill/>
-                    </a:lnL>
-                    <a:lnR w="12700" cap="flat" cmpd="sng" algn="ctr">
-                      <a:solidFill>
-                        <a:srgbClr val="C9C8C5"/>
-                      </a:solidFill>
-                      <a:prstDash val="solid"/>
-                      <a:round/>
-                      <a:headEnd type="none" w="med" len="med"/>
-                      <a:tailEnd type="none" w="med" len="med"/>
-                    </a:lnR>
-                    <a:lnT w="12700" cap="flat" cmpd="sng" algn="ctr">
-                      <a:solidFill>
-                        <a:srgbClr val="162C26"/>
-                      </a:solidFill>
-                      <a:prstDash val="solid"/>
-                      <a:round/>
-                      <a:headEnd type="none" w="med" len="med"/>
-                      <a:tailEnd type="none" w="med" len="med"/>
-                    </a:lnT>
-                    <a:lnB w="12700" cap="flat" cmpd="sng" algn="ctr">
-                      <a:solidFill>
-                        <a:srgbClr val="C9C8C5"/>
-                      </a:solidFill>
-                      <a:prstDash val="solid"/>
-                      <a:round/>
-                      <a:headEnd type="none" w="med" len="med"/>
-                      <a:tailEnd type="none" w="med" len="med"/>
-                    </a:lnB>
-                    <a:solidFill>
-                      <a:srgbClr val="FCFBF7"/>
-                    </a:solidFill>
-                  </a:tcPr>
-                </a:tc>
-                <a:tc>
-                  <a:txBody>
-                    <a:bodyPr/>
-                    <a:lstStyle/>
-                    <a:p>
-                      <a:pPr indent="0" marL="0">
-                        <a:lnSpc>
-                          <a:spcPts val="1680"/>
-                        </a:lnSpc>
-                        <a:buNone/>
-                      </a:pPr>
-                      <a:r>
-                        <a:rPr lang="en-US" sz="1200" dirty="0">
-                          <a:solidFill>
-                            <a:srgbClr val="2E3B35"/>
-                          </a:solidFill>
-                          <a:latin typeface="IBM Plex Sans" pitchFamily="34" charset="0"/>
-                          <a:ea typeface="IBM Plex Sans" pitchFamily="34" charset="-122"/>
-                          <a:cs typeface="IBM Plex Sans" pitchFamily="34" charset="-120"/>
-                        </a:rPr>
-                        <a:t>Fidelity only means something against fixed rules</a:t>
-                      </a:r>
-                      <a:endParaRPr lang="en-US" sz="1200" dirty="0">
-                        <a:latin typeface="IBM Plex Sans" charset="0"/>
-                        <a:ea typeface="IBM Plex Sans" charset="0"/>
-                        <a:cs typeface="IBM Plex Sans" charset="0"/>
-                      </a:endParaRPr>
-                    </a:p>
-                  </a:txBody>
-                  <a:tcPr marL="53340" marR="53340" marT="53340" marB="53340" anchor="t">
-                    <a:lnL w="12700" cap="flat" cmpd="sng" algn="ctr">
-                      <a:solidFill>
-                        <a:srgbClr val="C9C8C5"/>
-                      </a:solidFill>
-                      <a:prstDash val="solid"/>
-                      <a:round/>
-                      <a:headEnd type="none" w="med" len="med"/>
-                      <a:tailEnd type="none" w="med" len="med"/>
-                    </a:lnL>
-                    <a:lnR w="12700" cap="flat" cmpd="sng" algn="ctr">
-                      <a:solidFill>
-                        <a:srgbClr val="C9C8C5"/>
-                      </a:solidFill>
-                      <a:prstDash val="solid"/>
-                      <a:round/>
-                      <a:headEnd type="none" w="med" len="med"/>
-                      <a:tailEnd type="none" w="med" len="med"/>
-                    </a:lnR>
-                    <a:lnT w="12700" cap="flat" cmpd="sng" algn="ctr">
-                      <a:solidFill>
-                        <a:srgbClr val="162C26"/>
-                      </a:solidFill>
-                      <a:prstDash val="solid"/>
-                      <a:round/>
-                      <a:headEnd type="none" w="med" len="med"/>
-                      <a:tailEnd type="none" w="med" len="med"/>
-                    </a:lnT>
-                    <a:lnB w="12700" cap="flat" cmpd="sng" algn="ctr">
-                      <a:solidFill>
-                        <a:srgbClr val="C9C8C5"/>
-                      </a:solidFill>
-                      <a:prstDash val="solid"/>
-                      <a:round/>
-                      <a:headEnd type="none" w="med" len="med"/>
-                      <a:tailEnd type="none" w="med" len="med"/>
-                    </a:lnB>
-                    <a:solidFill>
-                      <a:srgbClr val="FCFBF7"/>
-                    </a:solidFill>
-                  </a:tcPr>
-                </a:tc>
-                <a:tc>
-                  <a:txBody>
-                    <a:bodyPr/>
-                    <a:lstStyle/>
-                    <a:p>
-                      <a:pPr indent="0" marL="0">
-                        <a:lnSpc>
-                          <a:spcPts val="1680"/>
-                        </a:lnSpc>
-                        <a:buNone/>
-                      </a:pPr>
-                      <a:r>
-                        <a:rPr lang="en-US" sz="1200" dirty="0">
-                          <a:solidFill>
-                            <a:srgbClr val="2E3B35"/>
-                          </a:solidFill>
-                          <a:latin typeface="IBM Plex Sans" pitchFamily="34" charset="0"/>
-                          <a:ea typeface="IBM Plex Sans" pitchFamily="34" charset="-122"/>
-                          <a:cs typeface="IBM Plex Sans" pitchFamily="34" charset="-120"/>
-                        </a:rPr>
-                        <a:t>The shared per-cell rule isn’t tested independently</a:t>
-                      </a:r>
-                      <a:endParaRPr lang="en-US" sz="1200" dirty="0">
-                        <a:latin typeface="IBM Plex Sans" charset="0"/>
-                        <a:ea typeface="IBM Plex Sans" charset="0"/>
-                        <a:cs typeface="IBM Plex Sans" charset="0"/>
-                      </a:endParaRPr>
-                    </a:p>
-                  </a:txBody>
-                  <a:tcPr marL="53340" marR="53340" marT="53340" marB="53340" anchor="t">
-                    <a:lnL w="12700" cap="flat" cmpd="sng" algn="ctr">
-                      <a:solidFill>
-                        <a:srgbClr val="C9C8C5"/>
-                      </a:solidFill>
-                      <a:prstDash val="solid"/>
-                      <a:round/>
-                      <a:headEnd type="none" w="med" len="med"/>
-                      <a:tailEnd type="none" w="med" len="med"/>
-                    </a:lnL>
-                    <a:lnR w="12700" cap="flat" cmpd="sng" algn="ctr">
-                      <a:solidFill>
-                        <a:srgbClr val="C9C8C5"/>
-                      </a:solidFill>
-                      <a:prstDash val="solid"/>
-                      <a:round/>
-                      <a:headEnd type="none" w="med" len="med"/>
-                      <a:tailEnd type="none" w="med" len="med"/>
-                    </a:lnR>
-                    <a:lnT w="12700" cap="flat" cmpd="sng" algn="ctr">
-                      <a:solidFill>
-                        <a:srgbClr val="162C26"/>
-                      </a:solidFill>
-                      <a:prstDash val="solid"/>
-                      <a:round/>
-                      <a:headEnd type="none" w="med" len="med"/>
-                      <a:tailEnd type="none" w="med" len="med"/>
-                    </a:lnT>
-                    <a:lnB w="12700" cap="flat" cmpd="sng" algn="ctr">
-                      <a:solidFill>
-                        <a:srgbClr val="C9C8C5"/>
-                      </a:solidFill>
-                      <a:prstDash val="solid"/>
-                      <a:round/>
-                      <a:headEnd type="none" w="med" len="med"/>
-                      <a:tailEnd type="none" w="med" len="med"/>
-                    </a:lnB>
-                    <a:solidFill>
-                      <a:srgbClr val="FCFBF7"/>
-                    </a:solidFill>
-                  </a:tcPr>
-                </a:tc>
-              </a:tr>
-              <a:tr h="330564">
-                <a:tc>
-                  <a:txBody>
-                    <a:bodyPr/>
-                    <a:lstStyle/>
-                    <a:p>
-                      <a:pPr indent="0" marL="0">
-                        <a:lnSpc>
-                          <a:spcPts val="1680"/>
-                        </a:lnSpc>
-                        <a:buNone/>
-                      </a:pPr>
-                      <a:r>
-                        <a:rPr lang="en-US" sz="1200" dirty="0">
-                          <a:solidFill>
-                            <a:srgbClr val="17332B"/>
-                          </a:solidFill>
-                          <a:latin typeface="IBM Plex Sans" pitchFamily="34" charset="0"/>
-                          <a:ea typeface="IBM Plex Sans" pitchFamily="34" charset="-122"/>
-                          <a:cs typeface="IBM Plex Sans" pitchFamily="34" charset="-120"/>
-                        </a:rPr>
-                        <a:t>Lossless encoding</a:t>
-                      </a:r>
-                      <a:endParaRPr lang="en-US" sz="1200" dirty="0">
-                        <a:latin typeface="IBM Plex Sans" charset="0"/>
-                        <a:ea typeface="IBM Plex Sans" charset="0"/>
-                        <a:cs typeface="IBM Plex Sans" charset="0"/>
-                      </a:endParaRPr>
-                    </a:p>
-                  </a:txBody>
-                  <a:tcPr marL="53340" marR="53340" marT="53340" marB="53340" anchor="t">
-                    <a:lnL w="0" cap="flat" cmpd="sng" algn="ctr">
-                      <a:noFill/>
-                    </a:lnL>
-                    <a:lnR w="12700" cap="flat" cmpd="sng" algn="ctr">
-                      <a:solidFill>
-                        <a:srgbClr val="C3C0B9"/>
-                      </a:solidFill>
-                      <a:prstDash val="solid"/>
-                      <a:round/>
-                      <a:headEnd type="none" w="med" len="med"/>
-                      <a:tailEnd type="none" w="med" len="med"/>
-                    </a:lnR>
-                    <a:lnT w="12700" cap="flat" cmpd="sng" algn="ctr">
-                      <a:solidFill>
-                        <a:srgbClr val="C9C8C5"/>
-                      </a:solidFill>
-                      <a:prstDash val="solid"/>
-                      <a:round/>
-                      <a:headEnd type="none" w="med" len="med"/>
-                      <a:tailEnd type="none" w="med" len="med"/>
-                    </a:lnT>
-                    <a:lnB w="12700" cap="flat" cmpd="sng" algn="ctr">
-                      <a:solidFill>
-                        <a:srgbClr val="C3C0B9"/>
-                      </a:solidFill>
-                      <a:prstDash val="solid"/>
-                      <a:round/>
-                      <a:headEnd type="none" w="med" len="med"/>
-                      <a:tailEnd type="none" w="med" len="med"/>
-                    </a:lnB>
-                    <a:solidFill>
-                      <a:srgbClr val="F4F1E8"/>
-                    </a:solidFill>
-                  </a:tcPr>
-                </a:tc>
-                <a:tc>
-                  <a:txBody>
-                    <a:bodyPr/>
-                    <a:lstStyle/>
-                    <a:p>
-                      <a:pPr indent="0" marL="0">
-                        <a:lnSpc>
-                          <a:spcPts val="1680"/>
-                        </a:lnSpc>
-                        <a:buNone/>
-                      </a:pPr>
-                      <a:r>
-                        <a:rPr lang="en-US" sz="1200" dirty="0">
-                          <a:solidFill>
-                            <a:srgbClr val="2E3B35"/>
-                          </a:solidFill>
-                          <a:latin typeface="IBM Plex Sans" pitchFamily="34" charset="0"/>
-                          <a:ea typeface="IBM Plex Sans" pitchFamily="34" charset="-122"/>
-                          <a:cs typeface="IBM Plex Sans" pitchFamily="34" charset="-120"/>
-                        </a:rPr>
-                        <a:t>Exact values: no quantised dates, no downsampling</a:t>
-                      </a:r>
-                      <a:endParaRPr lang="en-US" sz="1200" dirty="0">
-                        <a:latin typeface="IBM Plex Sans" charset="0"/>
-                        <a:ea typeface="IBM Plex Sans" charset="0"/>
-                        <a:cs typeface="IBM Plex Sans" charset="0"/>
-                      </a:endParaRPr>
-                    </a:p>
-                  </a:txBody>
-                  <a:tcPr marL="53340" marR="53340" marT="53340" marB="53340" anchor="t">
-                    <a:lnL w="12700" cap="flat" cmpd="sng" algn="ctr">
-                      <a:solidFill>
-                        <a:srgbClr val="C3C0B9"/>
-                      </a:solidFill>
-                      <a:prstDash val="solid"/>
-                      <a:round/>
-                      <a:headEnd type="none" w="med" len="med"/>
-                      <a:tailEnd type="none" w="med" len="med"/>
-                    </a:lnL>
-                    <a:lnR w="12700" cap="flat" cmpd="sng" algn="ctr">
-                      <a:solidFill>
-                        <a:srgbClr val="C3C0B9"/>
-                      </a:solidFill>
-                      <a:prstDash val="solid"/>
-                      <a:round/>
-                      <a:headEnd type="none" w="med" len="med"/>
-                      <a:tailEnd type="none" w="med" len="med"/>
-                    </a:lnR>
-                    <a:lnT w="12700" cap="flat" cmpd="sng" algn="ctr">
-                      <a:solidFill>
-                        <a:srgbClr val="C9C8C5"/>
-                      </a:solidFill>
-                      <a:prstDash val="solid"/>
-                      <a:round/>
-                      <a:headEnd type="none" w="med" len="med"/>
-                      <a:tailEnd type="none" w="med" len="med"/>
-                    </a:lnT>
-                    <a:lnB w="12700" cap="flat" cmpd="sng" algn="ctr">
-                      <a:solidFill>
-                        <a:srgbClr val="C3C0B9"/>
-                      </a:solidFill>
-                      <a:prstDash val="solid"/>
-                      <a:round/>
-                      <a:headEnd type="none" w="med" len="med"/>
-                      <a:tailEnd type="none" w="med" len="med"/>
-                    </a:lnB>
-                    <a:solidFill>
-                      <a:srgbClr val="F4F1E8"/>
-                    </a:solidFill>
-                  </a:tcPr>
-                </a:tc>
-                <a:tc>
-                  <a:txBody>
-                    <a:bodyPr/>
-                    <a:lstStyle/>
-                    <a:p>
-                      <a:pPr indent="0" marL="0">
-                        <a:lnSpc>
-                          <a:spcPts val="1680"/>
-                        </a:lnSpc>
-                        <a:buNone/>
-                      </a:pPr>
-                      <a:r>
-                        <a:rPr lang="en-US" sz="1200" dirty="0">
-                          <a:solidFill>
-                            <a:srgbClr val="2E3B35"/>
-                          </a:solidFill>
-                          <a:latin typeface="IBM Plex Sans" pitchFamily="34" charset="0"/>
-                          <a:ea typeface="IBM Plex Sans" pitchFamily="34" charset="-122"/>
-                          <a:cs typeface="IBM Plex Sans" pitchFamily="34" charset="-120"/>
-                        </a:rPr>
-                        <a:t>Bigger than a lossy store would be</a:t>
-                      </a:r>
-                      <a:endParaRPr lang="en-US" sz="1200" dirty="0">
-                        <a:latin typeface="IBM Plex Sans" charset="0"/>
-                        <a:ea typeface="IBM Plex Sans" charset="0"/>
-                        <a:cs typeface="IBM Plex Sans" charset="0"/>
-                      </a:endParaRPr>
-                    </a:p>
-                  </a:txBody>
-                  <a:tcPr marL="53340" marR="53340" marT="53340" marB="53340" anchor="t">
-                    <a:lnL w="12700" cap="flat" cmpd="sng" algn="ctr">
-                      <a:solidFill>
-                        <a:srgbClr val="C3C0B9"/>
-                      </a:solidFill>
-                      <a:prstDash val="solid"/>
-                      <a:round/>
-                      <a:headEnd type="none" w="med" len="med"/>
-                      <a:tailEnd type="none" w="med" len="med"/>
-                    </a:lnL>
-                    <a:lnR w="12700" cap="flat" cmpd="sng" algn="ctr">
-                      <a:solidFill>
-                        <a:srgbClr val="C3C0B9"/>
-                      </a:solidFill>
-                      <a:prstDash val="solid"/>
-                      <a:round/>
-                      <a:headEnd type="none" w="med" len="med"/>
-                      <a:tailEnd type="none" w="med" len="med"/>
-                    </a:lnR>
-                    <a:lnT w="12700" cap="flat" cmpd="sng" algn="ctr">
-                      <a:solidFill>
-                        <a:srgbClr val="C9C8C5"/>
-                      </a:solidFill>
-                      <a:prstDash val="solid"/>
-                      <a:round/>
-                      <a:headEnd type="none" w="med" len="med"/>
-                      <a:tailEnd type="none" w="med" len="med"/>
-                    </a:lnT>
-                    <a:lnB w="12700" cap="flat" cmpd="sng" algn="ctr">
-                      <a:solidFill>
-                        <a:srgbClr val="C3C0B9"/>
-                      </a:solidFill>
-                      <a:prstDash val="solid"/>
-                      <a:round/>
-                      <a:headEnd type="none" w="med" len="med"/>
-                      <a:tailEnd type="none" w="med" len="med"/>
-                    </a:lnB>
-                    <a:solidFill>
-                      <a:srgbClr val="F4F1E8"/>
-                    </a:solidFill>
-                  </a:tcPr>
-                </a:tc>
-              </a:tr>
-              <a:tr h="330564">
-                <a:tc>
-                  <a:txBody>
-                    <a:bodyPr/>
-                    <a:lstStyle/>
-                    <a:p>
-                      <a:pPr indent="0" marL="0">
-                        <a:lnSpc>
-                          <a:spcPts val="1680"/>
-                        </a:lnSpc>
-                        <a:buNone/>
-                      </a:pPr>
-                      <a:r>
-                        <a:rPr lang="en-US" sz="1200" dirty="0">
-                          <a:solidFill>
-                            <a:srgbClr val="17332B"/>
-                          </a:solidFill>
-                          <a:latin typeface="IBM Plex Sans" pitchFamily="34" charset="0"/>
-                          <a:ea typeface="IBM Plex Sans" pitchFamily="34" charset="-122"/>
-                          <a:cs typeface="IBM Plex Sans" pitchFamily="34" charset="-120"/>
-                        </a:rPr>
-                        <a:t>Pixel-centre rule; points → circles</a:t>
-                      </a:r>
-                      <a:endParaRPr lang="en-US" sz="1200" dirty="0">
-                        <a:latin typeface="IBM Plex Sans" charset="0"/>
-                        <a:ea typeface="IBM Plex Sans" charset="0"/>
-                        <a:cs typeface="IBM Plex Sans" charset="0"/>
-                      </a:endParaRPr>
-                    </a:p>
-                  </a:txBody>
-                  <a:tcPr marL="53340" marR="53340" marT="53340" marB="53340" anchor="t">
-                    <a:lnL w="0" cap="flat" cmpd="sng" algn="ctr">
-                      <a:noFill/>
-                    </a:lnL>
-                    <a:lnR w="12700" cap="flat" cmpd="sng" algn="ctr">
-                      <a:solidFill>
-                        <a:srgbClr val="C9C8C5"/>
-                      </a:solidFill>
-                      <a:prstDash val="solid"/>
-                      <a:round/>
-                      <a:headEnd type="none" w="med" len="med"/>
-                      <a:tailEnd type="none" w="med" len="med"/>
-                    </a:lnR>
-                    <a:lnT w="12700" cap="flat" cmpd="sng" algn="ctr">
-                      <a:solidFill>
-                        <a:srgbClr val="C3C0B9"/>
-                      </a:solidFill>
-                      <a:prstDash val="solid"/>
-                      <a:round/>
-                      <a:headEnd type="none" w="med" len="med"/>
-                      <a:tailEnd type="none" w="med" len="med"/>
-                    </a:lnT>
-                    <a:lnB w="12700" cap="flat" cmpd="sng" algn="ctr">
-                      <a:solidFill>
-                        <a:srgbClr val="C9C8C5"/>
-                      </a:solidFill>
-                      <a:prstDash val="solid"/>
-                      <a:round/>
-                      <a:headEnd type="none" w="med" len="med"/>
-                      <a:tailEnd type="none" w="med" len="med"/>
-                    </a:lnB>
-                    <a:solidFill>
-                      <a:srgbClr val="FCFBF7"/>
-                    </a:solidFill>
-                  </a:tcPr>
-                </a:tc>
-                <a:tc>
-                  <a:txBody>
-                    <a:bodyPr/>
-                    <a:lstStyle/>
-                    <a:p>
-                      <a:pPr indent="0" marL="0">
-                        <a:lnSpc>
-                          <a:spcPts val="1680"/>
-                        </a:lnSpc>
-                        <a:buNone/>
-                      </a:pPr>
-                      <a:r>
-                        <a:rPr lang="en-US" sz="1200" dirty="0">
-                          <a:solidFill>
-                            <a:srgbClr val="2E3B35"/>
-                          </a:solidFill>
-                          <a:latin typeface="IBM Plex Sans" pitchFamily="34" charset="0"/>
-                          <a:ea typeface="IBM Plex Sans" pitchFamily="34" charset="-122"/>
-                          <a:cs typeface="IBM Plex Sans" pitchFamily="34" charset="-120"/>
-                        </a:rPr>
-                        <a:t>Deterministic; EUDR lets plots up to 4 ha be points</a:t>
-                      </a:r>
-                      <a:endParaRPr lang="en-US" sz="1200" dirty="0">
-                        <a:latin typeface="IBM Plex Sans" charset="0"/>
-                        <a:ea typeface="IBM Plex Sans" charset="0"/>
-                        <a:cs typeface="IBM Plex Sans" charset="0"/>
-                      </a:endParaRPr>
-                    </a:p>
-                  </a:txBody>
-                  <a:tcPr marL="53340" marR="53340" marT="53340" marB="53340" anchor="t">
-                    <a:lnL w="12700" cap="flat" cmpd="sng" algn="ctr">
-                      <a:solidFill>
-                        <a:srgbClr val="C9C8C5"/>
-                      </a:solidFill>
-                      <a:prstDash val="solid"/>
-                      <a:round/>
-                      <a:headEnd type="none" w="med" len="med"/>
-                      <a:tailEnd type="none" w="med" len="med"/>
-                    </a:lnL>
-                    <a:lnR w="12700" cap="flat" cmpd="sng" algn="ctr">
-                      <a:solidFill>
-                        <a:srgbClr val="C9C8C5"/>
-                      </a:solidFill>
-                      <a:prstDash val="solid"/>
-                      <a:round/>
-                      <a:headEnd type="none" w="med" len="med"/>
-                      <a:tailEnd type="none" w="med" len="med"/>
-                    </a:lnR>
-                    <a:lnT w="12700" cap="flat" cmpd="sng" algn="ctr">
-                      <a:solidFill>
-                        <a:srgbClr val="C3C0B9"/>
-                      </a:solidFill>
-                      <a:prstDash val="solid"/>
-                      <a:round/>
-                      <a:headEnd type="none" w="med" len="med"/>
-                      <a:tailEnd type="none" w="med" len="med"/>
-                    </a:lnT>
-                    <a:lnB w="12700" cap="flat" cmpd="sng" algn="ctr">
-                      <a:solidFill>
-                        <a:srgbClr val="C9C8C5"/>
-                      </a:solidFill>
-                      <a:prstDash val="solid"/>
-                      <a:round/>
-                      <a:headEnd type="none" w="med" len="med"/>
-                      <a:tailEnd type="none" w="med" len="med"/>
-                    </a:lnB>
-                    <a:solidFill>
-                      <a:srgbClr val="FCFBF7"/>
-                    </a:solidFill>
-                  </a:tcPr>
-                </a:tc>
-                <a:tc>
-                  <a:txBody>
-                    <a:bodyPr/>
-                    <a:lstStyle/>
-                    <a:p>
-                      <a:pPr indent="0" marL="0">
-                        <a:lnSpc>
-                          <a:spcPts val="1680"/>
-                        </a:lnSpc>
-                        <a:buNone/>
-                      </a:pPr>
-                      <a:r>
-                        <a:rPr lang="en-US" sz="1200" dirty="0">
-                          <a:solidFill>
-                            <a:srgbClr val="2E3B35"/>
-                          </a:solidFill>
-                          <a:latin typeface="IBM Plex Sans" pitchFamily="34" charset="0"/>
-                          <a:ea typeface="IBM Plex Sans" pitchFamily="34" charset="-122"/>
-                          <a:cs typeface="IBM Plex Sans" pitchFamily="34" charset="-120"/>
-                        </a:rPr>
-                        <a:t>Edge pixels count all or nothing</a:t>
-                      </a:r>
-                      <a:endParaRPr lang="en-US" sz="1200" dirty="0">
-                        <a:latin typeface="IBM Plex Sans" charset="0"/>
-                        <a:ea typeface="IBM Plex Sans" charset="0"/>
-                        <a:cs typeface="IBM Plex Sans" charset="0"/>
-                      </a:endParaRPr>
-                    </a:p>
-                  </a:txBody>
-                  <a:tcPr marL="53340" marR="53340" marT="53340" marB="53340" anchor="t">
-                    <a:lnL w="12700" cap="flat" cmpd="sng" algn="ctr">
-                      <a:solidFill>
-                        <a:srgbClr val="C9C8C5"/>
-                      </a:solidFill>
-                      <a:prstDash val="solid"/>
-                      <a:round/>
-                      <a:headEnd type="none" w="med" len="med"/>
-                      <a:tailEnd type="none" w="med" len="med"/>
-                    </a:lnL>
-                    <a:lnR w="12700" cap="flat" cmpd="sng" algn="ctr">
-                      <a:solidFill>
-                        <a:srgbClr val="C9C8C5"/>
-                      </a:solidFill>
-                      <a:prstDash val="solid"/>
-                      <a:round/>
-                      <a:headEnd type="none" w="med" len="med"/>
-                      <a:tailEnd type="none" w="med" len="med"/>
-                    </a:lnR>
-                    <a:lnT w="12700" cap="flat" cmpd="sng" algn="ctr">
-                      <a:solidFill>
-                        <a:srgbClr val="C3C0B9"/>
-                      </a:solidFill>
-                      <a:prstDash val="solid"/>
-                      <a:round/>
-                      <a:headEnd type="none" w="med" len="med"/>
-                      <a:tailEnd type="none" w="med" len="med"/>
-                    </a:lnT>
-                    <a:lnB w="12700" cap="flat" cmpd="sng" algn="ctr">
-                      <a:solidFill>
-                        <a:srgbClr val="C9C8C5"/>
-                      </a:solidFill>
-                      <a:prstDash val="solid"/>
-                      <a:round/>
-                      <a:headEnd type="none" w="med" len="med"/>
-                      <a:tailEnd type="none" w="med" len="med"/>
-                    </a:lnB>
-                    <a:solidFill>
-                      <a:srgbClr val="FCFBF7"/>
-                    </a:solidFill>
-                  </a:tcPr>
-                </a:tc>
-              </a:tr>
-              <a:tr h="543884">
-                <a:tc>
-                  <a:txBody>
-                    <a:bodyPr/>
-                    <a:lstStyle/>
-                    <a:p>
-                      <a:pPr indent="0" marL="0">
-                        <a:lnSpc>
-                          <a:spcPts val="1680"/>
-                        </a:lnSpc>
-                        <a:buNone/>
-                      </a:pPr>
-                      <a:r>
-                        <a:rPr lang="en-US" sz="1200" dirty="0">
-                          <a:solidFill>
-                            <a:srgbClr val="17332B"/>
-                          </a:solidFill>
-                          <a:latin typeface="IBM Plex Sans" pitchFamily="34" charset="0"/>
-                          <a:ea typeface="IBM Plex Sans" pitchFamily="34" charset="-122"/>
-                          <a:cs typeface="IBM Plex Sans" pitchFamily="34" charset="-120"/>
-                        </a:rPr>
-                        <a:t>Nearest neighbour; Hansen year → 1 Jan</a:t>
-                      </a:r>
-                      <a:endParaRPr lang="en-US" sz="1200" dirty="0">
-                        <a:latin typeface="IBM Plex Sans" charset="0"/>
-                        <a:ea typeface="IBM Plex Sans" charset="0"/>
-                        <a:cs typeface="IBM Plex Sans" charset="0"/>
-                      </a:endParaRPr>
-                    </a:p>
-                  </a:txBody>
-                  <a:tcPr marL="53340" marR="53340" marT="53340" marB="53340" anchor="t">
-                    <a:lnL w="0" cap="flat" cmpd="sng" algn="ctr">
-                      <a:noFill/>
-                    </a:lnL>
-                    <a:lnR w="12700" cap="flat" cmpd="sng" algn="ctr">
-                      <a:solidFill>
-                        <a:srgbClr val="C3C0B9"/>
-                      </a:solidFill>
-                      <a:prstDash val="solid"/>
-                      <a:round/>
-                      <a:headEnd type="none" w="med" len="med"/>
-                      <a:tailEnd type="none" w="med" len="med"/>
-                    </a:lnR>
-                    <a:lnT w="12700" cap="flat" cmpd="sng" algn="ctr">
-                      <a:solidFill>
-                        <a:srgbClr val="C9C8C5"/>
-                      </a:solidFill>
-                      <a:prstDash val="solid"/>
-                      <a:round/>
-                      <a:headEnd type="none" w="med" len="med"/>
-                      <a:tailEnd type="none" w="med" len="med"/>
-                    </a:lnT>
-                    <a:lnB w="12700" cap="flat" cmpd="sng" algn="ctr">
-                      <a:solidFill>
-                        <a:srgbClr val="C3C0B9"/>
-                      </a:solidFill>
-                      <a:prstDash val="solid"/>
-                      <a:round/>
-                      <a:headEnd type="none" w="med" len="med"/>
-                      <a:tailEnd type="none" w="med" len="med"/>
-                    </a:lnB>
-                    <a:solidFill>
-                      <a:srgbClr val="F4F1E8"/>
-                    </a:solidFill>
-                  </a:tcPr>
-                </a:tc>
-                <a:tc>
-                  <a:txBody>
-                    <a:bodyPr/>
-                    <a:lstStyle/>
-                    <a:p>
-                      <a:pPr indent="0" marL="0">
-                        <a:lnSpc>
-                          <a:spcPts val="1680"/>
-                        </a:lnSpc>
-                        <a:buNone/>
-                      </a:pPr>
-                      <a:r>
-                        <a:rPr lang="en-US" sz="1200" dirty="0">
-                          <a:solidFill>
-                            <a:srgbClr val="2E3B35"/>
-                          </a:solidFill>
-                          <a:latin typeface="IBM Plex Sans" pitchFamily="34" charset="0"/>
-                          <a:ea typeface="IBM Plex Sans" pitchFamily="34" charset="-122"/>
-                          <a:cs typeface="IBM Plex Sans" pitchFamily="34" charset="-120"/>
-                        </a:rPr>
-                        <a:t>Never invents values; the earliest date is conservative</a:t>
-                      </a:r>
-                      <a:endParaRPr lang="en-US" sz="1200" dirty="0">
-                        <a:latin typeface="IBM Plex Sans" charset="0"/>
-                        <a:ea typeface="IBM Plex Sans" charset="0"/>
-                        <a:cs typeface="IBM Plex Sans" charset="0"/>
-                      </a:endParaRPr>
-                    </a:p>
-                  </a:txBody>
-                  <a:tcPr marL="53340" marR="53340" marT="53340" marB="53340" anchor="t">
-                    <a:lnL w="12700" cap="flat" cmpd="sng" algn="ctr">
-                      <a:solidFill>
-                        <a:srgbClr val="C3C0B9"/>
-                      </a:solidFill>
-                      <a:prstDash val="solid"/>
-                      <a:round/>
-                      <a:headEnd type="none" w="med" len="med"/>
-                      <a:tailEnd type="none" w="med" len="med"/>
-                    </a:lnL>
-                    <a:lnR w="12700" cap="flat" cmpd="sng" algn="ctr">
-                      <a:solidFill>
-                        <a:srgbClr val="C3C0B9"/>
-                      </a:solidFill>
-                      <a:prstDash val="solid"/>
-                      <a:round/>
-                      <a:headEnd type="none" w="med" len="med"/>
-                      <a:tailEnd type="none" w="med" len="med"/>
-                    </a:lnR>
-                    <a:lnT w="12700" cap="flat" cmpd="sng" algn="ctr">
-                      <a:solidFill>
-                        <a:srgbClr val="C9C8C5"/>
-                      </a:solidFill>
-                      <a:prstDash val="solid"/>
-                      <a:round/>
-                      <a:headEnd type="none" w="med" len="med"/>
-                      <a:tailEnd type="none" w="med" len="med"/>
-                    </a:lnT>
-                    <a:lnB w="12700" cap="flat" cmpd="sng" algn="ctr">
-                      <a:solidFill>
-                        <a:srgbClr val="C3C0B9"/>
-                      </a:solidFill>
-                      <a:prstDash val="solid"/>
-                      <a:round/>
-                      <a:headEnd type="none" w="med" len="med"/>
-                      <a:tailEnd type="none" w="med" len="med"/>
-                    </a:lnB>
-                    <a:solidFill>
-                      <a:srgbClr val="F4F1E8"/>
-                    </a:solidFill>
-                  </a:tcPr>
-                </a:tc>
-                <a:tc>
-                  <a:txBody>
-                    <a:bodyPr/>
-                    <a:lstStyle/>
-                    <a:p>
-                      <a:pPr indent="0" marL="0">
-                        <a:lnSpc>
-                          <a:spcPts val="1680"/>
-                        </a:lnSpc>
-                        <a:buNone/>
-                      </a:pPr>
-                      <a:r>
-                        <a:rPr lang="en-US" sz="1200" dirty="0">
-                          <a:solidFill>
-                            <a:srgbClr val="2E3B35"/>
-                          </a:solidFill>
-                          <a:latin typeface="IBM Plex Sans" pitchFamily="34" charset="0"/>
-                          <a:ea typeface="IBM Plex Sans" pitchFamily="34" charset="-122"/>
-                          <a:cs typeface="IBM Plex Sans" pitchFamily="34" charset="-120"/>
-                        </a:rPr>
-                        <a:t>Some Hansen loss is dated early</a:t>
-                      </a:r>
-                      <a:endParaRPr lang="en-US" sz="1200" dirty="0">
-                        <a:latin typeface="IBM Plex Sans" charset="0"/>
-                        <a:ea typeface="IBM Plex Sans" charset="0"/>
-                        <a:cs typeface="IBM Plex Sans" charset="0"/>
-                      </a:endParaRPr>
-                    </a:p>
-                  </a:txBody>
-                  <a:tcPr marL="53340" marR="53340" marT="53340" marB="53340" anchor="t">
-                    <a:lnL w="12700" cap="flat" cmpd="sng" algn="ctr">
-                      <a:solidFill>
-                        <a:srgbClr val="C3C0B9"/>
-                      </a:solidFill>
-                      <a:prstDash val="solid"/>
-                      <a:round/>
-                      <a:headEnd type="none" w="med" len="med"/>
-                      <a:tailEnd type="none" w="med" len="med"/>
-                    </a:lnL>
-                    <a:lnR w="12700" cap="flat" cmpd="sng" algn="ctr">
-                      <a:solidFill>
-                        <a:srgbClr val="C3C0B9"/>
-                      </a:solidFill>
-                      <a:prstDash val="solid"/>
-                      <a:round/>
-                      <a:headEnd type="none" w="med" len="med"/>
-                      <a:tailEnd type="none" w="med" len="med"/>
-                    </a:lnR>
-                    <a:lnT w="12700" cap="flat" cmpd="sng" algn="ctr">
-                      <a:solidFill>
-                        <a:srgbClr val="C9C8C5"/>
-                      </a:solidFill>
-                      <a:prstDash val="solid"/>
-                      <a:round/>
-                      <a:headEnd type="none" w="med" len="med"/>
-                      <a:tailEnd type="none" w="med" len="med"/>
-                    </a:lnT>
-                    <a:lnB w="12700" cap="flat" cmpd="sng" algn="ctr">
-                      <a:solidFill>
-                        <a:srgbClr val="C3C0B9"/>
-                      </a:solidFill>
-                      <a:prstDash val="solid"/>
-                      <a:round/>
-                      <a:headEnd type="none" w="med" len="med"/>
-                      <a:tailEnd type="none" w="med" len="med"/>
-                    </a:lnB>
-                    <a:solidFill>
-                      <a:srgbClr val="F4F1E8"/>
-                    </a:solidFill>
-                  </a:tcPr>
-                </a:tc>
-              </a:tr>
-            </a:tbl>
-          </a:graphicData>
-        </a:graphic>
-      </p:graphicFrame>
-      <p:sp>
-        <p:nvSpPr>
-          <p:cNvPr id="19" name="Text 16"/>
-          <p:cNvSpPr/>
-          <p:nvPr/>
-        </p:nvSpPr>
-        <p:spPr>
-          <a:xfrm>
-            <a:off x="812767" y="6235731"/>
-            <a:ext cx="7476728" cy="241283"/>
+          <p:cNvPr id="18" name="Text 16"/>
+          <p:cNvSpPr/>
+          <p:nvPr/>
+        </p:nvSpPr>
+        <p:spPr>
+          <a:xfrm>
+            <a:off x="812767" y="4073091"/>
+            <a:ext cx="10883460" cy="238720"/>
           </a:xfrm>
           <a:prstGeom prst="rect">
             <a:avLst/>
@@ -7598,6 +6545,402 @@
               <a:buNone/>
             </a:pPr>
             <a:r>
+              <a:rPr lang="en-US" sz="1400" b="1" dirty="0">
+                <a:solidFill>
+                  <a:srgbClr val="17332B"/>
+                </a:solidFill>
+                <a:latin typeface="IBM Plex Sans" pitchFamily="34" charset="0"/>
+                <a:ea typeface="IBM Plex Sans" pitchFamily="34" charset="-122"/>
+                <a:cs typeface="IBM Plex Sans" pitchFamily="34" charset="-120"/>
+              </a:rPr>
+              <a:t>How we kept it exact</a:t>
+            </a:r>
+            <a:endParaRPr lang="en-US" sz="1400" dirty="0"/>
+          </a:p>
+        </p:txBody>
+      </p:sp>
+      <p:sp>
+        <p:nvSpPr>
+          <p:cNvPr id="19" name="Text 17"/>
+          <p:cNvSpPr/>
+          <p:nvPr/>
+        </p:nvSpPr>
+        <p:spPr>
+          <a:xfrm>
+            <a:off x="812767" y="4387949"/>
+            <a:ext cx="2524650" cy="240043"/>
+          </a:xfrm>
+          <a:prstGeom prst="rect">
+            <a:avLst/>
+          </a:prstGeom>
+          <a:noFill/>
+          <a:ln/>
+        </p:spPr>
+        <p:txBody>
+          <a:bodyPr wrap="square" lIns="0" tIns="0" rIns="0" bIns="0" rtlCol="0" anchor="t">
+            <a:normAutofit/>
+          </a:bodyPr>
+          <a:lstStyle/>
+          <a:p>
+            <a:pPr algn="l" indent="0" marL="0">
+              <a:lnSpc>
+                <a:spcPts val="1690"/>
+              </a:lnSpc>
+              <a:buNone/>
+            </a:pPr>
+            <a:r>
+              <a:rPr lang="en-US" sz="1300" b="1" dirty="0">
+                <a:solidFill>
+                  <a:srgbClr val="17332B"/>
+                </a:solidFill>
+                <a:latin typeface="IBM Plex Sans" pitchFamily="34" charset="0"/>
+                <a:ea typeface="IBM Plex Sans" pitchFamily="34" charset="-122"/>
+                <a:cs typeface="IBM Plex Sans" pitchFamily="34" charset="-120"/>
+              </a:rPr>
+              <a:t>One written rule book</a:t>
+            </a:r>
+            <a:endParaRPr lang="en-US" sz="1300" dirty="0"/>
+          </a:p>
+        </p:txBody>
+      </p:sp>
+      <p:sp>
+        <p:nvSpPr>
+          <p:cNvPr id="20" name="Text 18"/>
+          <p:cNvSpPr/>
+          <p:nvPr/>
+        </p:nvSpPr>
+        <p:spPr>
+          <a:xfrm>
+            <a:off x="812767" y="4627972"/>
+            <a:ext cx="2524650" cy="421448"/>
+          </a:xfrm>
+          <a:prstGeom prst="rect">
+            <a:avLst/>
+          </a:prstGeom>
+          <a:noFill/>
+          <a:ln/>
+        </p:spPr>
+        <p:txBody>
+          <a:bodyPr wrap="square" lIns="0" tIns="0" rIns="0" bIns="0" rtlCol="0" anchor="t">
+            <a:normAutofit/>
+          </a:bodyPr>
+          <a:lstStyle/>
+          <a:p>
+            <a:pPr algn="l" indent="0" marL="0">
+              <a:lnSpc>
+                <a:spcPts val="1560"/>
+              </a:lnSpc>
+              <a:buNone/>
+            </a:pPr>
+            <a:r>
+              <a:rPr lang="en-US" sz="1200" dirty="0">
+                <a:solidFill>
+                  <a:srgbClr val="5E6B64"/>
+                </a:solidFill>
+                <a:latin typeface="IBM Plex Sans" pitchFamily="34" charset="0"/>
+                <a:ea typeface="IBM Plex Sans" pitchFamily="34" charset="-122"/>
+                <a:cs typeface="IBM Plex Sans" pitchFamily="34" charset="-120"/>
+              </a:rPr>
+              <a:t>both pipelines follow the same spec</a:t>
+            </a:r>
+            <a:endParaRPr lang="en-US" sz="1200" dirty="0"/>
+          </a:p>
+        </p:txBody>
+      </p:sp>
+      <p:sp>
+        <p:nvSpPr>
+          <p:cNvPr id="21" name="Text 19"/>
+          <p:cNvSpPr/>
+          <p:nvPr/>
+        </p:nvSpPr>
+        <p:spPr>
+          <a:xfrm>
+            <a:off x="3517883" y="4387949"/>
+            <a:ext cx="2524650" cy="240043"/>
+          </a:xfrm>
+          <a:prstGeom prst="rect">
+            <a:avLst/>
+          </a:prstGeom>
+          <a:noFill/>
+          <a:ln/>
+        </p:spPr>
+        <p:txBody>
+          <a:bodyPr wrap="square" lIns="0" tIns="0" rIns="0" bIns="0" rtlCol="0" anchor="t">
+            <a:normAutofit/>
+          </a:bodyPr>
+          <a:lstStyle/>
+          <a:p>
+            <a:pPr algn="l" indent="0" marL="0">
+              <a:lnSpc>
+                <a:spcPts val="1690"/>
+              </a:lnSpc>
+              <a:buNone/>
+            </a:pPr>
+            <a:r>
+              <a:rPr lang="en-US" sz="1300" b="1" dirty="0">
+                <a:solidFill>
+                  <a:srgbClr val="17332B"/>
+                </a:solidFill>
+                <a:latin typeface="IBM Plex Sans" pitchFamily="34" charset="0"/>
+                <a:ea typeface="IBM Plex Sans" pitchFamily="34" charset="-122"/>
+                <a:cs typeface="IBM Plex Sans" pitchFamily="34" charset="-120"/>
+              </a:rPr>
+              <a:t>Nothing rounded</a:t>
+            </a:r>
+            <a:endParaRPr lang="en-US" sz="1300" dirty="0"/>
+          </a:p>
+        </p:txBody>
+      </p:sp>
+      <p:sp>
+        <p:nvSpPr>
+          <p:cNvPr id="22" name="Text 20"/>
+          <p:cNvSpPr/>
+          <p:nvPr/>
+        </p:nvSpPr>
+        <p:spPr>
+          <a:xfrm>
+            <a:off x="3517883" y="4627972"/>
+            <a:ext cx="2524650" cy="223424"/>
+          </a:xfrm>
+          <a:prstGeom prst="rect">
+            <a:avLst/>
+          </a:prstGeom>
+          <a:noFill/>
+          <a:ln/>
+        </p:spPr>
+        <p:txBody>
+          <a:bodyPr wrap="square" lIns="0" tIns="0" rIns="0" bIns="0" rtlCol="0" anchor="t">
+            <a:normAutofit/>
+          </a:bodyPr>
+          <a:lstStyle/>
+          <a:p>
+            <a:pPr algn="l" indent="0" marL="0">
+              <a:lnSpc>
+                <a:spcPts val="1560"/>
+              </a:lnSpc>
+              <a:buNone/>
+            </a:pPr>
+            <a:r>
+              <a:rPr lang="en-US" sz="1200" dirty="0">
+                <a:solidFill>
+                  <a:srgbClr val="5E6B64"/>
+                </a:solidFill>
+                <a:latin typeface="IBM Plex Sans" pitchFamily="34" charset="0"/>
+                <a:ea typeface="IBM Plex Sans" pitchFamily="34" charset="-122"/>
+                <a:cs typeface="IBM Plex Sans" pitchFamily="34" charset="-120"/>
+              </a:rPr>
+              <a:t>exact dates, full resolution</a:t>
+            </a:r>
+            <a:endParaRPr lang="en-US" sz="1200" dirty="0"/>
+          </a:p>
+        </p:txBody>
+      </p:sp>
+      <p:sp>
+        <p:nvSpPr>
+          <p:cNvPr id="23" name="Text 21"/>
+          <p:cNvSpPr/>
+          <p:nvPr/>
+        </p:nvSpPr>
+        <p:spPr>
+          <a:xfrm>
+            <a:off x="6223000" y="4387949"/>
+            <a:ext cx="2524650" cy="240043"/>
+          </a:xfrm>
+          <a:prstGeom prst="rect">
+            <a:avLst/>
+          </a:prstGeom>
+          <a:noFill/>
+          <a:ln/>
+        </p:spPr>
+        <p:txBody>
+          <a:bodyPr wrap="square" lIns="0" tIns="0" rIns="0" bIns="0" rtlCol="0" anchor="t">
+            <a:normAutofit/>
+          </a:bodyPr>
+          <a:lstStyle/>
+          <a:p>
+            <a:pPr algn="l" indent="0" marL="0">
+              <a:lnSpc>
+                <a:spcPts val="1690"/>
+              </a:lnSpc>
+              <a:buNone/>
+            </a:pPr>
+            <a:r>
+              <a:rPr lang="en-US" sz="1300" b="1" dirty="0">
+                <a:solidFill>
+                  <a:srgbClr val="17332B"/>
+                </a:solidFill>
+                <a:latin typeface="IBM Plex Sans" pitchFamily="34" charset="0"/>
+                <a:ea typeface="IBM Plex Sans" pitchFamily="34" charset="-122"/>
+                <a:cs typeface="IBM Plex Sans" pitchFamily="34" charset="-120"/>
+              </a:rPr>
+              <a:t>One rule for edge cells</a:t>
+            </a:r>
+            <a:endParaRPr lang="en-US" sz="1300" dirty="0"/>
+          </a:p>
+        </p:txBody>
+      </p:sp>
+      <p:sp>
+        <p:nvSpPr>
+          <p:cNvPr id="24" name="Text 22"/>
+          <p:cNvSpPr/>
+          <p:nvPr/>
+        </p:nvSpPr>
+        <p:spPr>
+          <a:xfrm>
+            <a:off x="6223000" y="4627972"/>
+            <a:ext cx="2524650" cy="223424"/>
+          </a:xfrm>
+          <a:prstGeom prst="rect">
+            <a:avLst/>
+          </a:prstGeom>
+          <a:noFill/>
+          <a:ln/>
+        </p:spPr>
+        <p:txBody>
+          <a:bodyPr wrap="square" lIns="0" tIns="0" rIns="0" bIns="0" rtlCol="0" anchor="t">
+            <a:normAutofit/>
+          </a:bodyPr>
+          <a:lstStyle/>
+          <a:p>
+            <a:pPr algn="l" indent="0" marL="0">
+              <a:lnSpc>
+                <a:spcPts val="1560"/>
+              </a:lnSpc>
+              <a:buNone/>
+            </a:pPr>
+            <a:r>
+              <a:rPr lang="en-US" sz="1200" dirty="0">
+                <a:solidFill>
+                  <a:srgbClr val="5E6B64"/>
+                </a:solidFill>
+                <a:latin typeface="IBM Plex Sans" pitchFamily="34" charset="0"/>
+                <a:ea typeface="IBM Plex Sans" pitchFamily="34" charset="-122"/>
+                <a:cs typeface="IBM Plex Sans" pitchFamily="34" charset="-120"/>
+              </a:rPr>
+              <a:t>a cell counts if its centre is inside</a:t>
+            </a:r>
+            <a:endParaRPr lang="en-US" sz="1200" dirty="0"/>
+          </a:p>
+        </p:txBody>
+      </p:sp>
+      <p:sp>
+        <p:nvSpPr>
+          <p:cNvPr id="25" name="Text 23"/>
+          <p:cNvSpPr/>
+          <p:nvPr/>
+        </p:nvSpPr>
+        <p:spPr>
+          <a:xfrm>
+            <a:off x="8928116" y="4387949"/>
+            <a:ext cx="2524650" cy="240043"/>
+          </a:xfrm>
+          <a:prstGeom prst="rect">
+            <a:avLst/>
+          </a:prstGeom>
+          <a:noFill/>
+          <a:ln/>
+        </p:spPr>
+        <p:txBody>
+          <a:bodyPr wrap="square" lIns="0" tIns="0" rIns="0" bIns="0" rtlCol="0" anchor="t">
+            <a:normAutofit/>
+          </a:bodyPr>
+          <a:lstStyle/>
+          <a:p>
+            <a:pPr algn="l" indent="0" marL="0">
+              <a:lnSpc>
+                <a:spcPts val="1690"/>
+              </a:lnSpc>
+              <a:buNone/>
+            </a:pPr>
+            <a:r>
+              <a:rPr lang="en-US" sz="1300" b="1" dirty="0">
+                <a:solidFill>
+                  <a:srgbClr val="17332B"/>
+                </a:solidFill>
+                <a:latin typeface="IBM Plex Sans" pitchFamily="34" charset="0"/>
+                <a:ea typeface="IBM Plex Sans" pitchFamily="34" charset="-122"/>
+                <a:cs typeface="IBM Plex Sans" pitchFamily="34" charset="-120"/>
+              </a:rPr>
+              <a:t>Never invent values</a:t>
+            </a:r>
+            <a:endParaRPr lang="en-US" sz="1300" dirty="0"/>
+          </a:p>
+        </p:txBody>
+      </p:sp>
+      <p:sp>
+        <p:nvSpPr>
+          <p:cNvPr id="26" name="Text 24"/>
+          <p:cNvSpPr/>
+          <p:nvPr/>
+        </p:nvSpPr>
+        <p:spPr>
+          <a:xfrm>
+            <a:off x="8928116" y="4627972"/>
+            <a:ext cx="2524650" cy="223424"/>
+          </a:xfrm>
+          <a:prstGeom prst="rect">
+            <a:avLst/>
+          </a:prstGeom>
+          <a:noFill/>
+          <a:ln/>
+        </p:spPr>
+        <p:txBody>
+          <a:bodyPr wrap="square" lIns="0" tIns="0" rIns="0" bIns="0" rtlCol="0" anchor="t">
+            <a:normAutofit/>
+          </a:bodyPr>
+          <a:lstStyle/>
+          <a:p>
+            <a:pPr algn="l" indent="0" marL="0">
+              <a:lnSpc>
+                <a:spcPts val="1560"/>
+              </a:lnSpc>
+              <a:buNone/>
+            </a:pPr>
+            <a:r>
+              <a:rPr lang="en-US" sz="1200" dirty="0">
+                <a:solidFill>
+                  <a:srgbClr val="5E6B64"/>
+                </a:solidFill>
+                <a:latin typeface="IBM Plex Sans" pitchFamily="34" charset="0"/>
+                <a:ea typeface="IBM Plex Sans" pitchFamily="34" charset="-122"/>
+                <a:cs typeface="IBM Plex Sans" pitchFamily="34" charset="-120"/>
+              </a:rPr>
+              <a:t>nearest-neighbour resampling only</a:t>
+            </a:r>
+            <a:endParaRPr lang="en-US" sz="1200" dirty="0"/>
+          </a:p>
+        </p:txBody>
+      </p:sp>
+      <p:sp>
+        <p:nvSpPr>
+          <p:cNvPr id="27" name="Text 25"/>
+          <p:cNvSpPr/>
+          <p:nvPr/>
+        </p:nvSpPr>
+        <p:spPr>
+          <a:xfrm>
+            <a:off x="812767" y="6235731"/>
+            <a:ext cx="7476728" cy="241283"/>
+          </a:xfrm>
+          <a:prstGeom prst="rect">
+            <a:avLst/>
+          </a:prstGeom>
+          <a:noFill/>
+          <a:ln/>
+        </p:spPr>
+        <p:txBody>
+          <a:bodyPr wrap="square" lIns="0" tIns="0" rIns="0" bIns="0" rtlCol="0" anchor="t">
+            <a:normAutofit/>
+          </a:bodyPr>
+          <a:lstStyle/>
+          <a:p>
+            <a:pPr algn="l" indent="0" marL="0">
+              <a:lnSpc>
+                <a:spcPts val="1680"/>
+              </a:lnSpc>
+              <a:buNone/>
+            </a:pPr>
+            <a:r>
               <a:rPr lang="en-US" sz="1200" dirty="0">
                 <a:solidFill>
                   <a:srgbClr val="5E6B64"/>
@@ -7614,7 +6957,7 @@
       </p:sp>
       <p:sp>
         <p:nvSpPr>
-          <p:cNvPr id="20" name="Text 17"/>
+          <p:cNvPr id="28" name="Text 26"/>
           <p:cNvSpPr/>
           <p:nvPr/>
         </p:nvSpPr>
@@ -7696,8 +7039,8 @@
         </p:nvSpPr>
         <p:spPr>
           <a:xfrm>
-            <a:off x="812767" y="812763"/>
-            <a:ext cx="10883460" cy="238720"/>
+            <a:off x="812767" y="6235731"/>
+            <a:ext cx="9112870" cy="241283"/>
           </a:xfrm>
           <a:prstGeom prst="rect">
             <a:avLst/>
@@ -7718,15 +7061,15 @@
               <a:buNone/>
             </a:pPr>
             <a:r>
-              <a:rPr lang="en-US" sz="1200" b="1" spc="100" kern="0" dirty="0">
-                <a:solidFill>
-                  <a:srgbClr val="A4501C"/>
+              <a:rPr lang="en-US" sz="1200" dirty="0">
+                <a:solidFill>
+                  <a:srgbClr val="5E6B64"/>
                 </a:solidFill>
                 <a:latin typeface="IBM Plex Sans" pitchFamily="34" charset="0"/>
                 <a:ea typeface="IBM Plex Sans" pitchFamily="34" charset="-122"/>
                 <a:cs typeface="IBM Plex Sans" pitchFamily="34" charset="-120"/>
               </a:rPr>
-              <a:t>RUNNING COST · RESULT AND RATIONALE</a:t>
+              <a:t>Bars to scale · prices approximate, Earth Engine pricing read 14 Oct 2026 · extraction per release not yet measured</a:t>
             </a:r>
             <a:endParaRPr lang="en-US" sz="1200" dirty="0"/>
           </a:p>
@@ -7735,6 +7078,94 @@
       <p:sp>
         <p:nvSpPr>
           <p:cNvPr id="3" name="Text 1"/>
+          <p:cNvSpPr/>
+          <p:nvPr/>
+        </p:nvSpPr>
+        <p:spPr>
+          <a:xfrm>
+            <a:off x="11145457" y="6235731"/>
+            <a:ext cx="233693" cy="241283"/>
+          </a:xfrm>
+          <a:prstGeom prst="rect">
+            <a:avLst/>
+          </a:prstGeom>
+          <a:noFill/>
+          <a:ln/>
+        </p:spPr>
+        <p:txBody>
+          <a:bodyPr wrap="square" lIns="0" tIns="0" rIns="0" bIns="0" rtlCol="0" anchor="t">
+            <a:normAutofit/>
+          </a:bodyPr>
+          <a:lstStyle/>
+          <a:p>
+            <a:pPr algn="r" indent="0" marL="0">
+              <a:lnSpc>
+                <a:spcPts val="1680"/>
+              </a:lnSpc>
+              <a:buNone/>
+            </a:pPr>
+            <a:r>
+              <a:rPr lang="en-US" sz="1200" dirty="0">
+                <a:solidFill>
+                  <a:srgbClr val="5E6B64"/>
+                </a:solidFill>
+                <a:latin typeface="IBM Plex Sans" pitchFamily="34" charset="0"/>
+                <a:ea typeface="IBM Plex Sans" pitchFamily="34" charset="-122"/>
+                <a:cs typeface="IBM Plex Sans" pitchFamily="34" charset="-120"/>
+              </a:rPr>
+              <a:t>14</a:t>
+            </a:r>
+            <a:endParaRPr lang="en-US" sz="1200" dirty="0"/>
+          </a:p>
+        </p:txBody>
+      </p:sp>
+      <p:sp>
+        <p:nvSpPr>
+          <p:cNvPr id="4" name="Text 2"/>
+          <p:cNvSpPr/>
+          <p:nvPr/>
+        </p:nvSpPr>
+        <p:spPr>
+          <a:xfrm>
+            <a:off x="812767" y="812763"/>
+            <a:ext cx="10889933" cy="238720"/>
+          </a:xfrm>
+          <a:prstGeom prst="rect">
+            <a:avLst/>
+          </a:prstGeom>
+          <a:noFill/>
+          <a:ln/>
+        </p:spPr>
+        <p:txBody>
+          <a:bodyPr wrap="square" lIns="0" tIns="0" rIns="0" bIns="0" rtlCol="0" anchor="t">
+            <a:normAutofit/>
+          </a:bodyPr>
+          <a:lstStyle/>
+          <a:p>
+            <a:pPr algn="l" indent="0" marL="0">
+              <a:lnSpc>
+                <a:spcPts val="1680"/>
+              </a:lnSpc>
+              <a:buNone/>
+            </a:pPr>
+            <a:r>
+              <a:rPr lang="en-US" sz="1200" b="1" spc="100" kern="0" dirty="0">
+                <a:solidFill>
+                  <a:srgbClr val="A4501C"/>
+                </a:solidFill>
+                <a:latin typeface="IBM Plex Sans" pitchFamily="34" charset="0"/>
+                <a:ea typeface="IBM Plex Sans" pitchFamily="34" charset="-122"/>
+                <a:cs typeface="IBM Plex Sans" pitchFamily="34" charset="-120"/>
+              </a:rPr>
+              <a:t>RUNNING COST</a:t>
+            </a:r>
+            <a:endParaRPr lang="en-US" sz="1200" dirty="0"/>
+          </a:p>
+        </p:txBody>
+      </p:sp>
+      <p:sp>
+        <p:nvSpPr>
+          <p:cNvPr id="5" name="Text 3"/>
           <p:cNvSpPr/>
           <p:nvPr>
             <p:ph type="title"/>
@@ -7743,7 +7174,7 @@
         <p:spPr>
           <a:xfrm>
             <a:off x="812767" y="1102233"/>
-            <a:ext cx="10883460" cy="472380"/>
+            <a:ext cx="10889933" cy="472380"/>
           </a:xfrm>
           <a:prstGeom prst="rect">
             <a:avLst/>
@@ -7780,24 +7211,22 @@
       </p:sp>
       <p:sp>
         <p:nvSpPr>
-          <p:cNvPr id="4" name="Shape 2"/>
-          <p:cNvSpPr/>
-          <p:nvPr/>
-        </p:nvSpPr>
-        <p:spPr>
-          <a:xfrm>
-            <a:off x="812767" y="1757656"/>
-            <a:ext cx="10566466" cy="0"/>
+          <p:cNvPr id="6" name="Shape 4"/>
+          <p:cNvSpPr/>
+          <p:nvPr/>
+        </p:nvSpPr>
+        <p:spPr>
+          <a:xfrm>
+            <a:off x="812767" y="3936950"/>
+            <a:ext cx="3321017" cy="0"/>
           </a:xfrm>
           <a:prstGeom prst="line">
             <a:avLst/>
           </a:prstGeom>
           <a:noFill/>
-          <a:ln w="10583">
+          <a:ln w="38100">
             <a:solidFill>
-              <a:srgbClr val="141413">
-                <a:alpha val="22000"/>
-              </a:srgbClr>
+              <a:srgbClr val="5E6B64"/>
             </a:solidFill>
             <a:prstDash val="solid"/>
           </a:ln>
@@ -7805,915 +7234,14 @@
       </p:sp>
       <p:sp>
         <p:nvSpPr>
-          <p:cNvPr id="5" name="Shape 3"/>
-          <p:cNvSpPr/>
-          <p:nvPr/>
-        </p:nvSpPr>
-        <p:spPr>
-          <a:xfrm>
-            <a:off x="818059" y="1752364"/>
-            <a:ext cx="0" cy="1911780"/>
-          </a:xfrm>
-          <a:prstGeom prst="line">
-            <a:avLst/>
-          </a:prstGeom>
-          <a:noFill/>
-          <a:ln w="10583">
-            <a:solidFill>
-              <a:srgbClr val="141413">
-                <a:alpha val="22000"/>
-              </a:srgbClr>
-            </a:solidFill>
-            <a:prstDash val="solid"/>
-          </a:ln>
-        </p:spPr>
-      </p:sp>
-      <p:graphicFrame>
-        <p:nvGraphicFramePr>
-          <p:cNvPr id="6" name="Table 0"/>
-          <p:cNvGraphicFramePr>
-            <a:graphicFrameLocks noGrp="1"/>
-          </p:cNvGraphicFramePr>
-          <p:nvPr>
-            <p:extLst>
-              <p:ext uri="{D42A27DB-BD31-4B8C-83A1-F6EECF244321}">
-                <p14:modId xmlns:p14="http://schemas.microsoft.com/office/powerpoint/2010/main" val="1579011935"/>
-              </p:ext>
-            </p:extLst>
-          </p:nvPr>
-        </p:nvGraphicFramePr>
-        <p:xfrm>
-          <a:off x="937650" y="1839148"/>
-          <a:ext cx="10327283" cy="1748896"/>
-        </p:xfrm>
-        <a:graphic>
-          <a:graphicData uri="http://schemas.openxmlformats.org/drawingml/2006/table">
-            <a:tbl>
-              <a:tblPr/>
-              <a:tblGrid>
-                <a:gridCol w="2478548"/>
-                <a:gridCol w="3717822"/>
-                <a:gridCol w="4130913"/>
-              </a:tblGrid>
-              <a:tr h="330564">
-                <a:tc>
-                  <a:txBody>
-                    <a:bodyPr/>
-                    <a:lstStyle/>
-                    <a:p>
-                      <a:pPr indent="0" marL="0">
-                        <a:lnSpc>
-                          <a:spcPts val="1680"/>
-                        </a:lnSpc>
-                        <a:buNone/>
-                      </a:pPr>
-                      <a:r>
-                        <a:rPr lang="en-US" sz="1200" b="1" dirty="0">
-                          <a:solidFill>
-                            <a:srgbClr val="F7F5EF"/>
-                          </a:solidFill>
-                          <a:latin typeface="IBM Plex Sans" pitchFamily="34" charset="0"/>
-                          <a:ea typeface="IBM Plex Sans" pitchFamily="34" charset="-122"/>
-                          <a:cs typeface="IBM Plex Sans" pitchFamily="34" charset="-120"/>
-                        </a:rPr>
-                        <a:t>All of Ivory Coast, 1 M plots</a:t>
-                      </a:r>
-                      <a:endParaRPr lang="en-US" sz="1200" dirty="0">
-                        <a:latin typeface="IBM Plex Sans" charset="0"/>
-                        <a:ea typeface="IBM Plex Sans" charset="0"/>
-                        <a:cs typeface="IBM Plex Sans" charset="0"/>
-                      </a:endParaRPr>
-                    </a:p>
-                  </a:txBody>
-                  <a:tcPr marL="53340" marR="53340" marT="53340" marB="53340" anchor="t">
-                    <a:lnL w="0" cap="flat" cmpd="sng" algn="ctr">
-                      <a:noFill/>
-                    </a:lnL>
-                    <a:lnR w="12700" cap="flat" cmpd="sng" algn="ctr">
-                      <a:solidFill>
-                        <a:srgbClr val="162C26"/>
-                      </a:solidFill>
-                      <a:prstDash val="solid"/>
-                      <a:round/>
-                      <a:headEnd type="none" w="med" len="med"/>
-                      <a:tailEnd type="none" w="med" len="med"/>
-                    </a:lnR>
-                    <a:lnT w="0" cap="flat" cmpd="sng" algn="ctr">
-                      <a:noFill/>
-                    </a:lnT>
-                    <a:lnB w="12700" cap="flat" cmpd="sng" algn="ctr">
-                      <a:solidFill>
-                        <a:srgbClr val="162C26"/>
-                      </a:solidFill>
-                      <a:prstDash val="solid"/>
-                      <a:round/>
-                      <a:headEnd type="none" w="med" len="med"/>
-                      <a:tailEnd type="none" w="med" len="med"/>
-                    </a:lnB>
-                    <a:solidFill>
-                      <a:srgbClr val="17332B"/>
-                    </a:solidFill>
-                  </a:tcPr>
-                </a:tc>
-                <a:tc>
-                  <a:txBody>
-                    <a:bodyPr/>
-                    <a:lstStyle/>
-                    <a:p>
-                      <a:pPr indent="0" marL="0">
-                        <a:lnSpc>
-                          <a:spcPts val="1680"/>
-                        </a:lnSpc>
-                        <a:buNone/>
-                      </a:pPr>
-                      <a:r>
-                        <a:rPr lang="en-US" sz="1200" b="1" dirty="0">
-                          <a:solidFill>
-                            <a:srgbClr val="F7F5EF"/>
-                          </a:solidFill>
-                          <a:latin typeface="IBM Plex Sans" pitchFamily="34" charset="0"/>
-                          <a:ea typeface="IBM Plex Sans" pitchFamily="34" charset="-122"/>
-                          <a:cs typeface="IBM Plex Sans" pitchFamily="34" charset="-120"/>
-                        </a:rPr>
-                        <a:t>Our design</a:t>
-                      </a:r>
-                      <a:endParaRPr lang="en-US" sz="1200" dirty="0">
-                        <a:latin typeface="IBM Plex Sans" charset="0"/>
-                        <a:ea typeface="IBM Plex Sans" charset="0"/>
-                        <a:cs typeface="IBM Plex Sans" charset="0"/>
-                      </a:endParaRPr>
-                    </a:p>
-                  </a:txBody>
-                  <a:tcPr marL="53340" marR="53340" marT="53340" marB="53340" anchor="t">
-                    <a:lnL w="12700" cap="flat" cmpd="sng" algn="ctr">
-                      <a:solidFill>
-                        <a:srgbClr val="162C26"/>
-                      </a:solidFill>
-                      <a:prstDash val="solid"/>
-                      <a:round/>
-                      <a:headEnd type="none" w="med" len="med"/>
-                      <a:tailEnd type="none" w="med" len="med"/>
-                    </a:lnL>
-                    <a:lnR w="12700" cap="flat" cmpd="sng" algn="ctr">
-                      <a:solidFill>
-                        <a:srgbClr val="162C26"/>
-                      </a:solidFill>
-                      <a:prstDash val="solid"/>
-                      <a:round/>
-                      <a:headEnd type="none" w="med" len="med"/>
-                      <a:tailEnd type="none" w="med" len="med"/>
-                    </a:lnR>
-                    <a:lnT w="0" cap="flat" cmpd="sng" algn="ctr">
-                      <a:noFill/>
-                    </a:lnT>
-                    <a:lnB w="12700" cap="flat" cmpd="sng" algn="ctr">
-                      <a:solidFill>
-                        <a:srgbClr val="162C26"/>
-                      </a:solidFill>
-                      <a:prstDash val="solid"/>
-                      <a:round/>
-                      <a:headEnd type="none" w="med" len="med"/>
-                      <a:tailEnd type="none" w="med" len="med"/>
-                    </a:lnB>
-                    <a:solidFill>
-                      <a:srgbClr val="17332B"/>
-                    </a:solidFill>
-                  </a:tcPr>
-                </a:tc>
-                <a:tc>
-                  <a:txBody>
-                    <a:bodyPr/>
-                    <a:lstStyle/>
-                    <a:p>
-                      <a:pPr indent="0" marL="0">
-                        <a:lnSpc>
-                          <a:spcPts val="1680"/>
-                        </a:lnSpc>
-                        <a:buNone/>
-                      </a:pPr>
-                      <a:r>
-                        <a:rPr lang="en-US" sz="1200" b="1" dirty="0">
-                          <a:solidFill>
-                            <a:srgbClr val="F7F5EF"/>
-                          </a:solidFill>
-                          <a:latin typeface="IBM Plex Sans" pitchFamily="34" charset="0"/>
-                          <a:ea typeface="IBM Plex Sans" pitchFamily="34" charset="-122"/>
-                          <a:cs typeface="IBM Plex Sans" pitchFamily="34" charset="-120"/>
-                        </a:rPr>
-                        <a:t>Today</a:t>
-                      </a:r>
-                      <a:endParaRPr lang="en-US" sz="1200" dirty="0">
-                        <a:latin typeface="IBM Plex Sans" charset="0"/>
-                        <a:ea typeface="IBM Plex Sans" charset="0"/>
-                        <a:cs typeface="IBM Plex Sans" charset="0"/>
-                      </a:endParaRPr>
-                    </a:p>
-                  </a:txBody>
-                  <a:tcPr marL="53340" marR="53340" marT="53340" marB="53340" anchor="t">
-                    <a:lnL w="12700" cap="flat" cmpd="sng" algn="ctr">
-                      <a:solidFill>
-                        <a:srgbClr val="162C26"/>
-                      </a:solidFill>
-                      <a:prstDash val="solid"/>
-                      <a:round/>
-                      <a:headEnd type="none" w="med" len="med"/>
-                      <a:tailEnd type="none" w="med" len="med"/>
-                    </a:lnL>
-                    <a:lnR w="12700" cap="flat" cmpd="sng" algn="ctr">
-                      <a:solidFill>
-                        <a:srgbClr val="162C26"/>
-                      </a:solidFill>
-                      <a:prstDash val="solid"/>
-                      <a:round/>
-                      <a:headEnd type="none" w="med" len="med"/>
-                      <a:tailEnd type="none" w="med" len="med"/>
-                    </a:lnR>
-                    <a:lnT w="0" cap="flat" cmpd="sng" algn="ctr">
-                      <a:noFill/>
-                    </a:lnT>
-                    <a:lnB w="12700" cap="flat" cmpd="sng" algn="ctr">
-                      <a:solidFill>
-                        <a:srgbClr val="162C26"/>
-                      </a:solidFill>
-                      <a:prstDash val="solid"/>
-                      <a:round/>
-                      <a:headEnd type="none" w="med" len="med"/>
-                      <a:tailEnd type="none" w="med" len="med"/>
-                    </a:lnB>
-                    <a:solidFill>
-                      <a:srgbClr val="17332B"/>
-                    </a:solidFill>
-                  </a:tcPr>
-                </a:tc>
-              </a:tr>
-              <a:tr h="330564">
-                <a:tc>
-                  <a:txBody>
-                    <a:bodyPr/>
-                    <a:lstStyle/>
-                    <a:p>
-                      <a:pPr indent="0" marL="0">
-                        <a:lnSpc>
-                          <a:spcPts val="1680"/>
-                        </a:lnSpc>
-                        <a:buNone/>
-                      </a:pPr>
-                      <a:r>
-                        <a:rPr lang="en-US" sz="1200" dirty="0">
-                          <a:solidFill>
-                            <a:srgbClr val="2E3B35"/>
-                          </a:solidFill>
-                          <a:latin typeface="IBM Plex Sans" pitchFamily="34" charset="0"/>
-                          <a:ea typeface="IBM Plex Sans" pitchFamily="34" charset="-122"/>
-                          <a:cs typeface="IBM Plex Sans" pitchFamily="34" charset="-120"/>
-                        </a:rPr>
-                        <a:t>Storage</a:t>
-                      </a:r>
-                      <a:endParaRPr lang="en-US" sz="1200" dirty="0">
-                        <a:latin typeface="IBM Plex Sans" charset="0"/>
-                        <a:ea typeface="IBM Plex Sans" charset="0"/>
-                        <a:cs typeface="IBM Plex Sans" charset="0"/>
-                      </a:endParaRPr>
-                    </a:p>
-                  </a:txBody>
-                  <a:tcPr marL="53340" marR="53340" marT="53340" marB="53340" anchor="t">
-                    <a:lnL w="0" cap="flat" cmpd="sng" algn="ctr">
-                      <a:noFill/>
-                    </a:lnL>
-                    <a:lnR w="12700" cap="flat" cmpd="sng" algn="ctr">
-                      <a:solidFill>
-                        <a:srgbClr val="C9C8C5"/>
-                      </a:solidFill>
-                      <a:prstDash val="solid"/>
-                      <a:round/>
-                      <a:headEnd type="none" w="med" len="med"/>
-                      <a:tailEnd type="none" w="med" len="med"/>
-                    </a:lnR>
-                    <a:lnT w="12700" cap="flat" cmpd="sng" algn="ctr">
-                      <a:solidFill>
-                        <a:srgbClr val="162C26"/>
-                      </a:solidFill>
-                      <a:prstDash val="solid"/>
-                      <a:round/>
-                      <a:headEnd type="none" w="med" len="med"/>
-                      <a:tailEnd type="none" w="med" len="med"/>
-                    </a:lnT>
-                    <a:lnB w="12700" cap="flat" cmpd="sng" algn="ctr">
-                      <a:solidFill>
-                        <a:srgbClr val="C9C8C5"/>
-                      </a:solidFill>
-                      <a:prstDash val="solid"/>
-                      <a:round/>
-                      <a:headEnd type="none" w="med" len="med"/>
-                      <a:tailEnd type="none" w="med" len="med"/>
-                    </a:lnB>
-                    <a:solidFill>
-                      <a:srgbClr val="FCFBF7"/>
-                    </a:solidFill>
-                  </a:tcPr>
-                </a:tc>
-                <a:tc>
-                  <a:txBody>
-                    <a:bodyPr/>
-                    <a:lstStyle/>
-                    <a:p>
-                      <a:pPr indent="0" marL="0">
-                        <a:lnSpc>
-                          <a:spcPts val="1680"/>
-                        </a:lnSpc>
-                        <a:buNone/>
-                      </a:pPr>
-                      <a:r>
-                        <a:rPr lang="en-US" sz="1200" dirty="0">
-                          <a:solidFill>
-                            <a:srgbClr val="2E3B35"/>
-                          </a:solidFill>
-                          <a:latin typeface="IBM Plex Sans" pitchFamily="34" charset="0"/>
-                          <a:ea typeface="IBM Plex Sans" pitchFamily="34" charset="-122"/>
-                          <a:cs typeface="IBM Plex Sans" pitchFamily="34" charset="-120"/>
-                        </a:rPr>
-                        <a:t>≈ 0.17 GB, under $0.01/month (approx.)</a:t>
-                      </a:r>
-                      <a:endParaRPr lang="en-US" sz="1200" dirty="0">
-                        <a:latin typeface="IBM Plex Sans" charset="0"/>
-                        <a:ea typeface="IBM Plex Sans" charset="0"/>
-                        <a:cs typeface="IBM Plex Sans" charset="0"/>
-                      </a:endParaRPr>
-                    </a:p>
-                  </a:txBody>
-                  <a:tcPr marL="53340" marR="53340" marT="53340" marB="53340" anchor="t">
-                    <a:lnL w="12700" cap="flat" cmpd="sng" algn="ctr">
-                      <a:solidFill>
-                        <a:srgbClr val="C9C8C5"/>
-                      </a:solidFill>
-                      <a:prstDash val="solid"/>
-                      <a:round/>
-                      <a:headEnd type="none" w="med" len="med"/>
-                      <a:tailEnd type="none" w="med" len="med"/>
-                    </a:lnL>
-                    <a:lnR w="12700" cap="flat" cmpd="sng" algn="ctr">
-                      <a:solidFill>
-                        <a:srgbClr val="C9C8C5"/>
-                      </a:solidFill>
-                      <a:prstDash val="solid"/>
-                      <a:round/>
-                      <a:headEnd type="none" w="med" len="med"/>
-                      <a:tailEnd type="none" w="med" len="med"/>
-                    </a:lnR>
-                    <a:lnT w="12700" cap="flat" cmpd="sng" algn="ctr">
-                      <a:solidFill>
-                        <a:srgbClr val="162C26"/>
-                      </a:solidFill>
-                      <a:prstDash val="solid"/>
-                      <a:round/>
-                      <a:headEnd type="none" w="med" len="med"/>
-                      <a:tailEnd type="none" w="med" len="med"/>
-                    </a:lnT>
-                    <a:lnB w="12700" cap="flat" cmpd="sng" algn="ctr">
-                      <a:solidFill>
-                        <a:srgbClr val="C9C8C5"/>
-                      </a:solidFill>
-                      <a:prstDash val="solid"/>
-                      <a:round/>
-                      <a:headEnd type="none" w="med" len="med"/>
-                      <a:tailEnd type="none" w="med" len="med"/>
-                    </a:lnB>
-                    <a:solidFill>
-                      <a:srgbClr val="FCFBF7"/>
-                    </a:solidFill>
-                  </a:tcPr>
-                </a:tc>
-                <a:tc>
-                  <a:txBody>
-                    <a:bodyPr/>
-                    <a:lstStyle/>
-                    <a:p>
-                      <a:pPr indent="0" marL="0">
-                        <a:lnSpc>
-                          <a:spcPts val="1680"/>
-                        </a:lnSpc>
-                        <a:buNone/>
-                      </a:pPr>
-                      <a:r>
-                        <a:rPr lang="en-US" sz="1200" dirty="0">
-                          <a:solidFill>
-                            <a:srgbClr val="2E3B35"/>
-                          </a:solidFill>
-                          <a:latin typeface="IBM Plex Sans" pitchFamily="34" charset="0"/>
-                          <a:ea typeface="IBM Plex Sans" pitchFamily="34" charset="-122"/>
-                          <a:cs typeface="IBM Plex Sans" pitchFamily="34" charset="-120"/>
-                        </a:rPr>
-                        <a:t>Full raster copies in GCS + PostGIS vectors</a:t>
-                      </a:r>
-                      <a:endParaRPr lang="en-US" sz="1200" dirty="0">
-                        <a:latin typeface="IBM Plex Sans" charset="0"/>
-                        <a:ea typeface="IBM Plex Sans" charset="0"/>
-                        <a:cs typeface="IBM Plex Sans" charset="0"/>
-                      </a:endParaRPr>
-                    </a:p>
-                  </a:txBody>
-                  <a:tcPr marL="53340" marR="53340" marT="53340" marB="53340" anchor="t">
-                    <a:lnL w="12700" cap="flat" cmpd="sng" algn="ctr">
-                      <a:solidFill>
-                        <a:srgbClr val="C9C8C5"/>
-                      </a:solidFill>
-                      <a:prstDash val="solid"/>
-                      <a:round/>
-                      <a:headEnd type="none" w="med" len="med"/>
-                      <a:tailEnd type="none" w="med" len="med"/>
-                    </a:lnL>
-                    <a:lnR w="12700" cap="flat" cmpd="sng" algn="ctr">
-                      <a:solidFill>
-                        <a:srgbClr val="C9C8C5"/>
-                      </a:solidFill>
-                      <a:prstDash val="solid"/>
-                      <a:round/>
-                      <a:headEnd type="none" w="med" len="med"/>
-                      <a:tailEnd type="none" w="med" len="med"/>
-                    </a:lnR>
-                    <a:lnT w="12700" cap="flat" cmpd="sng" algn="ctr">
-                      <a:solidFill>
-                        <a:srgbClr val="162C26"/>
-                      </a:solidFill>
-                      <a:prstDash val="solid"/>
-                      <a:round/>
-                      <a:headEnd type="none" w="med" len="med"/>
-                      <a:tailEnd type="none" w="med" len="med"/>
-                    </a:lnT>
-                    <a:lnB w="12700" cap="flat" cmpd="sng" algn="ctr">
-                      <a:solidFill>
-                        <a:srgbClr val="C9C8C5"/>
-                      </a:solidFill>
-                      <a:prstDash val="solid"/>
-                      <a:round/>
-                      <a:headEnd type="none" w="med" len="med"/>
-                      <a:tailEnd type="none" w="med" len="med"/>
-                    </a:lnB>
-                    <a:solidFill>
-                      <a:srgbClr val="FCFBF7"/>
-                    </a:solidFill>
-                  </a:tcPr>
-                </a:tc>
-              </a:tr>
-              <a:tr h="543884">
-                <a:tc>
-                  <a:txBody>
-                    <a:bodyPr/>
-                    <a:lstStyle/>
-                    <a:p>
-                      <a:pPr indent="0" marL="0">
-                        <a:lnSpc>
-                          <a:spcPts val="1680"/>
-                        </a:lnSpc>
-                        <a:buNone/>
-                      </a:pPr>
-                      <a:r>
-                        <a:rPr lang="en-US" sz="1200" dirty="0">
-                          <a:solidFill>
-                            <a:srgbClr val="2E3B35"/>
-                          </a:solidFill>
-                          <a:latin typeface="IBM Plex Sans" pitchFamily="34" charset="0"/>
-                          <a:ea typeface="IBM Plex Sans" pitchFamily="34" charset="-122"/>
-                          <a:cs typeface="IBM Plex Sans" pitchFamily="34" charset="-120"/>
-                        </a:rPr>
-                        <a:t>Reanalysis of 1 M plots</a:t>
-                      </a:r>
-                      <a:endParaRPr lang="en-US" sz="1200" dirty="0">
-                        <a:latin typeface="IBM Plex Sans" charset="0"/>
-                        <a:ea typeface="IBM Plex Sans" charset="0"/>
-                        <a:cs typeface="IBM Plex Sans" charset="0"/>
-                      </a:endParaRPr>
-                    </a:p>
-                  </a:txBody>
-                  <a:tcPr marL="53340" marR="53340" marT="53340" marB="53340" anchor="t">
-                    <a:lnL w="0" cap="flat" cmpd="sng" algn="ctr">
-                      <a:noFill/>
-                    </a:lnL>
-                    <a:lnR w="12700" cap="flat" cmpd="sng" algn="ctr">
-                      <a:solidFill>
-                        <a:srgbClr val="B5BCC3"/>
-                      </a:solidFill>
-                      <a:prstDash val="solid"/>
-                      <a:round/>
-                      <a:headEnd type="none" w="med" len="med"/>
-                      <a:tailEnd type="none" w="med" len="med"/>
-                    </a:lnR>
-                    <a:lnT w="12700" cap="flat" cmpd="sng" algn="ctr">
-                      <a:solidFill>
-                        <a:srgbClr val="C9C8C5"/>
-                      </a:solidFill>
-                      <a:prstDash val="solid"/>
-                      <a:round/>
-                      <a:headEnd type="none" w="med" len="med"/>
-                      <a:tailEnd type="none" w="med" len="med"/>
-                    </a:lnT>
-                    <a:lnB w="12700" cap="flat" cmpd="sng" algn="ctr">
-                      <a:solidFill>
-                        <a:srgbClr val="B5BCC3"/>
-                      </a:solidFill>
-                      <a:prstDash val="solid"/>
-                      <a:round/>
-                      <a:headEnd type="none" w="med" len="med"/>
-                      <a:tailEnd type="none" w="med" len="med"/>
-                    </a:lnB>
-                    <a:solidFill>
-                      <a:srgbClr val="E3ECF4"/>
-                    </a:solidFill>
-                  </a:tcPr>
-                </a:tc>
-                <a:tc>
-                  <a:txBody>
-                    <a:bodyPr/>
-                    <a:lstStyle/>
-                    <a:p>
-                      <a:pPr indent="0" marL="0">
-                        <a:lnSpc>
-                          <a:spcPts val="1680"/>
-                        </a:lnSpc>
-                        <a:buNone/>
-                      </a:pPr>
-                      <a:r>
-                        <a:rPr lang="en-US" sz="1200" dirty="0">
-                          <a:solidFill>
-                            <a:srgbClr val="2E3B35"/>
-                          </a:solidFill>
-                          <a:latin typeface="IBM Plex Sans" pitchFamily="34" charset="0"/>
-                          <a:ea typeface="IBM Plex Sans" pitchFamily="34" charset="-122"/>
-                          <a:cs typeface="IBM Plex Sans" pitchFamily="34" charset="-120"/>
-                        </a:rPr>
-                        <a:t>≈ 11 min local compute; ≈ $0</a:t>
-                      </a:r>
-                      <a:endParaRPr lang="en-US" sz="1200" dirty="0">
-                        <a:latin typeface="IBM Plex Sans" charset="0"/>
-                        <a:ea typeface="IBM Plex Sans" charset="0"/>
-                        <a:cs typeface="IBM Plex Sans" charset="0"/>
-                      </a:endParaRPr>
-                    </a:p>
-                  </a:txBody>
-                  <a:tcPr marL="53340" marR="53340" marT="53340" marB="53340" anchor="t">
-                    <a:lnL w="12700" cap="flat" cmpd="sng" algn="ctr">
-                      <a:solidFill>
-                        <a:srgbClr val="B5BCC3"/>
-                      </a:solidFill>
-                      <a:prstDash val="solid"/>
-                      <a:round/>
-                      <a:headEnd type="none" w="med" len="med"/>
-                      <a:tailEnd type="none" w="med" len="med"/>
-                    </a:lnL>
-                    <a:lnR w="12700" cap="flat" cmpd="sng" algn="ctr">
-                      <a:solidFill>
-                        <a:srgbClr val="B5BCC3"/>
-                      </a:solidFill>
-                      <a:prstDash val="solid"/>
-                      <a:round/>
-                      <a:headEnd type="none" w="med" len="med"/>
-                      <a:tailEnd type="none" w="med" len="med"/>
-                    </a:lnR>
-                    <a:lnT w="12700" cap="flat" cmpd="sng" algn="ctr">
-                      <a:solidFill>
-                        <a:srgbClr val="C9C8C5"/>
-                      </a:solidFill>
-                      <a:prstDash val="solid"/>
-                      <a:round/>
-                      <a:headEnd type="none" w="med" len="med"/>
-                      <a:tailEnd type="none" w="med" len="med"/>
-                    </a:lnT>
-                    <a:lnB w="12700" cap="flat" cmpd="sng" algn="ctr">
-                      <a:solidFill>
-                        <a:srgbClr val="B5BCC3"/>
-                      </a:solidFill>
-                      <a:prstDash val="solid"/>
-                      <a:round/>
-                      <a:headEnd type="none" w="med" len="med"/>
-                      <a:tailEnd type="none" w="med" len="med"/>
-                    </a:lnB>
-                    <a:solidFill>
-                      <a:srgbClr val="E3ECF4"/>
-                    </a:solidFill>
-                  </a:tcPr>
-                </a:tc>
-                <a:tc>
-                  <a:txBody>
-                    <a:bodyPr/>
-                    <a:lstStyle/>
-                    <a:p>
-                      <a:pPr indent="0" marL="0">
-                        <a:lnSpc>
-                          <a:spcPts val="1680"/>
-                        </a:lnSpc>
-                        <a:buNone/>
-                      </a:pPr>
-                      <a:r>
-                        <a:rPr lang="en-US" sz="1200" dirty="0">
-                          <a:solidFill>
-                            <a:srgbClr val="2E3B35"/>
-                          </a:solidFill>
-                          <a:latin typeface="IBM Plex Sans" pitchFamily="34" charset="0"/>
-                          <a:ea typeface="IBM Plex Sans" pitchFamily="34" charset="-122"/>
-                          <a:cs typeface="IBM Plex Sans" pitchFamily="34" charset="-120"/>
-                        </a:rPr>
-                        <a:t>≈ 7 hours (0.5 s per request, 20-request cap); ≈ $19 of EECU</a:t>
-                      </a:r>
-                      <a:endParaRPr lang="en-US" sz="1200" dirty="0">
-                        <a:latin typeface="IBM Plex Sans" charset="0"/>
-                        <a:ea typeface="IBM Plex Sans" charset="0"/>
-                        <a:cs typeface="IBM Plex Sans" charset="0"/>
-                      </a:endParaRPr>
-                    </a:p>
-                  </a:txBody>
-                  <a:tcPr marL="53340" marR="53340" marT="53340" marB="53340" anchor="t">
-                    <a:lnL w="12700" cap="flat" cmpd="sng" algn="ctr">
-                      <a:solidFill>
-                        <a:srgbClr val="B5BCC3"/>
-                      </a:solidFill>
-                      <a:prstDash val="solid"/>
-                      <a:round/>
-                      <a:headEnd type="none" w="med" len="med"/>
-                      <a:tailEnd type="none" w="med" len="med"/>
-                    </a:lnL>
-                    <a:lnR w="12700" cap="flat" cmpd="sng" algn="ctr">
-                      <a:solidFill>
-                        <a:srgbClr val="B5BCC3"/>
-                      </a:solidFill>
-                      <a:prstDash val="solid"/>
-                      <a:round/>
-                      <a:headEnd type="none" w="med" len="med"/>
-                      <a:tailEnd type="none" w="med" len="med"/>
-                    </a:lnR>
-                    <a:lnT w="12700" cap="flat" cmpd="sng" algn="ctr">
-                      <a:solidFill>
-                        <a:srgbClr val="C9C8C5"/>
-                      </a:solidFill>
-                      <a:prstDash val="solid"/>
-                      <a:round/>
-                      <a:headEnd type="none" w="med" len="med"/>
-                      <a:tailEnd type="none" w="med" len="med"/>
-                    </a:lnT>
-                    <a:lnB w="12700" cap="flat" cmpd="sng" algn="ctr">
-                      <a:solidFill>
-                        <a:srgbClr val="B5BCC3"/>
-                      </a:solidFill>
-                      <a:prstDash val="solid"/>
-                      <a:round/>
-                      <a:headEnd type="none" w="med" len="med"/>
-                      <a:tailEnd type="none" w="med" len="med"/>
-                    </a:lnB>
-                    <a:solidFill>
-                      <a:srgbClr val="E3ECF4"/>
-                    </a:solidFill>
-                  </a:tcPr>
-                </a:tc>
-              </a:tr>
-              <a:tr h="543884">
-                <a:tc>
-                  <a:txBody>
-                    <a:bodyPr/>
-                    <a:lstStyle/>
-                    <a:p>
-                      <a:pPr indent="0" marL="0">
-                        <a:lnSpc>
-                          <a:spcPts val="1680"/>
-                        </a:lnSpc>
-                        <a:buNone/>
-                      </a:pPr>
-                      <a:r>
-                        <a:rPr lang="en-US" sz="1200" dirty="0">
-                          <a:solidFill>
-                            <a:srgbClr val="2E3B35"/>
-                          </a:solidFill>
-                          <a:latin typeface="IBM Plex Sans" pitchFamily="34" charset="0"/>
-                          <a:ea typeface="IBM Plex Sans" pitchFamily="34" charset="-122"/>
-                          <a:cs typeface="IBM Plex Sans" pitchFamily="34" charset="-120"/>
-                        </a:rPr>
-                        <a:t>Fixed cost</a:t>
-                      </a:r>
-                      <a:endParaRPr lang="en-US" sz="1200" dirty="0">
-                        <a:latin typeface="IBM Plex Sans" charset="0"/>
-                        <a:ea typeface="IBM Plex Sans" charset="0"/>
-                        <a:cs typeface="IBM Plex Sans" charset="0"/>
-                      </a:endParaRPr>
-                    </a:p>
-                  </a:txBody>
-                  <a:tcPr marL="53340" marR="53340" marT="53340" marB="53340" anchor="t">
-                    <a:lnL w="0" cap="flat" cmpd="sng" algn="ctr">
-                      <a:noFill/>
-                    </a:lnL>
-                    <a:lnR w="12700" cap="flat" cmpd="sng" algn="ctr">
-                      <a:solidFill>
-                        <a:srgbClr val="C9C8C5"/>
-                      </a:solidFill>
-                      <a:prstDash val="solid"/>
-                      <a:round/>
-                      <a:headEnd type="none" w="med" len="med"/>
-                      <a:tailEnd type="none" w="med" len="med"/>
-                    </a:lnR>
-                    <a:lnT w="12700" cap="flat" cmpd="sng" algn="ctr">
-                      <a:solidFill>
-                        <a:srgbClr val="B5BCC3"/>
-                      </a:solidFill>
-                      <a:prstDash val="solid"/>
-                      <a:round/>
-                      <a:headEnd type="none" w="med" len="med"/>
-                      <a:tailEnd type="none" w="med" len="med"/>
-                    </a:lnT>
-                    <a:lnB w="12700" cap="flat" cmpd="sng" algn="ctr">
-                      <a:solidFill>
-                        <a:srgbClr val="C9C8C5"/>
-                      </a:solidFill>
-                      <a:prstDash val="solid"/>
-                      <a:round/>
-                      <a:headEnd type="none" w="med" len="med"/>
-                      <a:tailEnd type="none" w="med" len="med"/>
-                    </a:lnB>
-                    <a:solidFill>
-                      <a:srgbClr val="FCFBF7"/>
-                    </a:solidFill>
-                  </a:tcPr>
-                </a:tc>
-                <a:tc>
-                  <a:txBody>
-                    <a:bodyPr/>
-                    <a:lstStyle/>
-                    <a:p>
-                      <a:pPr indent="0" marL="0">
-                        <a:lnSpc>
-                          <a:spcPts val="1680"/>
-                        </a:lnSpc>
-                        <a:buNone/>
-                      </a:pPr>
-                      <a:r>
-                        <a:rPr lang="en-US" sz="1200" dirty="0">
-                          <a:solidFill>
-                            <a:srgbClr val="2E3B35"/>
-                          </a:solidFill>
-                          <a:latin typeface="IBM Plex Sans" pitchFamily="34" charset="0"/>
-                          <a:ea typeface="IBM Plex Sans" pitchFamily="34" charset="-122"/>
-                          <a:cs typeface="IBM Plex Sans" pitchFamily="34" charset="-120"/>
-                        </a:rPr>
-                        <a:t>Object storage + small batch job, under $1/month (approx.)</a:t>
-                      </a:r>
-                      <a:endParaRPr lang="en-US" sz="1200" dirty="0">
-                        <a:latin typeface="IBM Plex Sans" charset="0"/>
-                        <a:ea typeface="IBM Plex Sans" charset="0"/>
-                        <a:cs typeface="IBM Plex Sans" charset="0"/>
-                      </a:endParaRPr>
-                    </a:p>
-                  </a:txBody>
-                  <a:tcPr marL="53340" marR="53340" marT="53340" marB="53340" anchor="t">
-                    <a:lnL w="12700" cap="flat" cmpd="sng" algn="ctr">
-                      <a:solidFill>
-                        <a:srgbClr val="C9C8C5"/>
-                      </a:solidFill>
-                      <a:prstDash val="solid"/>
-                      <a:round/>
-                      <a:headEnd type="none" w="med" len="med"/>
-                      <a:tailEnd type="none" w="med" len="med"/>
-                    </a:lnL>
-                    <a:lnR w="12700" cap="flat" cmpd="sng" algn="ctr">
-                      <a:solidFill>
-                        <a:srgbClr val="C9C8C5"/>
-                      </a:solidFill>
-                      <a:prstDash val="solid"/>
-                      <a:round/>
-                      <a:headEnd type="none" w="med" len="med"/>
-                      <a:tailEnd type="none" w="med" len="med"/>
-                    </a:lnR>
-                    <a:lnT w="12700" cap="flat" cmpd="sng" algn="ctr">
-                      <a:solidFill>
-                        <a:srgbClr val="B5BCC3"/>
-                      </a:solidFill>
-                      <a:prstDash val="solid"/>
-                      <a:round/>
-                      <a:headEnd type="none" w="med" len="med"/>
-                      <a:tailEnd type="none" w="med" len="med"/>
-                    </a:lnT>
-                    <a:lnB w="12700" cap="flat" cmpd="sng" algn="ctr">
-                      <a:solidFill>
-                        <a:srgbClr val="C9C8C5"/>
-                      </a:solidFill>
-                      <a:prstDash val="solid"/>
-                      <a:round/>
-                      <a:headEnd type="none" w="med" len="med"/>
-                      <a:tailEnd type="none" w="med" len="med"/>
-                    </a:lnB>
-                    <a:solidFill>
-                      <a:srgbClr val="FCFBF7"/>
-                    </a:solidFill>
-                  </a:tcPr>
-                </a:tc>
-                <a:tc>
-                  <a:txBody>
-                    <a:bodyPr/>
-                    <a:lstStyle/>
-                    <a:p>
-                      <a:pPr indent="0" marL="0">
-                        <a:lnSpc>
-                          <a:spcPts val="1680"/>
-                        </a:lnSpc>
-                        <a:buNone/>
-                      </a:pPr>
-                      <a:r>
-                        <a:rPr lang="en-US" sz="1200" dirty="0">
-                          <a:solidFill>
-                            <a:srgbClr val="2E3B35"/>
-                          </a:solidFill>
-                          <a:latin typeface="IBM Plex Sans" pitchFamily="34" charset="0"/>
-                          <a:ea typeface="IBM Plex Sans" pitchFamily="34" charset="-122"/>
-                          <a:cs typeface="IBM Plex Sans" pitchFamily="34" charset="-120"/>
-                        </a:rPr>
-                        <a:t>Enterprise Basic fee $500/month (incl. 33 online + 100 batch EECU-hours)</a:t>
-                      </a:r>
-                      <a:endParaRPr lang="en-US" sz="1200" dirty="0">
-                        <a:latin typeface="IBM Plex Sans" charset="0"/>
-                        <a:ea typeface="IBM Plex Sans" charset="0"/>
-                        <a:cs typeface="IBM Plex Sans" charset="0"/>
-                      </a:endParaRPr>
-                    </a:p>
-                  </a:txBody>
-                  <a:tcPr marL="53340" marR="53340" marT="53340" marB="53340" anchor="t">
-                    <a:lnL w="12700" cap="flat" cmpd="sng" algn="ctr">
-                      <a:solidFill>
-                        <a:srgbClr val="C9C8C5"/>
-                      </a:solidFill>
-                      <a:prstDash val="solid"/>
-                      <a:round/>
-                      <a:headEnd type="none" w="med" len="med"/>
-                      <a:tailEnd type="none" w="med" len="med"/>
-                    </a:lnL>
-                    <a:lnR w="12700" cap="flat" cmpd="sng" algn="ctr">
-                      <a:solidFill>
-                        <a:srgbClr val="C9C8C5"/>
-                      </a:solidFill>
-                      <a:prstDash val="solid"/>
-                      <a:round/>
-                      <a:headEnd type="none" w="med" len="med"/>
-                      <a:tailEnd type="none" w="med" len="med"/>
-                    </a:lnR>
-                    <a:lnT w="12700" cap="flat" cmpd="sng" algn="ctr">
-                      <a:solidFill>
-                        <a:srgbClr val="B5BCC3"/>
-                      </a:solidFill>
-                      <a:prstDash val="solid"/>
-                      <a:round/>
-                      <a:headEnd type="none" w="med" len="med"/>
-                      <a:tailEnd type="none" w="med" len="med"/>
-                    </a:lnT>
-                    <a:lnB w="12700" cap="flat" cmpd="sng" algn="ctr">
-                      <a:solidFill>
-                        <a:srgbClr val="C9C8C5"/>
-                      </a:solidFill>
-                      <a:prstDash val="solid"/>
-                      <a:round/>
-                      <a:headEnd type="none" w="med" len="med"/>
-                      <a:tailEnd type="none" w="med" len="med"/>
-                    </a:lnB>
-                    <a:solidFill>
-                      <a:srgbClr val="FCFBF7"/>
-                    </a:solidFill>
-                  </a:tcPr>
-                </a:tc>
-              </a:tr>
-            </a:tbl>
-          </a:graphicData>
-        </a:graphic>
-      </p:graphicFrame>
-      <p:sp>
-        <p:nvSpPr>
-          <p:cNvPr id="7" name="Shape 4"/>
-          <p:cNvSpPr/>
-          <p:nvPr/>
-        </p:nvSpPr>
-        <p:spPr>
-          <a:xfrm>
-            <a:off x="815942" y="3870474"/>
-            <a:ext cx="3414216" cy="1213048"/>
-          </a:xfrm>
-          <a:prstGeom prst="roundRect">
-            <a:avLst>
-              <a:gd name="adj" fmla="val 6020"/>
-            </a:avLst>
-          </a:prstGeom>
-          <a:solidFill>
-            <a:srgbClr val="FCFBF7"/>
-          </a:solidFill>
-          <a:ln w="6350">
-            <a:solidFill>
-              <a:srgbClr val="DDD8CA"/>
-            </a:solidFill>
-            <a:prstDash val="solid"/>
-          </a:ln>
-        </p:spPr>
-      </p:sp>
-      <p:sp>
-        <p:nvSpPr>
-          <p:cNvPr id="8" name="Text 5"/>
-          <p:cNvSpPr/>
-          <p:nvPr/>
-        </p:nvSpPr>
-        <p:spPr>
-          <a:xfrm>
-            <a:off x="995825" y="4024970"/>
-            <a:ext cx="3146083" cy="238720"/>
+          <p:cNvPr id="7" name="Text 5"/>
+          <p:cNvSpPr/>
+          <p:nvPr/>
+        </p:nvSpPr>
+        <p:spPr>
+          <a:xfrm>
+            <a:off x="812767" y="4081940"/>
+            <a:ext cx="3420647" cy="238720"/>
           </a:xfrm>
           <a:prstGeom prst="rect">
             <a:avLst/>
@@ -8742,7 +7270,7 @@
                 <a:ea typeface="IBM Plex Sans" pitchFamily="34" charset="-122"/>
                 <a:cs typeface="IBM Plex Sans" pitchFamily="34" charset="-120"/>
               </a:rPr>
-              <a:t>Earth Engine once per release</a:t>
+              <a:t>Storage</a:t>
             </a:r>
             <a:endParaRPr lang="en-US" sz="1400" dirty="0"/>
           </a:p>
@@ -8750,14 +7278,191 @@
       </p:sp>
       <p:sp>
         <p:nvSpPr>
-          <p:cNvPr id="9" name="Text 6"/>
-          <p:cNvSpPr/>
-          <p:nvPr/>
-        </p:nvSpPr>
-        <p:spPr>
-          <a:xfrm>
-            <a:off x="995825" y="4289059"/>
-            <a:ext cx="3146083" cy="452041"/>
+          <p:cNvPr id="8" name="Text 6"/>
+          <p:cNvSpPr/>
+          <p:nvPr/>
+        </p:nvSpPr>
+        <p:spPr>
+          <a:xfrm>
+            <a:off x="812767" y="4358760"/>
+            <a:ext cx="3420647" cy="231114"/>
+          </a:xfrm>
+          <a:prstGeom prst="rect">
+            <a:avLst/>
+          </a:prstGeom>
+          <a:noFill/>
+          <a:ln/>
+        </p:spPr>
+        <p:txBody>
+          <a:bodyPr wrap="square" lIns="0" tIns="0" rIns="0" bIns="0" rtlCol="0" anchor="t">
+            <a:normAutofit/>
+          </a:bodyPr>
+          <a:lstStyle/>
+          <a:p>
+            <a:pPr algn="l" indent="0" marL="0">
+              <a:lnSpc>
+                <a:spcPts val="1620"/>
+              </a:lnSpc>
+              <a:buNone/>
+            </a:pPr>
+            <a:r>
+              <a:rPr lang="en-US" sz="1200" b="1" dirty="0">
+                <a:solidFill>
+                  <a:srgbClr val="2F6FA3"/>
+                </a:solidFill>
+                <a:latin typeface="IBM Plex Sans" pitchFamily="34" charset="0"/>
+                <a:ea typeface="IBM Plex Sans" pitchFamily="34" charset="-122"/>
+                <a:cs typeface="IBM Plex Sans" pitchFamily="34" charset="-120"/>
+              </a:rPr>
+              <a:t>Ours</a:t>
+            </a:r>
+            <a:r>
+              <a:rPr lang="en-US" sz="1200" dirty="0">
+                <a:solidFill>
+                  <a:srgbClr val="44524B"/>
+                </a:solidFill>
+                <a:latin typeface="IBM Plex Sans" pitchFamily="34" charset="0"/>
+                <a:ea typeface="IBM Plex Sans" pitchFamily="34" charset="-122"/>
+                <a:cs typeface="IBM Plex Sans" pitchFamily="34" charset="-120"/>
+              </a:rPr>
+              <a:t> ≈ 0.17 GB, under $0.01/month</a:t>
+            </a:r>
+            <a:endParaRPr lang="en-US" sz="1200" dirty="0"/>
+          </a:p>
+        </p:txBody>
+      </p:sp>
+      <p:sp>
+        <p:nvSpPr>
+          <p:cNvPr id="9" name="Text 7"/>
+          <p:cNvSpPr/>
+          <p:nvPr/>
+        </p:nvSpPr>
+        <p:spPr>
+          <a:xfrm>
+            <a:off x="812767" y="4627972"/>
+            <a:ext cx="3420647" cy="231114"/>
+          </a:xfrm>
+          <a:prstGeom prst="rect">
+            <a:avLst/>
+          </a:prstGeom>
+          <a:noFill/>
+          <a:ln/>
+        </p:spPr>
+        <p:txBody>
+          <a:bodyPr wrap="square" lIns="0" tIns="0" rIns="0" bIns="0" rtlCol="0" anchor="t">
+            <a:normAutofit/>
+          </a:bodyPr>
+          <a:lstStyle/>
+          <a:p>
+            <a:pPr algn="l" indent="0" marL="0">
+              <a:lnSpc>
+                <a:spcPts val="1620"/>
+              </a:lnSpc>
+              <a:buNone/>
+            </a:pPr>
+            <a:r>
+              <a:rPr lang="en-US" sz="1200" b="1" dirty="0">
+                <a:solidFill>
+                  <a:srgbClr val="A4501C"/>
+                </a:solidFill>
+                <a:latin typeface="IBM Plex Sans" pitchFamily="34" charset="0"/>
+                <a:ea typeface="IBM Plex Sans" pitchFamily="34" charset="-122"/>
+                <a:cs typeface="IBM Plex Sans" pitchFamily="34" charset="-120"/>
+              </a:rPr>
+              <a:t>Today</a:t>
+            </a:r>
+            <a:r>
+              <a:rPr lang="en-US" sz="1200" dirty="0">
+                <a:solidFill>
+                  <a:srgbClr val="44524B"/>
+                </a:solidFill>
+                <a:latin typeface="IBM Plex Sans" pitchFamily="34" charset="0"/>
+                <a:ea typeface="IBM Plex Sans" pitchFamily="34" charset="-122"/>
+                <a:cs typeface="IBM Plex Sans" pitchFamily="34" charset="-120"/>
+              </a:rPr>
+              <a:t> full raster copies + PostGIS</a:t>
+            </a:r>
+            <a:endParaRPr lang="en-US" sz="1200" dirty="0"/>
+          </a:p>
+        </p:txBody>
+      </p:sp>
+      <p:sp>
+        <p:nvSpPr>
+          <p:cNvPr id="10" name="Text 8"/>
+          <p:cNvSpPr/>
+          <p:nvPr/>
+        </p:nvSpPr>
+        <p:spPr>
+          <a:xfrm>
+            <a:off x="812767" y="4897189"/>
+            <a:ext cx="3420647" cy="231114"/>
+          </a:xfrm>
+          <a:prstGeom prst="rect">
+            <a:avLst/>
+          </a:prstGeom>
+          <a:noFill/>
+          <a:ln/>
+        </p:spPr>
+        <p:txBody>
+          <a:bodyPr wrap="square" lIns="0" tIns="0" rIns="0" bIns="0" rtlCol="0" anchor="t">
+            <a:normAutofit/>
+          </a:bodyPr>
+          <a:lstStyle/>
+          <a:p>
+            <a:pPr algn="l" indent="0" marL="0">
+              <a:lnSpc>
+                <a:spcPts val="1620"/>
+              </a:lnSpc>
+              <a:buNone/>
+            </a:pPr>
+            <a:r>
+              <a:rPr lang="en-US" sz="1200" dirty="0">
+                <a:solidFill>
+                  <a:srgbClr val="5E6B64"/>
+                </a:solidFill>
+                <a:latin typeface="IBM Plex Sans" pitchFamily="34" charset="0"/>
+                <a:ea typeface="IBM Plex Sans" pitchFamily="34" charset="-122"/>
+                <a:cs typeface="IBM Plex Sans" pitchFamily="34" charset="-120"/>
+              </a:rPr>
+              <a:t>Cheap either way</a:t>
+            </a:r>
+            <a:endParaRPr lang="en-US" sz="1200" dirty="0"/>
+          </a:p>
+        </p:txBody>
+      </p:sp>
+      <p:sp>
+        <p:nvSpPr>
+          <p:cNvPr id="11" name="Shape 9"/>
+          <p:cNvSpPr/>
+          <p:nvPr/>
+        </p:nvSpPr>
+        <p:spPr>
+          <a:xfrm>
+            <a:off x="4438551" y="3936950"/>
+            <a:ext cx="3321100" cy="0"/>
+          </a:xfrm>
+          <a:prstGeom prst="line">
+            <a:avLst/>
+          </a:prstGeom>
+          <a:noFill/>
+          <a:ln w="38100">
+            <a:solidFill>
+              <a:srgbClr val="5E6B64"/>
+            </a:solidFill>
+            <a:prstDash val="solid"/>
+          </a:ln>
+        </p:spPr>
+      </p:sp>
+      <p:sp>
+        <p:nvSpPr>
+          <p:cNvPr id="12" name="Text 10"/>
+          <p:cNvSpPr/>
+          <p:nvPr/>
+        </p:nvSpPr>
+        <p:spPr>
+          <a:xfrm>
+            <a:off x="4438551" y="4081940"/>
+            <a:ext cx="3420733" cy="238720"/>
           </a:xfrm>
           <a:prstGeom prst="rect">
             <a:avLst/>
@@ -8778,15 +7483,70 @@
               <a:buNone/>
             </a:pPr>
             <a:r>
-              <a:rPr lang="en-US" sz="1200" dirty="0">
-                <a:solidFill>
-                  <a:srgbClr val="44524B"/>
+              <a:rPr lang="en-US" sz="1400" b="1" dirty="0">
+                <a:solidFill>
+                  <a:srgbClr val="17332B"/>
                 </a:solidFill>
                 <a:latin typeface="IBM Plex Sans" pitchFamily="34" charset="0"/>
                 <a:ea typeface="IBM Plex Sans" pitchFamily="34" charset="-122"/>
                 <a:cs typeface="IBM Plex Sans" pitchFamily="34" charset="-120"/>
               </a:rPr>
-              <a:t>Per-check compute is cheap either way; the gain is time and no 20-request cap.</a:t>
+              <a:t>Compute per million checks</a:t>
+            </a:r>
+            <a:endParaRPr lang="en-US" sz="1400" dirty="0"/>
+          </a:p>
+        </p:txBody>
+      </p:sp>
+      <p:sp>
+        <p:nvSpPr>
+          <p:cNvPr id="13" name="Text 11"/>
+          <p:cNvSpPr/>
+          <p:nvPr/>
+        </p:nvSpPr>
+        <p:spPr>
+          <a:xfrm>
+            <a:off x="4438551" y="4358760"/>
+            <a:ext cx="3420733" cy="231114"/>
+          </a:xfrm>
+          <a:prstGeom prst="rect">
+            <a:avLst/>
+          </a:prstGeom>
+          <a:noFill/>
+          <a:ln/>
+        </p:spPr>
+        <p:txBody>
+          <a:bodyPr wrap="square" lIns="0" tIns="0" rIns="0" bIns="0" rtlCol="0" anchor="t">
+            <a:normAutofit/>
+          </a:bodyPr>
+          <a:lstStyle/>
+          <a:p>
+            <a:pPr algn="l" indent="0" marL="0">
+              <a:lnSpc>
+                <a:spcPts val="1620"/>
+              </a:lnSpc>
+              <a:buNone/>
+            </a:pPr>
+            <a:r>
+              <a:rPr lang="en-US" sz="1200" b="1" dirty="0">
+                <a:solidFill>
+                  <a:srgbClr val="2F6FA3"/>
+                </a:solidFill>
+                <a:latin typeface="IBM Plex Sans" pitchFamily="34" charset="0"/>
+                <a:ea typeface="IBM Plex Sans" pitchFamily="34" charset="-122"/>
+                <a:cs typeface="IBM Plex Sans" pitchFamily="34" charset="-120"/>
+              </a:rPr>
+              <a:t>Ours</a:t>
+            </a:r>
+            <a:r>
+              <a:rPr lang="en-US" sz="1200" dirty="0">
+                <a:solidFill>
+                  <a:srgbClr val="44524B"/>
+                </a:solidFill>
+                <a:latin typeface="IBM Plex Sans" pitchFamily="34" charset="0"/>
+                <a:ea typeface="IBM Plex Sans" pitchFamily="34" charset="-122"/>
+                <a:cs typeface="IBM Plex Sans" pitchFamily="34" charset="-120"/>
+              </a:rPr>
+              <a:t> ≈ $0, local</a:t>
             </a:r>
             <a:endParaRPr lang="en-US" sz="1200" dirty="0"/>
           </a:p>
@@ -8794,26 +7554,121 @@
       </p:sp>
       <p:sp>
         <p:nvSpPr>
-          <p:cNvPr id="10" name="Shape 7"/>
-          <p:cNvSpPr/>
-          <p:nvPr/>
-        </p:nvSpPr>
-        <p:spPr>
-          <a:xfrm>
-            <a:off x="4388892" y="3870474"/>
-            <a:ext cx="3414216" cy="1213048"/>
-          </a:xfrm>
-          <a:prstGeom prst="roundRect">
-            <a:avLst>
-              <a:gd name="adj" fmla="val 6020"/>
-            </a:avLst>
-          </a:prstGeom>
-          <a:solidFill>
-            <a:srgbClr val="FCFBF7"/>
-          </a:solidFill>
-          <a:ln w="6350">
+          <p:cNvPr id="14" name="Text 12"/>
+          <p:cNvSpPr/>
+          <p:nvPr/>
+        </p:nvSpPr>
+        <p:spPr>
+          <a:xfrm>
+            <a:off x="4438551" y="4627972"/>
+            <a:ext cx="3420733" cy="231114"/>
+          </a:xfrm>
+          <a:prstGeom prst="rect">
+            <a:avLst/>
+          </a:prstGeom>
+          <a:noFill/>
+          <a:ln/>
+        </p:spPr>
+        <p:txBody>
+          <a:bodyPr wrap="square" lIns="0" tIns="0" rIns="0" bIns="0" rtlCol="0" anchor="t">
+            <a:normAutofit/>
+          </a:bodyPr>
+          <a:lstStyle/>
+          <a:p>
+            <a:pPr algn="l" indent="0" marL="0">
+              <a:lnSpc>
+                <a:spcPts val="1620"/>
+              </a:lnSpc>
+              <a:buNone/>
+            </a:pPr>
+            <a:r>
+              <a:rPr lang="en-US" sz="1200" b="1" dirty="0">
+                <a:solidFill>
+                  <a:srgbClr val="A4501C"/>
+                </a:solidFill>
+                <a:latin typeface="IBM Plex Sans" pitchFamily="34" charset="0"/>
+                <a:ea typeface="IBM Plex Sans" pitchFamily="34" charset="-122"/>
+                <a:cs typeface="IBM Plex Sans" pitchFamily="34" charset="-120"/>
+              </a:rPr>
+              <a:t>Today</a:t>
+            </a:r>
+            <a:r>
+              <a:rPr lang="en-US" sz="1200" dirty="0">
+                <a:solidFill>
+                  <a:srgbClr val="44524B"/>
+                </a:solidFill>
+                <a:latin typeface="IBM Plex Sans" pitchFamily="34" charset="0"/>
+                <a:ea typeface="IBM Plex Sans" pitchFamily="34" charset="-122"/>
+                <a:cs typeface="IBM Plex Sans" pitchFamily="34" charset="-120"/>
+              </a:rPr>
+              <a:t> ≈ $19 of Earth Engine compute</a:t>
+            </a:r>
+            <a:endParaRPr lang="en-US" sz="1200" dirty="0"/>
+          </a:p>
+        </p:txBody>
+      </p:sp>
+      <p:sp>
+        <p:nvSpPr>
+          <p:cNvPr id="15" name="Text 13"/>
+          <p:cNvSpPr/>
+          <p:nvPr/>
+        </p:nvSpPr>
+        <p:spPr>
+          <a:xfrm>
+            <a:off x="4438551" y="4897189"/>
+            <a:ext cx="3420733" cy="231114"/>
+          </a:xfrm>
+          <a:prstGeom prst="rect">
+            <a:avLst/>
+          </a:prstGeom>
+          <a:noFill/>
+          <a:ln/>
+        </p:spPr>
+        <p:txBody>
+          <a:bodyPr wrap="square" lIns="0" tIns="0" rIns="0" bIns="0" rtlCol="0" anchor="t">
+            <a:normAutofit/>
+          </a:bodyPr>
+          <a:lstStyle/>
+          <a:p>
+            <a:pPr algn="l" indent="0" marL="0">
+              <a:lnSpc>
+                <a:spcPts val="1620"/>
+              </a:lnSpc>
+              <a:buNone/>
+            </a:pPr>
+            <a:r>
+              <a:rPr lang="en-US" sz="1200" dirty="0">
+                <a:solidFill>
+                  <a:srgbClr val="5E6B64"/>
+                </a:solidFill>
+                <a:latin typeface="IBM Plex Sans" pitchFamily="34" charset="0"/>
+                <a:ea typeface="IBM Plex Sans" pitchFamily="34" charset="-122"/>
+                <a:cs typeface="IBM Plex Sans" pitchFamily="34" charset="-120"/>
+              </a:rPr>
+              <a:t>Cheap either way: the gain is time</a:t>
+            </a:r>
+            <a:endParaRPr lang="en-US" sz="1200" dirty="0"/>
+          </a:p>
+        </p:txBody>
+      </p:sp>
+      <p:sp>
+        <p:nvSpPr>
+          <p:cNvPr id="16" name="Shape 14"/>
+          <p:cNvSpPr/>
+          <p:nvPr/>
+        </p:nvSpPr>
+        <p:spPr>
+          <a:xfrm>
+            <a:off x="8064417" y="3936950"/>
+            <a:ext cx="3321100" cy="0"/>
+          </a:xfrm>
+          <a:prstGeom prst="line">
+            <a:avLst/>
+          </a:prstGeom>
+          <a:noFill/>
+          <a:ln w="38100">
             <a:solidFill>
-              <a:srgbClr val="DDD8CA"/>
+              <a:srgbClr val="C2652A"/>
             </a:solidFill>
             <a:prstDash val="solid"/>
           </a:ln>
@@ -8821,14 +7676,14 @@
       </p:sp>
       <p:sp>
         <p:nvSpPr>
-          <p:cNvPr id="11" name="Text 8"/>
-          <p:cNvSpPr/>
-          <p:nvPr/>
-        </p:nvSpPr>
-        <p:spPr>
-          <a:xfrm>
-            <a:off x="4568775" y="4024970"/>
-            <a:ext cx="3146083" cy="238720"/>
+          <p:cNvPr id="17" name="Text 15"/>
+          <p:cNvSpPr/>
+          <p:nvPr/>
+        </p:nvSpPr>
+        <p:spPr>
+          <a:xfrm>
+            <a:off x="8064417" y="4081940"/>
+            <a:ext cx="3420733" cy="238720"/>
           </a:xfrm>
           <a:prstGeom prst="rect">
             <a:avLst/>
@@ -8857,7 +7712,7 @@
                 <a:ea typeface="IBM Plex Sans" pitchFamily="34" charset="-122"/>
                 <a:cs typeface="IBM Plex Sans" pitchFamily="34" charset="-120"/>
               </a:rPr>
-              <a:t>Files + a small batch job</a:t>
+              <a:t>Fixed cost</a:t>
             </a:r>
             <a:endParaRPr lang="en-US" sz="1400" dirty="0"/>
           </a:p>
@@ -8865,14 +7720,234 @@
       </p:sp>
       <p:sp>
         <p:nvSpPr>
-          <p:cNvPr id="12" name="Text 9"/>
-          <p:cNvSpPr/>
-          <p:nvPr/>
-        </p:nvSpPr>
-        <p:spPr>
-          <a:xfrm>
-            <a:off x="4568775" y="4289059"/>
-            <a:ext cx="3146083" cy="452041"/>
+          <p:cNvPr id="18" name="Text 16"/>
+          <p:cNvSpPr/>
+          <p:nvPr/>
+        </p:nvSpPr>
+        <p:spPr>
+          <a:xfrm>
+            <a:off x="8064417" y="4358760"/>
+            <a:ext cx="3420733" cy="231114"/>
+          </a:xfrm>
+          <a:prstGeom prst="rect">
+            <a:avLst/>
+          </a:prstGeom>
+          <a:noFill/>
+          <a:ln/>
+        </p:spPr>
+        <p:txBody>
+          <a:bodyPr wrap="square" lIns="0" tIns="0" rIns="0" bIns="0" rtlCol="0" anchor="t">
+            <a:normAutofit/>
+          </a:bodyPr>
+          <a:lstStyle/>
+          <a:p>
+            <a:pPr algn="l" indent="0" marL="0">
+              <a:lnSpc>
+                <a:spcPts val="1620"/>
+              </a:lnSpc>
+              <a:buNone/>
+            </a:pPr>
+            <a:r>
+              <a:rPr lang="en-US" sz="1200" b="1" dirty="0">
+                <a:solidFill>
+                  <a:srgbClr val="2F6FA3"/>
+                </a:solidFill>
+                <a:latin typeface="IBM Plex Sans" pitchFamily="34" charset="0"/>
+                <a:ea typeface="IBM Plex Sans" pitchFamily="34" charset="-122"/>
+                <a:cs typeface="IBM Plex Sans" pitchFamily="34" charset="-120"/>
+              </a:rPr>
+              <a:t>Ours</a:t>
+            </a:r>
+            <a:r>
+              <a:rPr lang="en-US" sz="1200" dirty="0">
+                <a:solidFill>
+                  <a:srgbClr val="44524B"/>
+                </a:solidFill>
+                <a:latin typeface="IBM Plex Sans" pitchFamily="34" charset="0"/>
+                <a:ea typeface="IBM Plex Sans" pitchFamily="34" charset="-122"/>
+                <a:cs typeface="IBM Plex Sans" pitchFamily="34" charset="-120"/>
+              </a:rPr>
+              <a:t> under $1/month</a:t>
+            </a:r>
+            <a:endParaRPr lang="en-US" sz="1200" dirty="0"/>
+          </a:p>
+        </p:txBody>
+      </p:sp>
+      <p:sp>
+        <p:nvSpPr>
+          <p:cNvPr id="19" name="Text 17"/>
+          <p:cNvSpPr/>
+          <p:nvPr/>
+        </p:nvSpPr>
+        <p:spPr>
+          <a:xfrm>
+            <a:off x="8064417" y="4627972"/>
+            <a:ext cx="3420733" cy="231114"/>
+          </a:xfrm>
+          <a:prstGeom prst="rect">
+            <a:avLst/>
+          </a:prstGeom>
+          <a:noFill/>
+          <a:ln/>
+        </p:spPr>
+        <p:txBody>
+          <a:bodyPr wrap="square" lIns="0" tIns="0" rIns="0" bIns="0" rtlCol="0" anchor="t">
+            <a:normAutofit/>
+          </a:bodyPr>
+          <a:lstStyle/>
+          <a:p>
+            <a:pPr algn="l" indent="0" marL="0">
+              <a:lnSpc>
+                <a:spcPts val="1620"/>
+              </a:lnSpc>
+              <a:buNone/>
+            </a:pPr>
+            <a:r>
+              <a:rPr lang="en-US" sz="1200" b="1" dirty="0">
+                <a:solidFill>
+                  <a:srgbClr val="A4501C"/>
+                </a:solidFill>
+                <a:latin typeface="IBM Plex Sans" pitchFamily="34" charset="0"/>
+                <a:ea typeface="IBM Plex Sans" pitchFamily="34" charset="-122"/>
+                <a:cs typeface="IBM Plex Sans" pitchFamily="34" charset="-120"/>
+              </a:rPr>
+              <a:t>Today</a:t>
+            </a:r>
+            <a:r>
+              <a:rPr lang="en-US" sz="1200" dirty="0">
+                <a:solidFill>
+                  <a:srgbClr val="44524B"/>
+                </a:solidFill>
+                <a:latin typeface="IBM Plex Sans" pitchFamily="34" charset="0"/>
+                <a:ea typeface="IBM Plex Sans" pitchFamily="34" charset="-122"/>
+                <a:cs typeface="IBM Plex Sans" pitchFamily="34" charset="-120"/>
+              </a:rPr>
+              <a:t> $500/month Enterprise Basic</a:t>
+            </a:r>
+            <a:endParaRPr lang="en-US" sz="1200" dirty="0"/>
+          </a:p>
+        </p:txBody>
+      </p:sp>
+      <p:sp>
+        <p:nvSpPr>
+          <p:cNvPr id="20" name="Text 18"/>
+          <p:cNvSpPr/>
+          <p:nvPr/>
+        </p:nvSpPr>
+        <p:spPr>
+          <a:xfrm>
+            <a:off x="8064417" y="4897189"/>
+            <a:ext cx="3420733" cy="231114"/>
+          </a:xfrm>
+          <a:prstGeom prst="rect">
+            <a:avLst/>
+          </a:prstGeom>
+          <a:noFill/>
+          <a:ln/>
+        </p:spPr>
+        <p:txBody>
+          <a:bodyPr wrap="square" lIns="0" tIns="0" rIns="0" bIns="0" rtlCol="0" anchor="t">
+            <a:normAutofit/>
+          </a:bodyPr>
+          <a:lstStyle/>
+          <a:p>
+            <a:pPr algn="l" indent="0" marL="0">
+              <a:lnSpc>
+                <a:spcPts val="1620"/>
+              </a:lnSpc>
+              <a:buNone/>
+            </a:pPr>
+            <a:r>
+              <a:rPr lang="en-US" sz="1200" dirty="0">
+                <a:solidFill>
+                  <a:srgbClr val="5E6B64"/>
+                </a:solidFill>
+                <a:latin typeface="IBM Plex Sans" pitchFamily="34" charset="0"/>
+                <a:ea typeface="IBM Plex Sans" pitchFamily="34" charset="-122"/>
+                <a:cs typeface="IBM Plex Sans" pitchFamily="34" charset="-120"/>
+              </a:rPr>
+              <a:t>Could be freed if nothing else needs it</a:t>
+            </a:r>
+            <a:endParaRPr lang="en-US" sz="1200" dirty="0"/>
+          </a:p>
+        </p:txBody>
+      </p:sp>
+      <p:sp>
+        <p:nvSpPr>
+          <p:cNvPr id="21" name="Shape 19"/>
+          <p:cNvSpPr/>
+          <p:nvPr/>
+        </p:nvSpPr>
+        <p:spPr>
+          <a:xfrm>
+            <a:off x="3378150" y="3333750"/>
+            <a:ext cx="227707" cy="292034"/>
+          </a:xfrm>
+          <a:prstGeom prst="roundRect">
+            <a:avLst>
+              <a:gd name="adj" fmla="val 16732"/>
+            </a:avLst>
+          </a:prstGeom>
+          <a:solidFill>
+            <a:srgbClr val="2F6FA3"/>
+          </a:solidFill>
+          <a:ln/>
+        </p:spPr>
+      </p:sp>
+      <p:sp>
+        <p:nvSpPr>
+          <p:cNvPr id="22" name="Text 20"/>
+          <p:cNvSpPr/>
+          <p:nvPr/>
+        </p:nvSpPr>
+        <p:spPr>
+          <a:xfrm>
+            <a:off x="10096500" y="3340032"/>
+            <a:ext cx="1539180" cy="330167"/>
+          </a:xfrm>
+          <a:prstGeom prst="rect">
+            <a:avLst/>
+          </a:prstGeom>
+          <a:noFill/>
+          <a:ln/>
+        </p:spPr>
+        <p:txBody>
+          <a:bodyPr wrap="square" lIns="0" tIns="0" rIns="0" bIns="0" rtlCol="0" anchor="t">
+            <a:normAutofit/>
+          </a:bodyPr>
+          <a:lstStyle/>
+          <a:p>
+            <a:pPr algn="l" indent="0" marL="0">
+              <a:lnSpc>
+                <a:spcPts val="2400"/>
+              </a:lnSpc>
+              <a:buNone/>
+            </a:pPr>
+            <a:r>
+              <a:rPr lang="en-US" sz="2400" b="1" dirty="0">
+                <a:solidFill>
+                  <a:srgbClr val="2F6FA3"/>
+                </a:solidFill>
+                <a:latin typeface="Source Serif 4" pitchFamily="18" charset="0"/>
+                <a:ea typeface="Source Serif 4" pitchFamily="18" charset="-122"/>
+                <a:cs typeface="Source Serif 4" pitchFamily="18" charset="-120"/>
+              </a:rPr>
+              <a:t>≈ 11 min</a:t>
+            </a:r>
+            <a:endParaRPr lang="en-US" sz="2400" dirty="0"/>
+          </a:p>
+        </p:txBody>
+      </p:sp>
+      <p:sp>
+        <p:nvSpPr>
+          <p:cNvPr id="23" name="Text 21"/>
+          <p:cNvSpPr/>
+          <p:nvPr/>
+        </p:nvSpPr>
+        <p:spPr>
+          <a:xfrm>
+            <a:off x="812767" y="1752532"/>
+            <a:ext cx="10889933" cy="238720"/>
           </a:xfrm>
           <a:prstGeom prst="rect">
             <a:avLst/>
@@ -8893,15 +7968,15 @@
               <a:buNone/>
             </a:pPr>
             <a:r>
-              <a:rPr lang="en-US" sz="1200" dirty="0">
-                <a:solidFill>
-                  <a:srgbClr val="44524B"/>
+              <a:rPr lang="en-US" sz="1200" b="1" spc="50" kern="0" dirty="0">
+                <a:solidFill>
+                  <a:srgbClr val="5E6B64"/>
                 </a:solidFill>
                 <a:latin typeface="IBM Plex Sans" pitchFamily="34" charset="0"/>
                 <a:ea typeface="IBM Plex Sans" pitchFamily="34" charset="-122"/>
                 <a:cs typeface="IBM Plex Sans" pitchFamily="34" charset="-120"/>
               </a:rPr>
-              <a:t>Nothing to keep running. Trade-off: a start-up cost on each run.</a:t>
+              <a:t>RE-CHECKING ALL OF IVORY COAST: 1 MILLION PLOTS</a:t>
             </a:r>
             <a:endParaRPr lang="en-US" sz="1200" dirty="0"/>
           </a:p>
@@ -8909,41 +7984,58 @@
       </p:sp>
       <p:sp>
         <p:nvSpPr>
-          <p:cNvPr id="13" name="Shape 10"/>
-          <p:cNvSpPr/>
-          <p:nvPr/>
-        </p:nvSpPr>
-        <p:spPr>
-          <a:xfrm>
-            <a:off x="7961841" y="3870474"/>
-            <a:ext cx="3414216" cy="1213048"/>
-          </a:xfrm>
-          <a:prstGeom prst="roundRect">
-            <a:avLst>
-              <a:gd name="adj" fmla="val 6020"/>
-            </a:avLst>
-          </a:prstGeom>
-          <a:solidFill>
-            <a:srgbClr val="FCFBF7"/>
-          </a:solidFill>
-          <a:ln w="6350">
-            <a:solidFill>
-              <a:srgbClr val="DDD8CA"/>
-            </a:solidFill>
-            <a:prstDash val="solid"/>
-          </a:ln>
-        </p:spPr>
-      </p:sp>
-      <p:sp>
-        <p:nvSpPr>
-          <p:cNvPr id="14" name="Text 11"/>
-          <p:cNvSpPr/>
-          <p:nvPr/>
-        </p:nvSpPr>
-        <p:spPr>
-          <a:xfrm>
-            <a:off x="8141725" y="4024970"/>
-            <a:ext cx="3146083" cy="238720"/>
+          <p:cNvPr id="24" name="Text 22"/>
+          <p:cNvSpPr/>
+          <p:nvPr/>
+        </p:nvSpPr>
+        <p:spPr>
+          <a:xfrm>
+            <a:off x="812767" y="2095500"/>
+            <a:ext cx="2485390" cy="256497"/>
+          </a:xfrm>
+          <a:prstGeom prst="rect">
+            <a:avLst/>
+          </a:prstGeom>
+          <a:noFill/>
+          <a:ln/>
+        </p:spPr>
+        <p:txBody>
+          <a:bodyPr wrap="square" lIns="0" tIns="0" rIns="0" bIns="0" rtlCol="0" anchor="t">
+            <a:normAutofit/>
+          </a:bodyPr>
+          <a:lstStyle/>
+          <a:p>
+            <a:pPr algn="l" indent="0" marL="0">
+              <a:lnSpc>
+                <a:spcPts val="1820"/>
+              </a:lnSpc>
+              <a:buNone/>
+            </a:pPr>
+            <a:r>
+              <a:rPr lang="en-US" sz="1300" b="1" dirty="0">
+                <a:solidFill>
+                  <a:srgbClr val="17332B"/>
+                </a:solidFill>
+                <a:latin typeface="IBM Plex Sans" pitchFamily="34" charset="0"/>
+                <a:ea typeface="IBM Plex Sans" pitchFamily="34" charset="-122"/>
+                <a:cs typeface="IBM Plex Sans" pitchFamily="34" charset="-120"/>
+              </a:rPr>
+              <a:t>Earth Engine</a:t>
+            </a:r>
+            <a:endParaRPr lang="en-US" sz="1300" dirty="0"/>
+          </a:p>
+        </p:txBody>
+      </p:sp>
+      <p:sp>
+        <p:nvSpPr>
+          <p:cNvPr id="25" name="Text 23"/>
+          <p:cNvSpPr/>
+          <p:nvPr/>
+        </p:nvSpPr>
+        <p:spPr>
+          <a:xfrm>
+            <a:off x="812767" y="2339243"/>
+            <a:ext cx="2485390" cy="238720"/>
           </a:xfrm>
           <a:prstGeom prst="rect">
             <a:avLst/>
@@ -8964,30 +8056,140 @@
               <a:buNone/>
             </a:pPr>
             <a:r>
-              <a:rPr lang="en-US" sz="1400" b="1" dirty="0">
-                <a:solidFill>
-                  <a:srgbClr val="17332B"/>
+              <a:rPr lang="en-US" sz="1200" dirty="0">
+                <a:solidFill>
+                  <a:srgbClr val="5E6B64"/>
                 </a:solidFill>
                 <a:latin typeface="IBM Plex Sans" pitchFamily="34" charset="0"/>
                 <a:ea typeface="IBM Plex Sans" pitchFamily="34" charset="-122"/>
                 <a:cs typeface="IBM Plex Sans" pitchFamily="34" charset="-120"/>
               </a:rPr>
-              <a:t>Option: direct downloads</a:t>
-            </a:r>
-            <a:endParaRPr lang="en-US" sz="1400" dirty="0"/>
-          </a:p>
-        </p:txBody>
-      </p:sp>
-      <p:sp>
-        <p:nvSpPr>
-          <p:cNvPr id="15" name="Text 12"/>
-          <p:cNvSpPr/>
-          <p:nvPr/>
-        </p:nvSpPr>
-        <p:spPr>
-          <a:xfrm>
-            <a:off x="8141725" y="4289059"/>
-            <a:ext cx="3146083" cy="665361"/>
+              <a:t>one request at a time, 20 at once</a:t>
+            </a:r>
+            <a:endParaRPr lang="en-US" sz="1200" dirty="0"/>
+          </a:p>
+        </p:txBody>
+      </p:sp>
+      <p:sp>
+        <p:nvSpPr>
+          <p:cNvPr id="26" name="Shape 24"/>
+          <p:cNvSpPr/>
+          <p:nvPr/>
+        </p:nvSpPr>
+        <p:spPr>
+          <a:xfrm>
+            <a:off x="3378150" y="2184301"/>
+            <a:ext cx="7161526" cy="279383"/>
+          </a:xfrm>
+          <a:prstGeom prst="roundRect">
+            <a:avLst>
+              <a:gd name="adj" fmla="val 13637"/>
+            </a:avLst>
+          </a:prstGeom>
+          <a:solidFill>
+            <a:srgbClr val="A4501C"/>
+          </a:solidFill>
+          <a:ln/>
+        </p:spPr>
+      </p:sp>
+      <p:sp>
+        <p:nvSpPr>
+          <p:cNvPr id="27" name="Text 25"/>
+          <p:cNvSpPr/>
+          <p:nvPr/>
+        </p:nvSpPr>
+        <p:spPr>
+          <a:xfrm>
+            <a:off x="10666677" y="2171650"/>
+            <a:ext cx="862608" cy="330167"/>
+          </a:xfrm>
+          <a:prstGeom prst="rect">
+            <a:avLst/>
+          </a:prstGeom>
+          <a:noFill/>
+          <a:ln/>
+        </p:spPr>
+        <p:txBody>
+          <a:bodyPr wrap="square" lIns="0" tIns="0" rIns="0" bIns="0" rtlCol="0" anchor="t">
+            <a:normAutofit/>
+          </a:bodyPr>
+          <a:lstStyle/>
+          <a:p>
+            <a:pPr algn="l" indent="0" marL="0">
+              <a:lnSpc>
+                <a:spcPts val="2400"/>
+              </a:lnSpc>
+              <a:buNone/>
+            </a:pPr>
+            <a:r>
+              <a:rPr lang="en-US" sz="2400" b="1" dirty="0">
+                <a:solidFill>
+                  <a:srgbClr val="A4501C"/>
+                </a:solidFill>
+                <a:latin typeface="Source Serif 4" pitchFamily="18" charset="0"/>
+                <a:ea typeface="Source Serif 4" pitchFamily="18" charset="-122"/>
+                <a:cs typeface="Source Serif 4" pitchFamily="18" charset="-120"/>
+              </a:rPr>
+              <a:t>≈ 7 h</a:t>
+            </a:r>
+            <a:endParaRPr lang="en-US" sz="2400" dirty="0"/>
+          </a:p>
+        </p:txBody>
+      </p:sp>
+      <p:sp>
+        <p:nvSpPr>
+          <p:cNvPr id="28" name="Text 26"/>
+          <p:cNvSpPr/>
+          <p:nvPr/>
+        </p:nvSpPr>
+        <p:spPr>
+          <a:xfrm>
+            <a:off x="812767" y="2679650"/>
+            <a:ext cx="2485390" cy="256497"/>
+          </a:xfrm>
+          <a:prstGeom prst="rect">
+            <a:avLst/>
+          </a:prstGeom>
+          <a:noFill/>
+          <a:ln/>
+        </p:spPr>
+        <p:txBody>
+          <a:bodyPr wrap="square" lIns="0" tIns="0" rIns="0" bIns="0" rtlCol="0" anchor="t">
+            <a:normAutofit/>
+          </a:bodyPr>
+          <a:lstStyle/>
+          <a:p>
+            <a:pPr algn="l" indent="0" marL="0">
+              <a:lnSpc>
+                <a:spcPts val="1820"/>
+              </a:lnSpc>
+              <a:buNone/>
+            </a:pPr>
+            <a:r>
+              <a:rPr lang="en-US" sz="1300" b="1" dirty="0">
+                <a:solidFill>
+                  <a:srgbClr val="17332B"/>
+                </a:solidFill>
+                <a:latin typeface="IBM Plex Sans" pitchFamily="34" charset="0"/>
+                <a:ea typeface="IBM Plex Sans" pitchFamily="34" charset="-122"/>
+                <a:cs typeface="IBM Plex Sans" pitchFamily="34" charset="-120"/>
+              </a:rPr>
+              <a:t>Earth Engine, batched</a:t>
+            </a:r>
+            <a:endParaRPr lang="en-US" sz="1300" dirty="0"/>
+          </a:p>
+        </p:txBody>
+      </p:sp>
+      <p:sp>
+        <p:nvSpPr>
+          <p:cNvPr id="29" name="Text 27"/>
+          <p:cNvSpPr/>
+          <p:nvPr/>
+        </p:nvSpPr>
+        <p:spPr>
+          <a:xfrm>
+            <a:off x="812767" y="2923394"/>
+            <a:ext cx="2485390" cy="238720"/>
           </a:xfrm>
           <a:prstGeom prst="rect">
             <a:avLst/>
@@ -9010,13 +8212,13 @@
             <a:r>
               <a:rPr lang="en-US" sz="1200" dirty="0">
                 <a:solidFill>
-                  <a:srgbClr val="44524B"/>
+                  <a:srgbClr val="5E6B64"/>
                 </a:solidFill>
                 <a:latin typeface="IBM Plex Sans" pitchFamily="34" charset="0"/>
                 <a:ea typeface="IBM Plex Sans" pitchFamily="34" charset="-122"/>
                 <a:cs typeface="IBM Plex Sans" pitchFamily="34" charset="-120"/>
               </a:rPr>
-              <a:t>Hansen and GFC2020 are public files: could free the $500/month plan, if nothing else needs it.</a:t>
+              <a:t>500 plots per request</a:t>
             </a:r>
             <a:endParaRPr lang="en-US" sz="1200" dirty="0"/>
           </a:p>
@@ -9024,14 +8226,58 @@
       </p:sp>
       <p:sp>
         <p:nvSpPr>
-          <p:cNvPr id="16" name="Text 13"/>
-          <p:cNvSpPr/>
-          <p:nvPr/>
-        </p:nvSpPr>
-        <p:spPr>
-          <a:xfrm>
-            <a:off x="812767" y="6235731"/>
-            <a:ext cx="8220670" cy="241283"/>
+          <p:cNvPr id="30" name="Text 28"/>
+          <p:cNvSpPr/>
+          <p:nvPr/>
+        </p:nvSpPr>
+        <p:spPr>
+          <a:xfrm>
+            <a:off x="812767" y="3263881"/>
+            <a:ext cx="2485390" cy="256497"/>
+          </a:xfrm>
+          <a:prstGeom prst="rect">
+            <a:avLst/>
+          </a:prstGeom>
+          <a:noFill/>
+          <a:ln/>
+        </p:spPr>
+        <p:txBody>
+          <a:bodyPr wrap="square" lIns="0" tIns="0" rIns="0" bIns="0" rtlCol="0" anchor="t">
+            <a:normAutofit/>
+          </a:bodyPr>
+          <a:lstStyle/>
+          <a:p>
+            <a:pPr algn="l" indent="0" marL="0">
+              <a:lnSpc>
+                <a:spcPts val="1820"/>
+              </a:lnSpc>
+              <a:buNone/>
+            </a:pPr>
+            <a:r>
+              <a:rPr lang="en-US" sz="1300" b="1" dirty="0">
+                <a:solidFill>
+                  <a:srgbClr val="17332B"/>
+                </a:solidFill>
+                <a:latin typeface="IBM Plex Sans" pitchFamily="34" charset="0"/>
+                <a:ea typeface="IBM Plex Sans" pitchFamily="34" charset="-122"/>
+                <a:cs typeface="IBM Plex Sans" pitchFamily="34" charset="-120"/>
+              </a:rPr>
+              <a:t>Our store</a:t>
+            </a:r>
+            <a:endParaRPr lang="en-US" sz="1300" dirty="0"/>
+          </a:p>
+        </p:txBody>
+      </p:sp>
+      <p:sp>
+        <p:nvSpPr>
+          <p:cNvPr id="31" name="Text 29"/>
+          <p:cNvSpPr/>
+          <p:nvPr/>
+        </p:nvSpPr>
+        <p:spPr>
+          <a:xfrm>
+            <a:off x="812767" y="3507631"/>
+            <a:ext cx="2485390" cy="238720"/>
           </a:xfrm>
           <a:prstGeom prst="rect">
             <a:avLst/>
@@ -9060,7 +8306,7 @@
                 <a:ea typeface="IBM Plex Sans" pitchFamily="34" charset="-122"/>
                 <a:cs typeface="IBM Plex Sans" pitchFamily="34" charset="-120"/>
               </a:rPr>
-              <a:t>Prices approximate; Earth Engine pricing read 14 Oct 2026 · extraction per release not yet measured</a:t>
+              <a:t>one core, local files</a:t>
             </a:r>
             <a:endParaRPr lang="en-US" sz="1200" dirty="0"/>
           </a:p>
@@ -9068,14 +8314,36 @@
       </p:sp>
       <p:sp>
         <p:nvSpPr>
-          <p:cNvPr id="17" name="Text 14"/>
-          <p:cNvSpPr/>
-          <p:nvPr/>
-        </p:nvSpPr>
-        <p:spPr>
-          <a:xfrm>
-            <a:off x="11145457" y="6235731"/>
-            <a:ext cx="233693" cy="241283"/>
+          <p:cNvPr id="32" name="Shape 30"/>
+          <p:cNvSpPr/>
+          <p:nvPr/>
+        </p:nvSpPr>
+        <p:spPr>
+          <a:xfrm>
+            <a:off x="3378150" y="2755881"/>
+            <a:ext cx="4582997" cy="292034"/>
+          </a:xfrm>
+          <a:prstGeom prst="roundRect">
+            <a:avLst>
+              <a:gd name="adj" fmla="val 13046"/>
+            </a:avLst>
+          </a:prstGeom>
+          <a:solidFill>
+            <a:srgbClr val="C2652A"/>
+          </a:solidFill>
+          <a:ln/>
+        </p:spPr>
+      </p:sp>
+      <p:sp>
+        <p:nvSpPr>
+          <p:cNvPr id="33" name="Text 31"/>
+          <p:cNvSpPr/>
+          <p:nvPr/>
+        </p:nvSpPr>
+        <p:spPr>
+          <a:xfrm>
+            <a:off x="10407633" y="2755881"/>
+            <a:ext cx="1181100" cy="330167"/>
           </a:xfrm>
           <a:prstGeom prst="rect">
             <a:avLst/>
@@ -9089,24 +8357,24 @@
           </a:bodyPr>
           <a:lstStyle/>
           <a:p>
-            <a:pPr algn="r" indent="0" marL="0">
+            <a:pPr algn="l" indent="0" marL="0">
               <a:lnSpc>
-                <a:spcPts val="1680"/>
+                <a:spcPts val="2400"/>
               </a:lnSpc>
               <a:buNone/>
             </a:pPr>
             <a:r>
-              <a:rPr lang="en-US" sz="1200" dirty="0">
-                <a:solidFill>
-                  <a:srgbClr val="5E6B64"/>
-                </a:solidFill>
-                <a:latin typeface="IBM Plex Sans" pitchFamily="34" charset="0"/>
-                <a:ea typeface="IBM Plex Sans" pitchFamily="34" charset="-122"/>
-                <a:cs typeface="IBM Plex Sans" pitchFamily="34" charset="-120"/>
+              <a:rPr lang="en-US" sz="2400" b="1" dirty="0">
+                <a:solidFill>
+                  <a:srgbClr val="C2652A"/>
+                </a:solidFill>
+                <a:latin typeface="Source Serif 4" pitchFamily="18" charset="0"/>
+                <a:ea typeface="Source Serif 4" pitchFamily="18" charset="-122"/>
+                <a:cs typeface="Source Serif 4" pitchFamily="18" charset="-120"/>
               </a:rPr>
-              <a:t>14</a:t>
-            </a:r>
-            <a:endParaRPr lang="en-US" sz="1200" dirty="0"/>
+              <a:t>≈ 4.4 h</a:t>
+            </a:r>
+            <a:endParaRPr lang="en-US" sz="2400" dirty="0"/>
           </a:p>
         </p:txBody>
       </p:sp>
